--- a/Презентация .pptx
+++ b/Презентация .pptx
@@ -553,7 +553,7 @@
       </p:grpSpPr>
       <p:sp>
         <p:nvSpPr>
-          <p:cNvPr id="913131863" name="Верхний колонтитул 1"/>
+          <p:cNvPr id="1913433061" name="Верхний колонтитул 1"/>
           <p:cNvSpPr>
             <a:spLocks noGrp="1"/>
           </p:cNvSpPr>
@@ -587,7 +587,7 @@
       </p:sp>
       <p:sp>
         <p:nvSpPr>
-          <p:cNvPr id="252266002" name="Дата 2"/>
+          <p:cNvPr id="58732188" name="Дата 2"/>
           <p:cNvSpPr>
             <a:spLocks noGrp="1"/>
           </p:cNvSpPr>
@@ -625,7 +625,7 @@
       </p:sp>
       <p:sp>
         <p:nvSpPr>
-          <p:cNvPr id="1068285088" name="Образ слайда 3"/>
+          <p:cNvPr id="105570813" name="Образ слайда 3"/>
           <p:cNvSpPr>
             <a:spLocks noChangeAspect="1" noGrp="1" noRot="1"/>
           </p:cNvSpPr>
@@ -661,7 +661,7 @@
       </p:sp>
       <p:sp>
         <p:nvSpPr>
-          <p:cNvPr id="993722191" name="Заметки 4"/>
+          <p:cNvPr id="375477049" name="Заметки 4"/>
           <p:cNvSpPr>
             <a:spLocks noGrp="1"/>
           </p:cNvSpPr>
@@ -735,7 +735,7 @@
       </p:sp>
       <p:sp>
         <p:nvSpPr>
-          <p:cNvPr id="2038196942" name="Нижний колонтитул 5"/>
+          <p:cNvPr id="1515047366" name="Нижний колонтитул 5"/>
           <p:cNvSpPr>
             <a:spLocks noGrp="1"/>
           </p:cNvSpPr>
@@ -769,7 +769,7 @@
       </p:sp>
       <p:sp>
         <p:nvSpPr>
-          <p:cNvPr id="1108172925" name="Номер слайда 6"/>
+          <p:cNvPr id="906883902" name="Номер слайда 6"/>
           <p:cNvSpPr>
             <a:spLocks noGrp="1"/>
           </p:cNvSpPr>
@@ -922,7 +922,7 @@
       </p:grpSpPr>
       <p:sp>
         <p:nvSpPr>
-          <p:cNvPr id="493512285" name="Slide Image Placeholder 1"/>
+          <p:cNvPr id="1948097269" name="Slide Image Placeholder 1"/>
           <p:cNvSpPr>
             <a:spLocks noChangeAspect="1" noGrp="1" noRot="1"/>
           </p:cNvSpPr>
@@ -934,7 +934,7 @@
       </p:sp>
       <p:sp>
         <p:nvSpPr>
-          <p:cNvPr id="599329535" name="Notes Placeholder 2"/>
+          <p:cNvPr id="1220699666" name="Notes Placeholder 2"/>
           <p:cNvSpPr>
             <a:spLocks noGrp="1"/>
           </p:cNvSpPr>
@@ -956,7 +956,7 @@
       </p:sp>
       <p:sp>
         <p:nvSpPr>
-          <p:cNvPr id="1062148816" name="Slide Number Placeholder 3"/>
+          <p:cNvPr id="1240790983" name="Slide Number Placeholder 3"/>
           <p:cNvSpPr>
             <a:spLocks noGrp="1"/>
           </p:cNvSpPr>
@@ -1007,7 +1007,7 @@
       </p:grpSpPr>
       <p:sp>
         <p:nvSpPr>
-          <p:cNvPr id="1604263941" name="Slide Image Placeholder 1"/>
+          <p:cNvPr id="296872050" name="Slide Image Placeholder 1"/>
           <p:cNvSpPr>
             <a:spLocks noChangeAspect="1" noGrp="1" noRot="1"/>
           </p:cNvSpPr>
@@ -1019,7 +1019,7 @@
       </p:sp>
       <p:sp>
         <p:nvSpPr>
-          <p:cNvPr id="1481113010" name="Notes Placeholder 2"/>
+          <p:cNvPr id="864100848" name="Notes Placeholder 2"/>
           <p:cNvSpPr>
             <a:spLocks noGrp="1"/>
           </p:cNvSpPr>
@@ -1041,7 +1041,7 @@
       </p:sp>
       <p:sp>
         <p:nvSpPr>
-          <p:cNvPr id="1878538473" name="Slide Number Placeholder 3"/>
+          <p:cNvPr id="1983350655" name="Slide Number Placeholder 3"/>
           <p:cNvSpPr>
             <a:spLocks noGrp="1"/>
           </p:cNvSpPr>
@@ -1092,7 +1092,7 @@
       </p:grpSpPr>
       <p:sp>
         <p:nvSpPr>
-          <p:cNvPr id="632071126" name="Slide Image Placeholder 1"/>
+          <p:cNvPr id="1285329555" name="Slide Image Placeholder 1"/>
           <p:cNvSpPr>
             <a:spLocks noChangeAspect="1" noGrp="1" noRot="1"/>
           </p:cNvSpPr>
@@ -1104,7 +1104,7 @@
       </p:sp>
       <p:sp>
         <p:nvSpPr>
-          <p:cNvPr id="700272960" name="Notes Placeholder 2"/>
+          <p:cNvPr id="896278353" name="Notes Placeholder 2"/>
           <p:cNvSpPr>
             <a:spLocks noGrp="1"/>
           </p:cNvSpPr>
@@ -1126,7 +1126,7 @@
       </p:sp>
       <p:sp>
         <p:nvSpPr>
-          <p:cNvPr id="1168049026" name="Slide Number Placeholder 3"/>
+          <p:cNvPr id="474824082" name="Slide Number Placeholder 3"/>
           <p:cNvSpPr>
             <a:spLocks noGrp="1"/>
           </p:cNvSpPr>
@@ -1177,7 +1177,7 @@
       </p:grpSpPr>
       <p:sp>
         <p:nvSpPr>
-          <p:cNvPr id="1669642711" name="Slide Image Placeholder 1"/>
+          <p:cNvPr id="1740164907" name="Slide Image Placeholder 1"/>
           <p:cNvSpPr>
             <a:spLocks noChangeAspect="1" noGrp="1" noRot="1"/>
           </p:cNvSpPr>
@@ -1189,7 +1189,7 @@
       </p:sp>
       <p:sp>
         <p:nvSpPr>
-          <p:cNvPr id="1095207757" name="Notes Placeholder 2"/>
+          <p:cNvPr id="715976550" name="Notes Placeholder 2"/>
           <p:cNvSpPr>
             <a:spLocks noGrp="1"/>
           </p:cNvSpPr>
@@ -1211,7 +1211,7 @@
       </p:sp>
       <p:sp>
         <p:nvSpPr>
-          <p:cNvPr id="750284896" name="Slide Number Placeholder 3"/>
+          <p:cNvPr id="2138517074" name="Slide Number Placeholder 3"/>
           <p:cNvSpPr>
             <a:spLocks noGrp="1"/>
           </p:cNvSpPr>
@@ -1262,7 +1262,7 @@
       </p:grpSpPr>
       <p:sp>
         <p:nvSpPr>
-          <p:cNvPr id="1127738764" name="Slide Image Placeholder 1"/>
+          <p:cNvPr id="1299357455" name="Slide Image Placeholder 1"/>
           <p:cNvSpPr>
             <a:spLocks noChangeAspect="1" noGrp="1" noRot="1"/>
           </p:cNvSpPr>
@@ -1274,7 +1274,7 @@
       </p:sp>
       <p:sp>
         <p:nvSpPr>
-          <p:cNvPr id="303428675" name="Notes Placeholder 2"/>
+          <p:cNvPr id="1285419015" name="Notes Placeholder 2"/>
           <p:cNvSpPr>
             <a:spLocks noGrp="1"/>
           </p:cNvSpPr>
@@ -1296,7 +1296,7 @@
       </p:sp>
       <p:sp>
         <p:nvSpPr>
-          <p:cNvPr id="1196048557" name="Slide Number Placeholder 3"/>
+          <p:cNvPr id="1405896994" name="Slide Number Placeholder 3"/>
           <p:cNvSpPr>
             <a:spLocks noGrp="1"/>
           </p:cNvSpPr>
@@ -1347,7 +1347,7 @@
       </p:grpSpPr>
       <p:sp>
         <p:nvSpPr>
-          <p:cNvPr id="1026811182" name="Slide Image Placeholder 1"/>
+          <p:cNvPr id="1625351437" name="Slide Image Placeholder 1"/>
           <p:cNvSpPr>
             <a:spLocks noChangeAspect="1" noGrp="1" noRot="1"/>
           </p:cNvSpPr>
@@ -1359,7 +1359,7 @@
       </p:sp>
       <p:sp>
         <p:nvSpPr>
-          <p:cNvPr id="266282421" name="Notes Placeholder 2"/>
+          <p:cNvPr id="767991196" name="Notes Placeholder 2"/>
           <p:cNvSpPr>
             <a:spLocks noGrp="1"/>
           </p:cNvSpPr>
@@ -1381,7 +1381,7 @@
       </p:sp>
       <p:sp>
         <p:nvSpPr>
-          <p:cNvPr id="1351231841" name="Slide Number Placeholder 3"/>
+          <p:cNvPr id="1808432060" name="Slide Number Placeholder 3"/>
           <p:cNvSpPr>
             <a:spLocks noGrp="1"/>
           </p:cNvSpPr>
@@ -1432,7 +1432,7 @@
       </p:grpSpPr>
       <p:sp>
         <p:nvSpPr>
-          <p:cNvPr id="1423354636" name="Slide Image Placeholder 1"/>
+          <p:cNvPr id="1279817297" name="Slide Image Placeholder 1"/>
           <p:cNvSpPr>
             <a:spLocks noChangeAspect="1" noGrp="1" noRot="1"/>
           </p:cNvSpPr>
@@ -1444,7 +1444,7 @@
       </p:sp>
       <p:sp>
         <p:nvSpPr>
-          <p:cNvPr id="984699700" name="Notes Placeholder 2"/>
+          <p:cNvPr id="1969383721" name="Notes Placeholder 2"/>
           <p:cNvSpPr>
             <a:spLocks noGrp="1"/>
           </p:cNvSpPr>
@@ -1466,7 +1466,7 @@
       </p:sp>
       <p:sp>
         <p:nvSpPr>
-          <p:cNvPr id="850298488" name="Slide Number Placeholder 3"/>
+          <p:cNvPr id="1386401558" name="Slide Number Placeholder 3"/>
           <p:cNvSpPr>
             <a:spLocks noGrp="1"/>
           </p:cNvSpPr>
@@ -1517,7 +1517,7 @@
       </p:grpSpPr>
       <p:sp>
         <p:nvSpPr>
-          <p:cNvPr id="1835694610" name="Slide Image Placeholder 1"/>
+          <p:cNvPr id="1290264239" name="Slide Image Placeholder 1"/>
           <p:cNvSpPr>
             <a:spLocks noChangeAspect="1" noGrp="1" noRot="1"/>
           </p:cNvSpPr>
@@ -1529,7 +1529,7 @@
       </p:sp>
       <p:sp>
         <p:nvSpPr>
-          <p:cNvPr id="70601671" name="Notes Placeholder 2"/>
+          <p:cNvPr id="618836791" name="Notes Placeholder 2"/>
           <p:cNvSpPr>
             <a:spLocks noGrp="1"/>
           </p:cNvSpPr>
@@ -1551,7 +1551,7 @@
       </p:sp>
       <p:sp>
         <p:nvSpPr>
-          <p:cNvPr id="1363541342" name="Slide Number Placeholder 3"/>
+          <p:cNvPr id="1677702140" name="Slide Number Placeholder 3"/>
           <p:cNvSpPr>
             <a:spLocks noGrp="1"/>
           </p:cNvSpPr>
@@ -1602,7 +1602,7 @@
       </p:grpSpPr>
       <p:sp>
         <p:nvSpPr>
-          <p:cNvPr id="1295003406" name="Slide Image Placeholder 1"/>
+          <p:cNvPr id="659889643" name="Slide Image Placeholder 1"/>
           <p:cNvSpPr>
             <a:spLocks noChangeAspect="1" noGrp="1" noRot="1"/>
           </p:cNvSpPr>
@@ -1614,7 +1614,7 @@
       </p:sp>
       <p:sp>
         <p:nvSpPr>
-          <p:cNvPr id="2074426051" name="Notes Placeholder 2"/>
+          <p:cNvPr id="1543389516" name="Notes Placeholder 2"/>
           <p:cNvSpPr>
             <a:spLocks noGrp="1"/>
           </p:cNvSpPr>
@@ -1636,7 +1636,7 @@
       </p:sp>
       <p:sp>
         <p:nvSpPr>
-          <p:cNvPr id="1347327320" name="Slide Number Placeholder 3"/>
+          <p:cNvPr id="1406166137" name="Slide Number Placeholder 3"/>
           <p:cNvSpPr>
             <a:spLocks noGrp="1"/>
           </p:cNvSpPr>
@@ -1687,7 +1687,7 @@
       </p:grpSpPr>
       <p:sp>
         <p:nvSpPr>
-          <p:cNvPr id="2059660216" name="Slide Image Placeholder 1"/>
+          <p:cNvPr id="527870273" name="Slide Image Placeholder 1"/>
           <p:cNvSpPr>
             <a:spLocks noChangeAspect="1" noGrp="1" noRot="1"/>
           </p:cNvSpPr>
@@ -1699,7 +1699,7 @@
       </p:sp>
       <p:sp>
         <p:nvSpPr>
-          <p:cNvPr id="294518160" name="Notes Placeholder 2"/>
+          <p:cNvPr id="1308199462" name="Notes Placeholder 2"/>
           <p:cNvSpPr>
             <a:spLocks noGrp="1"/>
           </p:cNvSpPr>
@@ -1721,7 +1721,7 @@
       </p:sp>
       <p:sp>
         <p:nvSpPr>
-          <p:cNvPr id="121341256" name="Slide Number Placeholder 3"/>
+          <p:cNvPr id="1078277446" name="Slide Number Placeholder 3"/>
           <p:cNvSpPr>
             <a:spLocks noGrp="1"/>
           </p:cNvSpPr>
@@ -1772,7 +1772,7 @@
       </p:grpSpPr>
       <p:sp>
         <p:nvSpPr>
-          <p:cNvPr id="1790379280" name="Slide Image Placeholder 1"/>
+          <p:cNvPr id="925654477" name="Slide Image Placeholder 1"/>
           <p:cNvSpPr>
             <a:spLocks noChangeAspect="1" noGrp="1" noRot="1"/>
           </p:cNvSpPr>
@@ -1784,7 +1784,7 @@
       </p:sp>
       <p:sp>
         <p:nvSpPr>
-          <p:cNvPr id="1513729915" name="Notes Placeholder 2"/>
+          <p:cNvPr id="1867668820" name="Notes Placeholder 2"/>
           <p:cNvSpPr>
             <a:spLocks noGrp="1"/>
           </p:cNvSpPr>
@@ -1806,7 +1806,7 @@
       </p:sp>
       <p:sp>
         <p:nvSpPr>
-          <p:cNvPr id="343139476" name="Slide Number Placeholder 3"/>
+          <p:cNvPr id="27684951" name="Slide Number Placeholder 3"/>
           <p:cNvSpPr>
             <a:spLocks noGrp="1"/>
           </p:cNvSpPr>
@@ -1857,7 +1857,7 @@
       </p:grpSpPr>
       <p:sp>
         <p:nvSpPr>
-          <p:cNvPr id="1028902887" name="Slide Image Placeholder 1"/>
+          <p:cNvPr id="1622137958" name="Slide Image Placeholder 1"/>
           <p:cNvSpPr>
             <a:spLocks noChangeAspect="1" noGrp="1" noRot="1"/>
           </p:cNvSpPr>
@@ -1869,7 +1869,7 @@
       </p:sp>
       <p:sp>
         <p:nvSpPr>
-          <p:cNvPr id="1900359764" name="Notes Placeholder 2"/>
+          <p:cNvPr id="1861882055" name="Notes Placeholder 2"/>
           <p:cNvSpPr>
             <a:spLocks noGrp="1"/>
           </p:cNvSpPr>
@@ -1891,7 +1891,7 @@
       </p:sp>
       <p:sp>
         <p:nvSpPr>
-          <p:cNvPr id="444255202" name="Slide Number Placeholder 3"/>
+          <p:cNvPr id="1659546684" name="Slide Number Placeholder 3"/>
           <p:cNvSpPr>
             <a:spLocks noGrp="1"/>
           </p:cNvSpPr>
@@ -1942,7 +1942,7 @@
       </p:grpSpPr>
       <p:sp>
         <p:nvSpPr>
-          <p:cNvPr id="1381565410" name="Slide Image Placeholder 1"/>
+          <p:cNvPr id="1650547962" name="Slide Image Placeholder 1"/>
           <p:cNvSpPr>
             <a:spLocks noChangeAspect="1" noGrp="1" noRot="1"/>
           </p:cNvSpPr>
@@ -1954,7 +1954,7 @@
       </p:sp>
       <p:sp>
         <p:nvSpPr>
-          <p:cNvPr id="966489083" name="Notes Placeholder 2"/>
+          <p:cNvPr id="484983289" name="Notes Placeholder 2"/>
           <p:cNvSpPr>
             <a:spLocks noGrp="1"/>
           </p:cNvSpPr>
@@ -1976,7 +1976,7 @@
       </p:sp>
       <p:sp>
         <p:nvSpPr>
-          <p:cNvPr id="1728958954" name="Slide Number Placeholder 3"/>
+          <p:cNvPr id="981975456" name="Slide Number Placeholder 3"/>
           <p:cNvSpPr>
             <a:spLocks noGrp="1"/>
           </p:cNvSpPr>
@@ -2346,7 +2346,7 @@
       </p:grpSpPr>
       <p:sp>
         <p:nvSpPr>
-          <p:cNvPr id="1022859878" name="Shape 0"/>
+          <p:cNvPr id="1930121853" name="Shape 0"/>
           <p:cNvSpPr/>
           <p:nvPr/>
         </p:nvSpPr>
@@ -2373,7 +2373,7 @@
       </p:sp>
       <p:sp>
         <p:nvSpPr>
-          <p:cNvPr id="1415551610" name="Shape 1"/>
+          <p:cNvPr id="218366832" name="Shape 1"/>
           <p:cNvSpPr/>
           <p:nvPr/>
         </p:nvSpPr>
@@ -2400,7 +2400,7 @@
       </p:sp>
       <p:sp>
         <p:nvSpPr>
-          <p:cNvPr id="2127408845" name="Shape 2"/>
+          <p:cNvPr id="1707642038" name="Shape 2"/>
           <p:cNvSpPr/>
           <p:nvPr/>
         </p:nvSpPr>
@@ -2427,7 +2427,7 @@
       </p:sp>
       <p:sp>
         <p:nvSpPr>
-          <p:cNvPr id="2061944277" name="Shape 3"/>
+          <p:cNvPr id="2118390868" name="Shape 3"/>
           <p:cNvSpPr/>
           <p:nvPr/>
         </p:nvSpPr>
@@ -2454,7 +2454,7 @@
       </p:sp>
       <p:sp>
         <p:nvSpPr>
-          <p:cNvPr id="2045314307" name="Shape 4"/>
+          <p:cNvPr id="826242766" name="Shape 4"/>
           <p:cNvSpPr/>
           <p:nvPr/>
         </p:nvSpPr>
@@ -2481,7 +2481,7 @@
       </p:sp>
       <p:sp>
         <p:nvSpPr>
-          <p:cNvPr id="432758076" name="Shape 5"/>
+          <p:cNvPr id="831411558" name="Shape 5"/>
           <p:cNvSpPr/>
           <p:nvPr/>
         </p:nvSpPr>
@@ -2508,7 +2508,7 @@
       </p:sp>
       <p:sp>
         <p:nvSpPr>
-          <p:cNvPr id="334781163" name="Shape 6"/>
+          <p:cNvPr id="615589068" name="Shape 6"/>
           <p:cNvSpPr/>
           <p:nvPr/>
         </p:nvSpPr>
@@ -2533,7 +2533,7 @@
       </p:sp>
       <p:sp>
         <p:nvSpPr>
-          <p:cNvPr id="1195991475" name="Shape 7"/>
+          <p:cNvPr id="211503985" name="Shape 7"/>
           <p:cNvSpPr/>
           <p:nvPr/>
         </p:nvSpPr>
@@ -2558,7 +2558,7 @@
       </p:sp>
       <p:sp>
         <p:nvSpPr>
-          <p:cNvPr id="543718280" name="Text 8"/>
+          <p:cNvPr id="991843873" name="Text 8"/>
           <p:cNvSpPr/>
           <p:nvPr/>
         </p:nvSpPr>
@@ -2598,7 +2598,7 @@
       </p:sp>
       <p:sp>
         <p:nvSpPr>
-          <p:cNvPr id="174609737" name="Text 9"/>
+          <p:cNvPr id="1309144285" name="Text 9"/>
           <p:cNvSpPr/>
           <p:nvPr/>
         </p:nvSpPr>
@@ -2638,7 +2638,7 @@
       </p:sp>
       <p:sp>
         <p:nvSpPr>
-          <p:cNvPr id="583860974" name="Text 10"/>
+          <p:cNvPr id="1492773267" name="Text 10"/>
           <p:cNvSpPr/>
           <p:nvPr/>
         </p:nvSpPr>
@@ -2678,7 +2678,7 @@
       </p:sp>
       <p:sp>
         <p:nvSpPr>
-          <p:cNvPr id="2101064816" name="Text 11"/>
+          <p:cNvPr id="837309727" name="Text 11"/>
           <p:cNvSpPr/>
           <p:nvPr/>
         </p:nvSpPr>
@@ -2718,7 +2718,7 @@
       </p:sp>
       <p:sp>
         <p:nvSpPr>
-          <p:cNvPr id="1913067589" name="Shape 12"/>
+          <p:cNvPr id="1528447096" name="Shape 12"/>
           <p:cNvSpPr/>
           <p:nvPr/>
         </p:nvSpPr>
@@ -2743,7 +2743,7 @@
       </p:sp>
       <p:sp>
         <p:nvSpPr>
-          <p:cNvPr id="1203527991" name="Text 13"/>
+          <p:cNvPr id="2018946230" name="Text 13"/>
           <p:cNvSpPr/>
           <p:nvPr/>
         </p:nvSpPr>
@@ -2867,7 +2867,7 @@
       </p:sp>
       <p:sp>
         <p:nvSpPr>
-          <p:cNvPr id="1066032282" name="Text 14"/>
+          <p:cNvPr id="1165210451" name="Text 14"/>
           <p:cNvSpPr/>
           <p:nvPr/>
         </p:nvSpPr>
@@ -2947,7 +2947,7 @@
       </p:grpSpPr>
       <p:sp>
         <p:nvSpPr>
-          <p:cNvPr id="2113816537" name="Shape 0"/>
+          <p:cNvPr id="1097757062" name="Shape 0"/>
           <p:cNvSpPr/>
           <p:nvPr/>
         </p:nvSpPr>
@@ -2972,7 +2972,7 @@
       </p:sp>
       <p:sp>
         <p:nvSpPr>
-          <p:cNvPr id="1044644278" name="Text 1"/>
+          <p:cNvPr id="113271494" name="Text 1"/>
           <p:cNvSpPr/>
           <p:nvPr/>
         </p:nvSpPr>
@@ -3012,7 +3012,7 @@
       </p:sp>
       <p:pic>
         <p:nvPicPr>
-          <p:cNvPr id="669956496" name=""/>
+          <p:cNvPr id="192147799" name=""/>
           <p:cNvPicPr>
             <a:picLocks noChangeAspect="1"/>
           </p:cNvPicPr>
@@ -3034,7 +3034,7 @@
       </p:pic>
       <p:pic>
         <p:nvPicPr>
-          <p:cNvPr id="974273266" name=""/>
+          <p:cNvPr id="1528153695" name=""/>
           <p:cNvPicPr>
             <a:picLocks noChangeAspect="1"/>
           </p:cNvPicPr>
@@ -3056,7 +3056,7 @@
       </p:pic>
       <p:sp>
         <p:nvSpPr>
-          <p:cNvPr id="1419848075" name="Text 2"/>
+          <p:cNvPr id="457825313" name="Text 2"/>
           <p:cNvSpPr/>
           <p:nvPr/>
         </p:nvSpPr>
@@ -3135,7 +3135,7 @@
       </p:grpSpPr>
       <p:sp>
         <p:nvSpPr>
-          <p:cNvPr id="554784016" name="Shape 0"/>
+          <p:cNvPr id="470341133" name="Shape 0"/>
           <p:cNvSpPr/>
           <p:nvPr/>
         </p:nvSpPr>
@@ -3160,7 +3160,7 @@
       </p:sp>
       <p:sp>
         <p:nvSpPr>
-          <p:cNvPr id="1180062753" name="Text 1"/>
+          <p:cNvPr id="585619580" name="Text 1"/>
           <p:cNvSpPr/>
           <p:nvPr/>
         </p:nvSpPr>
@@ -3200,7 +3200,7 @@
       </p:sp>
       <p:sp>
         <p:nvSpPr>
-          <p:cNvPr id="691236630" name="Text 2"/>
+          <p:cNvPr id="894820185" name="Text 2"/>
           <p:cNvSpPr/>
           <p:nvPr/>
         </p:nvSpPr>
@@ -3240,7 +3240,7 @@
       </p:sp>
       <p:sp>
         <p:nvSpPr>
-          <p:cNvPr id="1278288664" name="Shape 3"/>
+          <p:cNvPr id="2074203470" name="Shape 3"/>
           <p:cNvSpPr/>
           <p:nvPr/>
         </p:nvSpPr>
@@ -3272,7 +3272,7 @@
       </p:sp>
       <p:sp>
         <p:nvSpPr>
-          <p:cNvPr id="1158439565" name="Shape 4"/>
+          <p:cNvPr id="1158697705" name="Shape 4"/>
           <p:cNvSpPr/>
           <p:nvPr/>
         </p:nvSpPr>
@@ -3304,7 +3304,7 @@
       </p:sp>
       <p:pic>
         <p:nvPicPr>
-          <p:cNvPr id="891003818" name="Image 0" descr="preencoded.png"/>
+          <p:cNvPr id="1879913658" name="Image 0" descr="preencoded.png"/>
           <p:cNvPicPr>
             <a:picLocks noChangeAspect="1"/>
           </p:cNvPicPr>
@@ -3326,7 +3326,7 @@
       </p:pic>
       <p:sp>
         <p:nvSpPr>
-          <p:cNvPr id="844928550" name="Text 5"/>
+          <p:cNvPr id="132363293" name="Text 5"/>
           <p:cNvSpPr/>
           <p:nvPr/>
         </p:nvSpPr>
@@ -3366,7 +3366,7 @@
       </p:sp>
       <p:sp>
         <p:nvSpPr>
-          <p:cNvPr id="1871646371" name="Text 6"/>
+          <p:cNvPr id="1400271851" name="Text 6"/>
           <p:cNvSpPr/>
           <p:nvPr/>
         </p:nvSpPr>
@@ -3406,7 +3406,7 @@
       </p:sp>
       <p:sp>
         <p:nvSpPr>
-          <p:cNvPr id="1829270898" name="Text 7"/>
+          <p:cNvPr id="118823340" name="Text 7"/>
           <p:cNvSpPr/>
           <p:nvPr/>
         </p:nvSpPr>
@@ -3446,7 +3446,7 @@
       </p:sp>
       <p:sp>
         <p:nvSpPr>
-          <p:cNvPr id="97311468" name="Text 8"/>
+          <p:cNvPr id="88213045" name="Text 8"/>
           <p:cNvSpPr/>
           <p:nvPr/>
         </p:nvSpPr>
@@ -3486,7 +3486,7 @@
       </p:sp>
       <p:sp>
         <p:nvSpPr>
-          <p:cNvPr id="44407177" name="Shape 9"/>
+          <p:cNvPr id="115327655" name="Shape 9"/>
           <p:cNvSpPr/>
           <p:nvPr/>
         </p:nvSpPr>
@@ -3518,7 +3518,7 @@
       </p:sp>
       <p:sp>
         <p:nvSpPr>
-          <p:cNvPr id="448983672" name="Shape 10"/>
+          <p:cNvPr id="466117146" name="Shape 10"/>
           <p:cNvSpPr/>
           <p:nvPr/>
         </p:nvSpPr>
@@ -3550,7 +3550,7 @@
       </p:sp>
       <p:pic>
         <p:nvPicPr>
-          <p:cNvPr id="48628269" name="Image 1" descr="preencoded.png"/>
+          <p:cNvPr id="1971951832" name="Image 1" descr="preencoded.png"/>
           <p:cNvPicPr>
             <a:picLocks noChangeAspect="1"/>
           </p:cNvPicPr>
@@ -3572,7 +3572,7 @@
       </p:pic>
       <p:sp>
         <p:nvSpPr>
-          <p:cNvPr id="1848623712" name="Text 11"/>
+          <p:cNvPr id="526763527" name="Text 11"/>
           <p:cNvSpPr/>
           <p:nvPr/>
         </p:nvSpPr>
@@ -3612,7 +3612,7 @@
       </p:sp>
       <p:sp>
         <p:nvSpPr>
-          <p:cNvPr id="596740056" name="Text 12"/>
+          <p:cNvPr id="28280413" name="Text 12"/>
           <p:cNvSpPr/>
           <p:nvPr/>
         </p:nvSpPr>
@@ -3689,7 +3689,7 @@
       </p:sp>
       <p:sp>
         <p:nvSpPr>
-          <p:cNvPr id="1506729024" name="Text 13"/>
+          <p:cNvPr id="1525856823" name="Text 13"/>
           <p:cNvSpPr/>
           <p:nvPr/>
         </p:nvSpPr>
@@ -3742,7 +3742,7 @@
       </p:sp>
       <p:sp>
         <p:nvSpPr>
-          <p:cNvPr id="432490609" name="Text 14"/>
+          <p:cNvPr id="1444959082" name="Text 14"/>
           <p:cNvSpPr/>
           <p:nvPr/>
         </p:nvSpPr>
@@ -3782,7 +3782,7 @@
       </p:sp>
       <p:sp>
         <p:nvSpPr>
-          <p:cNvPr id="642490548" name="Shape 3"/>
+          <p:cNvPr id="486216073" name="Shape 3"/>
           <p:cNvSpPr/>
           <p:nvPr/>
         </p:nvSpPr>
@@ -3814,7 +3814,7 @@
       </p:sp>
       <p:sp>
         <p:nvSpPr>
-          <p:cNvPr id="1588607206" name="Text 5"/>
+          <p:cNvPr id="1293394532" name="Text 5"/>
           <p:cNvSpPr/>
           <p:nvPr/>
         </p:nvSpPr>
@@ -3869,7 +3869,7 @@
       </p:sp>
       <p:sp>
         <p:nvSpPr>
-          <p:cNvPr id="1051297276" name="TextBox 22"/>
+          <p:cNvPr id="105545086" name="TextBox 22"/>
           <p:cNvSpPr txBox="1"/>
           <p:nvPr/>
         </p:nvSpPr>
@@ -3927,7 +3927,7 @@
       </p:sp>
       <p:sp>
         <p:nvSpPr>
-          <p:cNvPr id="994251356" name="TextBox 23"/>
+          <p:cNvPr id="330612990" name="TextBox 23"/>
           <p:cNvSpPr txBox="1"/>
           <p:nvPr/>
         </p:nvSpPr>
@@ -4022,7 +4022,7 @@
       </p:grpSpPr>
       <p:sp>
         <p:nvSpPr>
-          <p:cNvPr id="713558871" name="Shape 0"/>
+          <p:cNvPr id="778747952" name="Shape 0"/>
           <p:cNvSpPr/>
           <p:nvPr/>
         </p:nvSpPr>
@@ -4047,7 +4047,7 @@
       </p:sp>
       <p:sp>
         <p:nvSpPr>
-          <p:cNvPr id="603617892" name="Text 1"/>
+          <p:cNvPr id="487148341" name="Text 1"/>
           <p:cNvSpPr/>
           <p:nvPr/>
         </p:nvSpPr>
@@ -4087,7 +4087,7 @@
       </p:sp>
       <p:sp>
         <p:nvSpPr>
-          <p:cNvPr id="1137206879" name="Text 2"/>
+          <p:cNvPr id="1191454435" name="Text 2"/>
           <p:cNvSpPr/>
           <p:nvPr/>
         </p:nvSpPr>
@@ -4127,7 +4127,7 @@
       </p:sp>
       <p:sp>
         <p:nvSpPr>
-          <p:cNvPr id="2018166004" name="Shape 3"/>
+          <p:cNvPr id="604215010" name="Shape 3"/>
           <p:cNvSpPr/>
           <p:nvPr/>
         </p:nvSpPr>
@@ -4159,7 +4159,7 @@
       </p:sp>
       <p:sp>
         <p:nvSpPr>
-          <p:cNvPr id="1992066834" name="Shape 4"/>
+          <p:cNvPr id="720520212" name="Shape 4"/>
           <p:cNvSpPr/>
           <p:nvPr/>
         </p:nvSpPr>
@@ -4191,7 +4191,7 @@
       </p:sp>
       <p:pic>
         <p:nvPicPr>
-          <p:cNvPr id="1559273597" name="Image 0" descr="preencoded.png"/>
+          <p:cNvPr id="1058176303" name="Image 0" descr="preencoded.png"/>
           <p:cNvPicPr>
             <a:picLocks noChangeAspect="1"/>
           </p:cNvPicPr>
@@ -4213,7 +4213,7 @@
       </p:pic>
       <p:sp>
         <p:nvSpPr>
-          <p:cNvPr id="205928337" name="Text 5"/>
+          <p:cNvPr id="1768541092" name="Text 5"/>
           <p:cNvSpPr/>
           <p:nvPr/>
         </p:nvSpPr>
@@ -4253,7 +4253,7 @@
       </p:sp>
       <p:sp>
         <p:nvSpPr>
-          <p:cNvPr id="1090684285" name="Shape 6"/>
+          <p:cNvPr id="971465954" name="Shape 6"/>
           <p:cNvSpPr/>
           <p:nvPr/>
         </p:nvSpPr>
@@ -4285,7 +4285,7 @@
       </p:sp>
       <p:sp>
         <p:nvSpPr>
-          <p:cNvPr id="1148253451" name="Shape 7"/>
+          <p:cNvPr id="1580544684" name="Shape 7"/>
           <p:cNvSpPr/>
           <p:nvPr/>
         </p:nvSpPr>
@@ -4317,7 +4317,7 @@
       </p:sp>
       <p:pic>
         <p:nvPicPr>
-          <p:cNvPr id="1311344916" name="Image 1" descr="preencoded.png"/>
+          <p:cNvPr id="2101598221" name="Image 1" descr="preencoded.png"/>
           <p:cNvPicPr>
             <a:picLocks noChangeAspect="1"/>
           </p:cNvPicPr>
@@ -4339,7 +4339,7 @@
       </p:pic>
       <p:sp>
         <p:nvSpPr>
-          <p:cNvPr id="2046543356" name="Text 8"/>
+          <p:cNvPr id="1024403945" name="Text 8"/>
           <p:cNvSpPr/>
           <p:nvPr/>
         </p:nvSpPr>
@@ -4379,7 +4379,7 @@
       </p:sp>
       <p:sp>
         <p:nvSpPr>
-          <p:cNvPr id="449411904" name="Shape 9"/>
+          <p:cNvPr id="354915399" name="Shape 9"/>
           <p:cNvSpPr/>
           <p:nvPr/>
         </p:nvSpPr>
@@ -4411,7 +4411,7 @@
       </p:sp>
       <p:sp>
         <p:nvSpPr>
-          <p:cNvPr id="742561183" name="Shape 10"/>
+          <p:cNvPr id="2071664302" name="Shape 10"/>
           <p:cNvSpPr/>
           <p:nvPr/>
         </p:nvSpPr>
@@ -4443,7 +4443,7 @@
       </p:sp>
       <p:pic>
         <p:nvPicPr>
-          <p:cNvPr id="353618868" name="Image 2" descr="preencoded.png"/>
+          <p:cNvPr id="95279112" name="Image 2" descr="preencoded.png"/>
           <p:cNvPicPr>
             <a:picLocks noChangeAspect="1"/>
           </p:cNvPicPr>
@@ -4465,7 +4465,7 @@
       </p:pic>
       <p:sp>
         <p:nvSpPr>
-          <p:cNvPr id="889018533" name="Text 11"/>
+          <p:cNvPr id="213729424" name="Text 11"/>
           <p:cNvSpPr/>
           <p:nvPr/>
         </p:nvSpPr>
@@ -4505,7 +4505,7 @@
       </p:sp>
       <p:sp>
         <p:nvSpPr>
-          <p:cNvPr id="1887676230" name="Shape 12"/>
+          <p:cNvPr id="1013106372" name="Shape 12"/>
           <p:cNvSpPr/>
           <p:nvPr/>
         </p:nvSpPr>
@@ -4537,7 +4537,7 @@
       </p:sp>
       <p:sp>
         <p:nvSpPr>
-          <p:cNvPr id="904086494" name="Shape 13"/>
+          <p:cNvPr id="1995062344" name="Shape 13"/>
           <p:cNvSpPr/>
           <p:nvPr/>
         </p:nvSpPr>
@@ -4569,7 +4569,7 @@
       </p:sp>
       <p:pic>
         <p:nvPicPr>
-          <p:cNvPr id="689635809" name="Image 3" descr="preencoded.png"/>
+          <p:cNvPr id="1999415043" name="Image 3" descr="preencoded.png"/>
           <p:cNvPicPr>
             <a:picLocks noChangeAspect="1"/>
           </p:cNvPicPr>
@@ -4591,7 +4591,7 @@
       </p:pic>
       <p:sp>
         <p:nvSpPr>
-          <p:cNvPr id="423345502" name="Text 14"/>
+          <p:cNvPr id="295070591" name="Text 14"/>
           <p:cNvSpPr/>
           <p:nvPr/>
         </p:nvSpPr>
@@ -4631,7 +4631,7 @@
       </p:sp>
       <p:sp>
         <p:nvSpPr>
-          <p:cNvPr id="1856704811" name="Shape 15"/>
+          <p:cNvPr id="1656284031" name="Shape 15"/>
           <p:cNvSpPr/>
           <p:nvPr/>
         </p:nvSpPr>
@@ -4663,7 +4663,7 @@
       </p:sp>
       <p:sp>
         <p:nvSpPr>
-          <p:cNvPr id="503199367" name="Shape 16"/>
+          <p:cNvPr id="1516325894" name="Shape 16"/>
           <p:cNvSpPr/>
           <p:nvPr/>
         </p:nvSpPr>
@@ -4695,7 +4695,7 @@
       </p:sp>
       <p:pic>
         <p:nvPicPr>
-          <p:cNvPr id="2023767590" name="Image 4" descr="preencoded.png"/>
+          <p:cNvPr id="436917188" name="Image 4" descr="preencoded.png"/>
           <p:cNvPicPr>
             <a:picLocks noChangeAspect="1"/>
           </p:cNvPicPr>
@@ -4717,7 +4717,7 @@
       </p:pic>
       <p:sp>
         <p:nvSpPr>
-          <p:cNvPr id="1637615232" name="Text 17"/>
+          <p:cNvPr id="1269719802" name="Text 17"/>
           <p:cNvSpPr/>
           <p:nvPr/>
         </p:nvSpPr>
@@ -4757,7 +4757,7 @@
       </p:sp>
       <p:sp>
         <p:nvSpPr>
-          <p:cNvPr id="1162962561" name="Shape 18"/>
+          <p:cNvPr id="1406014147" name="Shape 18"/>
           <p:cNvSpPr/>
           <p:nvPr/>
         </p:nvSpPr>
@@ -4789,7 +4789,7 @@
       </p:sp>
       <p:sp>
         <p:nvSpPr>
-          <p:cNvPr id="339027681" name="Shape 19"/>
+          <p:cNvPr id="304098396" name="Shape 19"/>
           <p:cNvSpPr/>
           <p:nvPr/>
         </p:nvSpPr>
@@ -4821,7 +4821,7 @@
       </p:sp>
       <p:pic>
         <p:nvPicPr>
-          <p:cNvPr id="2097917811" name="Image 5" descr="preencoded.png"/>
+          <p:cNvPr id="661509078" name="Image 5" descr="preencoded.png"/>
           <p:cNvPicPr>
             <a:picLocks noChangeAspect="1"/>
           </p:cNvPicPr>
@@ -4843,7 +4843,7 @@
       </p:pic>
       <p:sp>
         <p:nvSpPr>
-          <p:cNvPr id="1615913716" name="Text 20"/>
+          <p:cNvPr id="167280004" name="Text 20"/>
           <p:cNvSpPr/>
           <p:nvPr/>
         </p:nvSpPr>
@@ -4923,7 +4923,7 @@
       </p:grpSpPr>
       <p:sp>
         <p:nvSpPr>
-          <p:cNvPr id="219015293" name="Shape 0"/>
+          <p:cNvPr id="1914272880" name="Shape 0"/>
           <p:cNvSpPr/>
           <p:nvPr/>
         </p:nvSpPr>
@@ -4950,7 +4950,7 @@
       </p:sp>
       <p:sp>
         <p:nvSpPr>
-          <p:cNvPr id="1774386936" name="Shape 1"/>
+          <p:cNvPr id="983992647" name="Shape 1"/>
           <p:cNvSpPr/>
           <p:nvPr/>
         </p:nvSpPr>
@@ -4977,7 +4977,7 @@
       </p:sp>
       <p:sp>
         <p:nvSpPr>
-          <p:cNvPr id="1183316951" name="Shape 2"/>
+          <p:cNvPr id="750687154" name="Shape 2"/>
           <p:cNvSpPr/>
           <p:nvPr/>
         </p:nvSpPr>
@@ -5004,7 +5004,7 @@
       </p:sp>
       <p:sp>
         <p:nvSpPr>
-          <p:cNvPr id="286526486" name="Shape 3"/>
+          <p:cNvPr id="1311412695" name="Shape 3"/>
           <p:cNvSpPr/>
           <p:nvPr/>
         </p:nvSpPr>
@@ -5031,7 +5031,7 @@
       </p:sp>
       <p:sp>
         <p:nvSpPr>
-          <p:cNvPr id="16558971" name="Shape 4"/>
+          <p:cNvPr id="35650924" name="Shape 4"/>
           <p:cNvSpPr/>
           <p:nvPr/>
         </p:nvSpPr>
@@ -5058,7 +5058,7 @@
       </p:sp>
       <p:sp>
         <p:nvSpPr>
-          <p:cNvPr id="1215446933" name="Text 5"/>
+          <p:cNvPr id="1146470773" name="Text 5"/>
           <p:cNvSpPr/>
           <p:nvPr/>
         </p:nvSpPr>
@@ -5098,7 +5098,7 @@
       </p:sp>
       <p:sp>
         <p:nvSpPr>
-          <p:cNvPr id="1605232098" name="Shape 6"/>
+          <p:cNvPr id="1079644608" name="Shape 6"/>
           <p:cNvSpPr/>
           <p:nvPr/>
         </p:nvSpPr>
@@ -5123,7 +5123,7 @@
       </p:sp>
       <p:sp>
         <p:nvSpPr>
-          <p:cNvPr id="1822698356" name="Shape 8"/>
+          <p:cNvPr id="439011236" name="Shape 8"/>
           <p:cNvSpPr/>
           <p:nvPr/>
         </p:nvSpPr>
@@ -5155,7 +5155,7 @@
       </p:sp>
       <p:pic>
         <p:nvPicPr>
-          <p:cNvPr id="1249343774" name="Image 0" descr="preencoded.png"/>
+          <p:cNvPr id="959860513" name="Image 0" descr="preencoded.png"/>
           <p:cNvPicPr>
             <a:picLocks noChangeAspect="1"/>
           </p:cNvPicPr>
@@ -5217,7 +5217,7 @@
       </p:grpSpPr>
       <p:sp>
         <p:nvSpPr>
-          <p:cNvPr id="17566076" name="Shape 0"/>
+          <p:cNvPr id="2109419452" name="Shape 0"/>
           <p:cNvSpPr/>
           <p:nvPr/>
         </p:nvSpPr>
@@ -5242,7 +5242,7 @@
       </p:sp>
       <p:sp>
         <p:nvSpPr>
-          <p:cNvPr id="1683227503" name="Text 1"/>
+          <p:cNvPr id="1001777923" name="Text 1"/>
           <p:cNvSpPr/>
           <p:nvPr/>
         </p:nvSpPr>
@@ -5282,7 +5282,7 @@
       </p:sp>
       <p:sp>
         <p:nvSpPr>
-          <p:cNvPr id="1403281054" name="Text 2"/>
+          <p:cNvPr id="720476468" name="Text 2"/>
           <p:cNvSpPr/>
           <p:nvPr/>
         </p:nvSpPr>
@@ -5322,7 +5322,7 @@
       </p:sp>
       <p:sp>
         <p:nvSpPr>
-          <p:cNvPr id="1833350306" name="Shape 3"/>
+          <p:cNvPr id="1505836075" name="Shape 3"/>
           <p:cNvSpPr/>
           <p:nvPr/>
         </p:nvSpPr>
@@ -5354,7 +5354,7 @@
       </p:sp>
       <p:sp>
         <p:nvSpPr>
-          <p:cNvPr id="1423406917" name="Shape 4"/>
+          <p:cNvPr id="786218639" name="Shape 4"/>
           <p:cNvSpPr/>
           <p:nvPr/>
         </p:nvSpPr>
@@ -5379,7 +5379,7 @@
       </p:sp>
       <p:sp>
         <p:nvSpPr>
-          <p:cNvPr id="1933252625" name="Shape 5"/>
+          <p:cNvPr id="751798827" name="Shape 5"/>
           <p:cNvSpPr/>
           <p:nvPr/>
         </p:nvSpPr>
@@ -5411,7 +5411,7 @@
       </p:sp>
       <p:pic>
         <p:nvPicPr>
-          <p:cNvPr id="1547629858" name="Image 0" descr="preencoded.png"/>
+          <p:cNvPr id="218682987" name="Image 0" descr="preencoded.png"/>
           <p:cNvPicPr>
             <a:picLocks noChangeAspect="1"/>
           </p:cNvPicPr>
@@ -5433,7 +5433,7 @@
       </p:pic>
       <p:sp>
         <p:nvSpPr>
-          <p:cNvPr id="1524365932" name="Text 6"/>
+          <p:cNvPr id="350501496" name="Text 6"/>
           <p:cNvSpPr/>
           <p:nvPr/>
         </p:nvSpPr>
@@ -5473,7 +5473,7 @@
       </p:sp>
       <p:sp>
         <p:nvSpPr>
-          <p:cNvPr id="1971217853" name="Text 7"/>
+          <p:cNvPr id="6901842" name="Text 7"/>
           <p:cNvSpPr/>
           <p:nvPr/>
         </p:nvSpPr>
@@ -5513,7 +5513,7 @@
       </p:sp>
       <p:sp>
         <p:nvSpPr>
-          <p:cNvPr id="1951934100" name="Shape 8"/>
+          <p:cNvPr id="1709536553" name="Shape 8"/>
           <p:cNvSpPr/>
           <p:nvPr/>
         </p:nvSpPr>
@@ -5545,7 +5545,7 @@
       </p:sp>
       <p:sp>
         <p:nvSpPr>
-          <p:cNvPr id="10106312" name="Shape 9"/>
+          <p:cNvPr id="1012110611" name="Shape 9"/>
           <p:cNvSpPr/>
           <p:nvPr/>
         </p:nvSpPr>
@@ -5570,7 +5570,7 @@
       </p:sp>
       <p:sp>
         <p:nvSpPr>
-          <p:cNvPr id="1257921117" name="Shape 10"/>
+          <p:cNvPr id="2022576433" name="Shape 10"/>
           <p:cNvSpPr/>
           <p:nvPr/>
         </p:nvSpPr>
@@ -5602,7 +5602,7 @@
       </p:sp>
       <p:pic>
         <p:nvPicPr>
-          <p:cNvPr id="832015152" name="Image 1" descr="preencoded.png"/>
+          <p:cNvPr id="129358881" name="Image 1" descr="preencoded.png"/>
           <p:cNvPicPr>
             <a:picLocks noChangeAspect="1"/>
           </p:cNvPicPr>
@@ -5624,7 +5624,7 @@
       </p:pic>
       <p:sp>
         <p:nvSpPr>
-          <p:cNvPr id="1939232363" name="Text 11"/>
+          <p:cNvPr id="386290676" name="Text 11"/>
           <p:cNvSpPr/>
           <p:nvPr/>
         </p:nvSpPr>
@@ -5664,7 +5664,7 @@
       </p:sp>
       <p:sp>
         <p:nvSpPr>
-          <p:cNvPr id="51445313" name="Text 12"/>
+          <p:cNvPr id="1624989774" name="Text 12"/>
           <p:cNvSpPr/>
           <p:nvPr/>
         </p:nvSpPr>
@@ -5704,7 +5704,7 @@
       </p:sp>
       <p:sp>
         <p:nvSpPr>
-          <p:cNvPr id="713527403" name="Shape 13"/>
+          <p:cNvPr id="293889952" name="Shape 13"/>
           <p:cNvSpPr/>
           <p:nvPr/>
         </p:nvSpPr>
@@ -5736,7 +5736,7 @@
       </p:sp>
       <p:sp>
         <p:nvSpPr>
-          <p:cNvPr id="1702360654" name="Shape 14"/>
+          <p:cNvPr id="1739622085" name="Shape 14"/>
           <p:cNvSpPr/>
           <p:nvPr/>
         </p:nvSpPr>
@@ -5761,7 +5761,7 @@
       </p:sp>
       <p:sp>
         <p:nvSpPr>
-          <p:cNvPr id="777541756" name="Shape 15"/>
+          <p:cNvPr id="1137506151" name="Shape 15"/>
           <p:cNvSpPr/>
           <p:nvPr/>
         </p:nvSpPr>
@@ -5793,7 +5793,7 @@
       </p:sp>
       <p:pic>
         <p:nvPicPr>
-          <p:cNvPr id="1932319846" name="Image 2" descr="preencoded.png"/>
+          <p:cNvPr id="721442312" name="Image 2" descr="preencoded.png"/>
           <p:cNvPicPr>
             <a:picLocks noChangeAspect="1"/>
           </p:cNvPicPr>
@@ -5815,7 +5815,7 @@
       </p:pic>
       <p:sp>
         <p:nvSpPr>
-          <p:cNvPr id="700850734" name="Text 16"/>
+          <p:cNvPr id="1473625277" name="Text 16"/>
           <p:cNvSpPr/>
           <p:nvPr/>
         </p:nvSpPr>
@@ -5870,7 +5870,7 @@
       </p:sp>
       <p:sp>
         <p:nvSpPr>
-          <p:cNvPr id="1631078565" name="Text 17"/>
+          <p:cNvPr id="1874911913" name="Text 17"/>
           <p:cNvSpPr/>
           <p:nvPr/>
         </p:nvSpPr>
@@ -5910,7 +5910,7 @@
       </p:sp>
       <p:sp>
         <p:nvSpPr>
-          <p:cNvPr id="251716652" name="Shape 18"/>
+          <p:cNvPr id="221148470" name="Shape 18"/>
           <p:cNvSpPr/>
           <p:nvPr/>
         </p:nvSpPr>
@@ -5942,7 +5942,7 @@
       </p:sp>
       <p:sp>
         <p:nvSpPr>
-          <p:cNvPr id="1270402393" name="Shape 19"/>
+          <p:cNvPr id="1125321871" name="Shape 19"/>
           <p:cNvSpPr/>
           <p:nvPr/>
         </p:nvSpPr>
@@ -5967,7 +5967,7 @@
       </p:sp>
       <p:sp>
         <p:nvSpPr>
-          <p:cNvPr id="1603211769" name="Shape 20"/>
+          <p:cNvPr id="464108670" name="Shape 20"/>
           <p:cNvSpPr/>
           <p:nvPr/>
         </p:nvSpPr>
@@ -5999,7 +5999,7 @@
       </p:sp>
       <p:pic>
         <p:nvPicPr>
-          <p:cNvPr id="2084836493" name="Image 3" descr="preencoded.png"/>
+          <p:cNvPr id="2132931211" name="Image 3" descr="preencoded.png"/>
           <p:cNvPicPr>
             <a:picLocks noChangeAspect="1"/>
           </p:cNvPicPr>
@@ -6021,7 +6021,7 @@
       </p:pic>
       <p:sp>
         <p:nvSpPr>
-          <p:cNvPr id="447205400" name="Text 21"/>
+          <p:cNvPr id="1468482971" name="Text 21"/>
           <p:cNvSpPr/>
           <p:nvPr/>
         </p:nvSpPr>
@@ -6061,7 +6061,7 @@
       </p:sp>
       <p:sp>
         <p:nvSpPr>
-          <p:cNvPr id="140812818" name="Text 22"/>
+          <p:cNvPr id="1542404835" name="Text 22"/>
           <p:cNvSpPr/>
           <p:nvPr/>
         </p:nvSpPr>
@@ -6141,7 +6141,7 @@
       </p:grpSpPr>
       <p:sp>
         <p:nvSpPr>
-          <p:cNvPr id="602005012" name="Shape 0"/>
+          <p:cNvPr id="56188742" name="Shape 0"/>
           <p:cNvSpPr/>
           <p:nvPr/>
         </p:nvSpPr>
@@ -6166,7 +6166,7 @@
       </p:sp>
       <p:sp>
         <p:nvSpPr>
-          <p:cNvPr id="582237481" name="Text 1"/>
+          <p:cNvPr id="841784139" name="Text 1"/>
           <p:cNvSpPr/>
           <p:nvPr/>
         </p:nvSpPr>
@@ -6206,7 +6206,7 @@
       </p:sp>
       <p:sp>
         <p:nvSpPr>
-          <p:cNvPr id="846629026" name="Text 2"/>
+          <p:cNvPr id="1920258270" name="Text 2"/>
           <p:cNvSpPr/>
           <p:nvPr/>
         </p:nvSpPr>
@@ -6246,7 +6246,7 @@
       </p:sp>
       <p:sp>
         <p:nvSpPr>
-          <p:cNvPr id="1698701246" name="Shape 3"/>
+          <p:cNvPr id="2083287906" name="Shape 3"/>
           <p:cNvSpPr/>
           <p:nvPr/>
         </p:nvSpPr>
@@ -6278,7 +6278,7 @@
       </p:sp>
       <p:sp>
         <p:nvSpPr>
-          <p:cNvPr id="243499495" name="Shape 4"/>
+          <p:cNvPr id="49809654" name="Shape 4"/>
           <p:cNvSpPr/>
           <p:nvPr/>
         </p:nvSpPr>
@@ -6310,7 +6310,7 @@
       </p:sp>
       <p:pic>
         <p:nvPicPr>
-          <p:cNvPr id="1522041521" name="Image 0" descr="preencoded.png"/>
+          <p:cNvPr id="285799518" name="Image 0" descr="preencoded.png"/>
           <p:cNvPicPr>
             <a:picLocks noChangeAspect="1"/>
           </p:cNvPicPr>
@@ -6332,7 +6332,7 @@
       </p:pic>
       <p:sp>
         <p:nvSpPr>
-          <p:cNvPr id="1911985798" name="Text 5"/>
+          <p:cNvPr id="716493340" name="Text 5"/>
           <p:cNvSpPr/>
           <p:nvPr/>
         </p:nvSpPr>
@@ -6372,7 +6372,7 @@
       </p:sp>
       <p:sp>
         <p:nvSpPr>
-          <p:cNvPr id="847947071" name="Text 6"/>
+          <p:cNvPr id="1759781622" name="Text 6"/>
           <p:cNvSpPr/>
           <p:nvPr/>
         </p:nvSpPr>
@@ -6412,7 +6412,7 @@
       </p:sp>
       <p:sp>
         <p:nvSpPr>
-          <p:cNvPr id="1061930069" name="Text 7"/>
+          <p:cNvPr id="200742188" name="Text 7"/>
           <p:cNvSpPr/>
           <p:nvPr/>
         </p:nvSpPr>
@@ -6452,7 +6452,7 @@
       </p:sp>
       <p:sp>
         <p:nvSpPr>
-          <p:cNvPr id="1739425558" name="Shape 8"/>
+          <p:cNvPr id="1949846274" name="Shape 8"/>
           <p:cNvSpPr/>
           <p:nvPr/>
         </p:nvSpPr>
@@ -6477,7 +6477,7 @@
       </p:sp>
       <p:sp>
         <p:nvSpPr>
-          <p:cNvPr id="1767510539" name="Text 9"/>
+          <p:cNvPr id="1370053967" name="Text 9"/>
           <p:cNvSpPr/>
           <p:nvPr/>
         </p:nvSpPr>
@@ -6517,7 +6517,7 @@
       </p:sp>
       <p:sp>
         <p:nvSpPr>
-          <p:cNvPr id="844614925" name="Text 10"/>
+          <p:cNvPr id="96077420" name="Text 10"/>
           <p:cNvSpPr/>
           <p:nvPr/>
         </p:nvSpPr>
@@ -6557,7 +6557,7 @@
       </p:sp>
       <p:sp>
         <p:nvSpPr>
-          <p:cNvPr id="1348185412" name="Shape 11"/>
+          <p:cNvPr id="2066512314" name="Shape 11"/>
           <p:cNvSpPr/>
           <p:nvPr/>
         </p:nvSpPr>
@@ -6582,7 +6582,7 @@
       </p:sp>
       <p:sp>
         <p:nvSpPr>
-          <p:cNvPr id="1861279423" name="Text 12"/>
+          <p:cNvPr id="554585337" name="Text 12"/>
           <p:cNvSpPr/>
           <p:nvPr/>
         </p:nvSpPr>
@@ -6622,7 +6622,7 @@
       </p:sp>
       <p:sp>
         <p:nvSpPr>
-          <p:cNvPr id="1288112579" name="Text 13"/>
+          <p:cNvPr id="1486866523" name="Text 13"/>
           <p:cNvSpPr/>
           <p:nvPr/>
         </p:nvSpPr>
@@ -6662,7 +6662,7 @@
       </p:sp>
       <p:sp>
         <p:nvSpPr>
-          <p:cNvPr id="119361992" name="Shape 14"/>
+          <p:cNvPr id="2081813224" name="Shape 14"/>
           <p:cNvSpPr/>
           <p:nvPr/>
         </p:nvSpPr>
@@ -6687,7 +6687,7 @@
       </p:sp>
       <p:sp>
         <p:nvSpPr>
-          <p:cNvPr id="1615848441" name="Text 15"/>
+          <p:cNvPr id="1961868831" name="Text 15"/>
           <p:cNvSpPr/>
           <p:nvPr/>
         </p:nvSpPr>
@@ -6727,7 +6727,7 @@
       </p:sp>
       <p:sp>
         <p:nvSpPr>
-          <p:cNvPr id="1207990097" name="Text 16"/>
+          <p:cNvPr id="1396242514" name="Text 16"/>
           <p:cNvSpPr/>
           <p:nvPr/>
         </p:nvSpPr>
@@ -6767,7 +6767,7 @@
       </p:sp>
       <p:sp>
         <p:nvSpPr>
-          <p:cNvPr id="1276348699" name="Shape 17"/>
+          <p:cNvPr id="919285378" name="Shape 17"/>
           <p:cNvSpPr/>
           <p:nvPr/>
         </p:nvSpPr>
@@ -6792,7 +6792,7 @@
       </p:sp>
       <p:sp>
         <p:nvSpPr>
-          <p:cNvPr id="56192880" name="Text 18"/>
+          <p:cNvPr id="1776617547" name="Text 18"/>
           <p:cNvSpPr/>
           <p:nvPr/>
         </p:nvSpPr>
@@ -6832,7 +6832,7 @@
       </p:sp>
       <p:sp>
         <p:nvSpPr>
-          <p:cNvPr id="14664803" name="Text 19"/>
+          <p:cNvPr id="1123305782" name="Text 19"/>
           <p:cNvSpPr/>
           <p:nvPr/>
         </p:nvSpPr>
@@ -6872,7 +6872,7 @@
       </p:sp>
       <p:sp>
         <p:nvSpPr>
-          <p:cNvPr id="1217295527" name="Shape 20"/>
+          <p:cNvPr id="22592910" name="Shape 20"/>
           <p:cNvSpPr/>
           <p:nvPr/>
         </p:nvSpPr>
@@ -6897,7 +6897,7 @@
       </p:sp>
       <p:sp>
         <p:nvSpPr>
-          <p:cNvPr id="741655693" name="Text 21"/>
+          <p:cNvPr id="1013197058" name="Text 21"/>
           <p:cNvSpPr/>
           <p:nvPr/>
         </p:nvSpPr>
@@ -6937,7 +6937,7 @@
       </p:sp>
       <p:sp>
         <p:nvSpPr>
-          <p:cNvPr id="1291853784" name="Text 22"/>
+          <p:cNvPr id="1789888856" name="Text 22"/>
           <p:cNvSpPr/>
           <p:nvPr/>
         </p:nvSpPr>
@@ -7017,7 +7017,7 @@
       </p:grpSpPr>
       <p:sp>
         <p:nvSpPr>
-          <p:cNvPr id="440598812" name="Shape 0"/>
+          <p:cNvPr id="308606071" name="Shape 0"/>
           <p:cNvSpPr/>
           <p:nvPr/>
         </p:nvSpPr>
@@ -7042,7 +7042,7 @@
       </p:sp>
       <p:sp>
         <p:nvSpPr>
-          <p:cNvPr id="1613187856" name="Text 1"/>
+          <p:cNvPr id="287199587" name="Text 1"/>
           <p:cNvSpPr/>
           <p:nvPr/>
         </p:nvSpPr>
@@ -7082,7 +7082,7 @@
       </p:sp>
       <p:sp>
         <p:nvSpPr>
-          <p:cNvPr id="1487352885" name="Text 2"/>
+          <p:cNvPr id="1357745029" name="Text 2"/>
           <p:cNvSpPr/>
           <p:nvPr/>
         </p:nvSpPr>
@@ -7122,7 +7122,7 @@
       </p:sp>
       <p:sp>
         <p:nvSpPr>
-          <p:cNvPr id="432070694" name="Shape 3"/>
+          <p:cNvPr id="2075645802" name="Shape 3"/>
           <p:cNvSpPr/>
           <p:nvPr/>
         </p:nvSpPr>
@@ -7154,7 +7154,7 @@
       </p:sp>
       <p:sp>
         <p:nvSpPr>
-          <p:cNvPr id="719435264" name="Shape 4"/>
+          <p:cNvPr id="1654853298" name="Shape 4"/>
           <p:cNvSpPr/>
           <p:nvPr/>
         </p:nvSpPr>
@@ -7186,7 +7186,7 @@
       </p:sp>
       <p:pic>
         <p:nvPicPr>
-          <p:cNvPr id="217780151" name="Image 0" descr="preencoded.png"/>
+          <p:cNvPr id="1134583862" name="Image 0" descr="preencoded.png"/>
           <p:cNvPicPr>
             <a:picLocks noChangeAspect="1"/>
           </p:cNvPicPr>
@@ -7208,7 +7208,7 @@
       </p:pic>
       <p:sp>
         <p:nvSpPr>
-          <p:cNvPr id="582888979" name="Text 5"/>
+          <p:cNvPr id="346076543" name="Text 5"/>
           <p:cNvSpPr/>
           <p:nvPr/>
         </p:nvSpPr>
@@ -7248,7 +7248,7 @@
       </p:sp>
       <p:sp>
         <p:nvSpPr>
-          <p:cNvPr id="1190385845" name="Text 6"/>
+          <p:cNvPr id="1031984340" name="Text 6"/>
           <p:cNvSpPr/>
           <p:nvPr/>
         </p:nvSpPr>
@@ -7288,7 +7288,7 @@
       </p:sp>
       <p:sp>
         <p:nvSpPr>
-          <p:cNvPr id="456221815" name="Shape 7"/>
+          <p:cNvPr id="1563193561" name="Shape 7"/>
           <p:cNvSpPr/>
           <p:nvPr/>
         </p:nvSpPr>
@@ -7311,7 +7311,7 @@
       </p:sp>
       <p:sp>
         <p:nvSpPr>
-          <p:cNvPr id="406378537" name="Shape 8"/>
+          <p:cNvPr id="114592637" name="Shape 8"/>
           <p:cNvSpPr/>
           <p:nvPr/>
         </p:nvSpPr>
@@ -7343,7 +7343,7 @@
       </p:sp>
       <p:pic>
         <p:nvPicPr>
-          <p:cNvPr id="1302982974" name="Image 1" descr="preencoded.png"/>
+          <p:cNvPr id="605533655" name="Image 1" descr="preencoded.png"/>
           <p:cNvPicPr>
             <a:picLocks noChangeAspect="1"/>
           </p:cNvPicPr>
@@ -7365,7 +7365,7 @@
       </p:pic>
       <p:sp>
         <p:nvSpPr>
-          <p:cNvPr id="1705815732" name="Text 9"/>
+          <p:cNvPr id="557364136" name="Text 9"/>
           <p:cNvSpPr/>
           <p:nvPr/>
         </p:nvSpPr>
@@ -7405,7 +7405,7 @@
       </p:sp>
       <p:sp>
         <p:nvSpPr>
-          <p:cNvPr id="1857962535" name="Shape 10"/>
+          <p:cNvPr id="105480357" name="Shape 10"/>
           <p:cNvSpPr/>
           <p:nvPr/>
         </p:nvSpPr>
@@ -7437,7 +7437,7 @@
       </p:sp>
       <p:sp>
         <p:nvSpPr>
-          <p:cNvPr id="2028312549" name="Text 11"/>
+          <p:cNvPr id="1284105673" name="Text 11"/>
           <p:cNvSpPr/>
           <p:nvPr/>
         </p:nvSpPr>
@@ -7477,7 +7477,7 @@
       </p:sp>
       <p:sp>
         <p:nvSpPr>
-          <p:cNvPr id="1622550387" name="Shape 12"/>
+          <p:cNvPr id="170112149" name="Shape 12"/>
           <p:cNvSpPr/>
           <p:nvPr/>
         </p:nvSpPr>
@@ -7502,7 +7502,7 @@
       </p:sp>
       <p:pic>
         <p:nvPicPr>
-          <p:cNvPr id="1524204348" name="Image 2" descr="preencoded.png"/>
+          <p:cNvPr id="624891177" name="Image 2" descr="preencoded.png"/>
           <p:cNvPicPr>
             <a:picLocks noChangeAspect="1"/>
           </p:cNvPicPr>
@@ -7524,7 +7524,7 @@
       </p:pic>
       <p:sp>
         <p:nvSpPr>
-          <p:cNvPr id="317253920" name="Text 13"/>
+          <p:cNvPr id="1875864463" name="Text 13"/>
           <p:cNvSpPr/>
           <p:nvPr/>
         </p:nvSpPr>
@@ -7564,7 +7564,7 @@
       </p:sp>
       <p:sp>
         <p:nvSpPr>
-          <p:cNvPr id="281205941" name="Shape 15"/>
+          <p:cNvPr id="438673643" name="Shape 15"/>
           <p:cNvSpPr/>
           <p:nvPr/>
         </p:nvSpPr>
@@ -7589,7 +7589,7 @@
       </p:sp>
       <p:pic>
         <p:nvPicPr>
-          <p:cNvPr id="139511969" name="Image 3" descr="preencoded.png"/>
+          <p:cNvPr id="34621584" name="Image 3" descr="preencoded.png"/>
           <p:cNvPicPr>
             <a:picLocks noChangeAspect="1"/>
           </p:cNvPicPr>
@@ -7611,7 +7611,7 @@
       </p:pic>
       <p:sp>
         <p:nvSpPr>
-          <p:cNvPr id="1030497970" name="Text 16"/>
+          <p:cNvPr id="949872932" name="Text 16"/>
           <p:cNvSpPr/>
           <p:nvPr/>
         </p:nvSpPr>
@@ -7651,7 +7651,7 @@
       </p:sp>
       <p:sp>
         <p:nvSpPr>
-          <p:cNvPr id="1802171381" name="Shape 18"/>
+          <p:cNvPr id="1797657603" name="Shape 18"/>
           <p:cNvSpPr/>
           <p:nvPr/>
         </p:nvSpPr>
@@ -7676,7 +7676,7 @@
       </p:sp>
       <p:pic>
         <p:nvPicPr>
-          <p:cNvPr id="2064844108" name="Image 4" descr="preencoded.png"/>
+          <p:cNvPr id="1963051682" name="Image 4" descr="preencoded.png"/>
           <p:cNvPicPr>
             <a:picLocks noChangeAspect="1"/>
           </p:cNvPicPr>
@@ -7698,7 +7698,7 @@
       </p:pic>
       <p:sp>
         <p:nvSpPr>
-          <p:cNvPr id="1631806358" name="Text 19"/>
+          <p:cNvPr id="1997413185" name="Text 19"/>
           <p:cNvSpPr/>
           <p:nvPr/>
         </p:nvSpPr>
@@ -7738,7 +7738,7 @@
       </p:sp>
       <p:sp>
         <p:nvSpPr>
-          <p:cNvPr id="565011865" name="Shape 21"/>
+          <p:cNvPr id="1088942813" name="Shape 21"/>
           <p:cNvSpPr/>
           <p:nvPr/>
         </p:nvSpPr>
@@ -7763,7 +7763,7 @@
       </p:sp>
       <p:pic>
         <p:nvPicPr>
-          <p:cNvPr id="1532342194" name="Image 5" descr="preencoded.png"/>
+          <p:cNvPr id="1913752744" name="Image 5" descr="preencoded.png"/>
           <p:cNvPicPr>
             <a:picLocks noChangeAspect="1"/>
           </p:cNvPicPr>
@@ -7785,7 +7785,7 @@
       </p:pic>
       <p:sp>
         <p:nvSpPr>
-          <p:cNvPr id="2078939000" name="Text 22"/>
+          <p:cNvPr id="2038835693" name="Text 22"/>
           <p:cNvSpPr/>
           <p:nvPr/>
         </p:nvSpPr>
@@ -7825,7 +7825,7 @@
       </p:sp>
       <p:sp>
         <p:nvSpPr>
-          <p:cNvPr id="1206038398" name="Shape 24"/>
+          <p:cNvPr id="1041255233" name="Shape 24"/>
           <p:cNvSpPr/>
           <p:nvPr/>
         </p:nvSpPr>
@@ -7850,7 +7850,7 @@
       </p:sp>
       <p:pic>
         <p:nvPicPr>
-          <p:cNvPr id="117714031" name="Image 6" descr="preencoded.png"/>
+          <p:cNvPr id="650832778" name="Image 6" descr="preencoded.png"/>
           <p:cNvPicPr>
             <a:picLocks noChangeAspect="1"/>
           </p:cNvPicPr>
@@ -7872,7 +7872,7 @@
       </p:pic>
       <p:sp>
         <p:nvSpPr>
-          <p:cNvPr id="2133052426" name="Text 25"/>
+          <p:cNvPr id="1845852900" name="Text 25"/>
           <p:cNvSpPr/>
           <p:nvPr/>
         </p:nvSpPr>
@@ -7952,7 +7952,7 @@
       </p:grpSpPr>
       <p:sp>
         <p:nvSpPr>
-          <p:cNvPr id="1863659348" name="Shape 0"/>
+          <p:cNvPr id="1005350615" name="Shape 0"/>
           <p:cNvSpPr/>
           <p:nvPr/>
         </p:nvSpPr>
@@ -7977,7 +7977,7 @@
       </p:sp>
       <p:sp>
         <p:nvSpPr>
-          <p:cNvPr id="434604670" name="Text 1"/>
+          <p:cNvPr id="1046809915" name="Text 1"/>
           <p:cNvSpPr/>
           <p:nvPr/>
         </p:nvSpPr>
@@ -8017,7 +8017,7 @@
       </p:sp>
       <p:sp>
         <p:nvSpPr>
-          <p:cNvPr id="1495340042" name="Text 2"/>
+          <p:cNvPr id="373659431" name="Text 2"/>
           <p:cNvSpPr/>
           <p:nvPr/>
         </p:nvSpPr>
@@ -8057,7 +8057,7 @@
       </p:sp>
       <p:sp>
         <p:nvSpPr>
-          <p:cNvPr id="353976516" name="Shape 3"/>
+          <p:cNvPr id="1342598547" name="Shape 3"/>
           <p:cNvSpPr/>
           <p:nvPr/>
         </p:nvSpPr>
@@ -8089,7 +8089,7 @@
       </p:sp>
       <p:sp>
         <p:nvSpPr>
-          <p:cNvPr id="1963003039" name="Shape 4"/>
+          <p:cNvPr id="1807450988" name="Shape 4"/>
           <p:cNvSpPr/>
           <p:nvPr/>
         </p:nvSpPr>
@@ -8121,7 +8121,7 @@
       </p:sp>
       <p:pic>
         <p:nvPicPr>
-          <p:cNvPr id="1591202449" name="Image 0" descr="preencoded.png"/>
+          <p:cNvPr id="1054150284" name="Image 0" descr="preencoded.png"/>
           <p:cNvPicPr>
             <a:picLocks noChangeAspect="1"/>
           </p:cNvPicPr>
@@ -8143,7 +8143,7 @@
       </p:pic>
       <p:sp>
         <p:nvSpPr>
-          <p:cNvPr id="1259022661" name="Text 5"/>
+          <p:cNvPr id="1819118019" name="Text 5"/>
           <p:cNvSpPr/>
           <p:nvPr/>
         </p:nvSpPr>
@@ -8183,7 +8183,7 @@
       </p:sp>
       <p:sp>
         <p:nvSpPr>
-          <p:cNvPr id="1304150977" name="Text 6"/>
+          <p:cNvPr id="61449660" name="Text 6"/>
           <p:cNvSpPr/>
           <p:nvPr/>
         </p:nvSpPr>
@@ -8223,7 +8223,7 @@
       </p:sp>
       <p:sp>
         <p:nvSpPr>
-          <p:cNvPr id="584887071" name="Shape 7"/>
+          <p:cNvPr id="813982457" name="Shape 7"/>
           <p:cNvSpPr/>
           <p:nvPr/>
         </p:nvSpPr>
@@ -8255,7 +8255,7 @@
       </p:sp>
       <p:sp>
         <p:nvSpPr>
-          <p:cNvPr id="264404006" name="Shape 8"/>
+          <p:cNvPr id="879639067" name="Shape 8"/>
           <p:cNvSpPr/>
           <p:nvPr/>
         </p:nvSpPr>
@@ -8287,7 +8287,7 @@
       </p:sp>
       <p:pic>
         <p:nvPicPr>
-          <p:cNvPr id="285919435" name="Image 1" descr="preencoded.png"/>
+          <p:cNvPr id="1123337864" name="Image 1" descr="preencoded.png"/>
           <p:cNvPicPr>
             <a:picLocks noChangeAspect="1"/>
           </p:cNvPicPr>
@@ -8309,7 +8309,7 @@
       </p:pic>
       <p:sp>
         <p:nvSpPr>
-          <p:cNvPr id="351334142" name="Text 9"/>
+          <p:cNvPr id="1790583989" name="Text 9"/>
           <p:cNvSpPr/>
           <p:nvPr/>
         </p:nvSpPr>
@@ -8349,7 +8349,7 @@
       </p:sp>
       <p:sp>
         <p:nvSpPr>
-          <p:cNvPr id="538305398" name="Text 10"/>
+          <p:cNvPr id="895047781" name="Text 10"/>
           <p:cNvSpPr/>
           <p:nvPr/>
         </p:nvSpPr>
@@ -8389,7 +8389,7 @@
       </p:sp>
       <p:sp>
         <p:nvSpPr>
-          <p:cNvPr id="213799984" name="Shape 11"/>
+          <p:cNvPr id="208667359" name="Shape 11"/>
           <p:cNvSpPr/>
           <p:nvPr/>
         </p:nvSpPr>
@@ -8421,7 +8421,7 @@
       </p:sp>
       <p:sp>
         <p:nvSpPr>
-          <p:cNvPr id="1404128240" name="Shape 12"/>
+          <p:cNvPr id="75472595" name="Shape 12"/>
           <p:cNvSpPr/>
           <p:nvPr/>
         </p:nvSpPr>
@@ -8453,7 +8453,7 @@
       </p:sp>
       <p:pic>
         <p:nvPicPr>
-          <p:cNvPr id="2014241504" name="Image 2" descr="preencoded.png"/>
+          <p:cNvPr id="1086710954" name="Image 2" descr="preencoded.png"/>
           <p:cNvPicPr>
             <a:picLocks noChangeAspect="1"/>
           </p:cNvPicPr>
@@ -8475,7 +8475,7 @@
       </p:pic>
       <p:sp>
         <p:nvSpPr>
-          <p:cNvPr id="679835180" name="Text 13"/>
+          <p:cNvPr id="1029291384" name="Text 13"/>
           <p:cNvSpPr/>
           <p:nvPr/>
         </p:nvSpPr>
@@ -8515,7 +8515,7 @@
       </p:sp>
       <p:sp>
         <p:nvSpPr>
-          <p:cNvPr id="1719172790" name="Text 14"/>
+          <p:cNvPr id="865568296" name="Text 14"/>
           <p:cNvSpPr/>
           <p:nvPr/>
         </p:nvSpPr>
@@ -8555,7 +8555,7 @@
       </p:sp>
       <p:sp>
         <p:nvSpPr>
-          <p:cNvPr id="1342968338" name="Shape 15"/>
+          <p:cNvPr id="18098999" name="Shape 15"/>
           <p:cNvSpPr/>
           <p:nvPr/>
         </p:nvSpPr>
@@ -8587,7 +8587,7 @@
       </p:sp>
       <p:sp>
         <p:nvSpPr>
-          <p:cNvPr id="1917221382" name="Shape 16"/>
+          <p:cNvPr id="1238095575" name="Shape 16"/>
           <p:cNvSpPr/>
           <p:nvPr/>
         </p:nvSpPr>
@@ -8619,7 +8619,7 @@
       </p:sp>
       <p:pic>
         <p:nvPicPr>
-          <p:cNvPr id="415495657" name="Image 3" descr="preencoded.png"/>
+          <p:cNvPr id="816100770" name="Image 3" descr="preencoded.png"/>
           <p:cNvPicPr>
             <a:picLocks noChangeAspect="1"/>
           </p:cNvPicPr>
@@ -8641,7 +8641,7 @@
       </p:pic>
       <p:sp>
         <p:nvSpPr>
-          <p:cNvPr id="1438384368" name="Text 17"/>
+          <p:cNvPr id="833168143" name="Text 17"/>
           <p:cNvSpPr/>
           <p:nvPr/>
         </p:nvSpPr>
@@ -8681,7 +8681,7 @@
       </p:sp>
       <p:sp>
         <p:nvSpPr>
-          <p:cNvPr id="1503747847" name="Text 18"/>
+          <p:cNvPr id="1447454764" name="Text 18"/>
           <p:cNvSpPr/>
           <p:nvPr/>
         </p:nvSpPr>
@@ -8721,7 +8721,7 @@
       </p:sp>
       <p:sp>
         <p:nvSpPr>
-          <p:cNvPr id="1528738570" name="Shape 19"/>
+          <p:cNvPr id="963023417" name="Shape 19"/>
           <p:cNvSpPr/>
           <p:nvPr/>
         </p:nvSpPr>
@@ -8753,7 +8753,7 @@
       </p:sp>
       <p:sp>
         <p:nvSpPr>
-          <p:cNvPr id="1056780616" name="Shape 20"/>
+          <p:cNvPr id="1121948843" name="Shape 20"/>
           <p:cNvSpPr/>
           <p:nvPr/>
         </p:nvSpPr>
@@ -8785,7 +8785,7 @@
       </p:sp>
       <p:pic>
         <p:nvPicPr>
-          <p:cNvPr id="1844908613" name="Image 4" descr="preencoded.png"/>
+          <p:cNvPr id="1161990824" name="Image 4" descr="preencoded.png"/>
           <p:cNvPicPr>
             <a:picLocks noChangeAspect="1"/>
           </p:cNvPicPr>
@@ -8807,7 +8807,7 @@
       </p:pic>
       <p:sp>
         <p:nvSpPr>
-          <p:cNvPr id="1221398879" name="Text 21"/>
+          <p:cNvPr id="758183034" name="Text 21"/>
           <p:cNvSpPr/>
           <p:nvPr/>
         </p:nvSpPr>
@@ -8847,7 +8847,7 @@
       </p:sp>
       <p:sp>
         <p:nvSpPr>
-          <p:cNvPr id="1202070424" name="Text 22"/>
+          <p:cNvPr id="965799699" name="Text 22"/>
           <p:cNvSpPr/>
           <p:nvPr/>
         </p:nvSpPr>
@@ -8887,7 +8887,7 @@
       </p:sp>
       <p:sp>
         <p:nvSpPr>
-          <p:cNvPr id="772879760" name="Shape 23"/>
+          <p:cNvPr id="1154854069" name="Shape 23"/>
           <p:cNvSpPr/>
           <p:nvPr/>
         </p:nvSpPr>
@@ -8919,7 +8919,7 @@
       </p:sp>
       <p:sp>
         <p:nvSpPr>
-          <p:cNvPr id="670786890" name="Shape 24"/>
+          <p:cNvPr id="1552638001" name="Shape 24"/>
           <p:cNvSpPr/>
           <p:nvPr/>
         </p:nvSpPr>
@@ -8951,7 +8951,7 @@
       </p:sp>
       <p:pic>
         <p:nvPicPr>
-          <p:cNvPr id="274620359" name="Image 5" descr="preencoded.png"/>
+          <p:cNvPr id="1514613822" name="Image 5" descr="preencoded.png"/>
           <p:cNvPicPr>
             <a:picLocks noChangeAspect="1"/>
           </p:cNvPicPr>
@@ -8973,7 +8973,7 @@
       </p:pic>
       <p:sp>
         <p:nvSpPr>
-          <p:cNvPr id="969742865" name="Text 25"/>
+          <p:cNvPr id="103802037" name="Text 25"/>
           <p:cNvSpPr/>
           <p:nvPr/>
         </p:nvSpPr>
@@ -9013,7 +9013,7 @@
       </p:sp>
       <p:sp>
         <p:nvSpPr>
-          <p:cNvPr id="1815803600" name="Text 26"/>
+          <p:cNvPr id="1169203306" name="Text 26"/>
           <p:cNvSpPr/>
           <p:nvPr/>
         </p:nvSpPr>
@@ -9053,7 +9053,7 @@
       </p:sp>
       <p:sp>
         <p:nvSpPr>
-          <p:cNvPr id="1128578488" name="Shape 27"/>
+          <p:cNvPr id="1093091263" name="Shape 27"/>
           <p:cNvSpPr/>
           <p:nvPr/>
         </p:nvSpPr>
@@ -9085,7 +9085,7 @@
       </p:sp>
       <p:sp>
         <p:nvSpPr>
-          <p:cNvPr id="1100136334" name="Shape 28"/>
+          <p:cNvPr id="511875063" name="Shape 28"/>
           <p:cNvSpPr/>
           <p:nvPr/>
         </p:nvSpPr>
@@ -9117,7 +9117,7 @@
       </p:sp>
       <p:pic>
         <p:nvPicPr>
-          <p:cNvPr id="344707397" name="Image 6" descr="preencoded.png"/>
+          <p:cNvPr id="623971902" name="Image 6" descr="preencoded.png"/>
           <p:cNvPicPr>
             <a:picLocks noChangeAspect="1"/>
           </p:cNvPicPr>
@@ -9139,7 +9139,7 @@
       </p:pic>
       <p:sp>
         <p:nvSpPr>
-          <p:cNvPr id="1992769754" name="Text 29"/>
+          <p:cNvPr id="132688729" name="Text 29"/>
           <p:cNvSpPr/>
           <p:nvPr/>
         </p:nvSpPr>
@@ -9179,7 +9179,7 @@
       </p:sp>
       <p:sp>
         <p:nvSpPr>
-          <p:cNvPr id="591994674" name="Text 30"/>
+          <p:cNvPr id="939847538" name="Text 30"/>
           <p:cNvSpPr/>
           <p:nvPr/>
         </p:nvSpPr>
@@ -9219,7 +9219,7 @@
       </p:sp>
       <p:sp>
         <p:nvSpPr>
-          <p:cNvPr id="1908717275" name="Shape 31"/>
+          <p:cNvPr id="534196743" name="Shape 31"/>
           <p:cNvSpPr/>
           <p:nvPr/>
         </p:nvSpPr>
@@ -9251,7 +9251,7 @@
       </p:sp>
       <p:sp>
         <p:nvSpPr>
-          <p:cNvPr id="979142240" name="Shape 32"/>
+          <p:cNvPr id="1649556867" name="Shape 32"/>
           <p:cNvSpPr/>
           <p:nvPr/>
         </p:nvSpPr>
@@ -9283,7 +9283,7 @@
       </p:sp>
       <p:pic>
         <p:nvPicPr>
-          <p:cNvPr id="1604168991" name="Image 7" descr="preencoded.png"/>
+          <p:cNvPr id="1759122984" name="Image 7" descr="preencoded.png"/>
           <p:cNvPicPr>
             <a:picLocks noChangeAspect="1"/>
           </p:cNvPicPr>
@@ -9305,7 +9305,7 @@
       </p:pic>
       <p:sp>
         <p:nvSpPr>
-          <p:cNvPr id="1029362058" name="Text 33"/>
+          <p:cNvPr id="966720769" name="Text 33"/>
           <p:cNvSpPr/>
           <p:nvPr/>
         </p:nvSpPr>
@@ -9345,7 +9345,7 @@
       </p:sp>
       <p:sp>
         <p:nvSpPr>
-          <p:cNvPr id="1980045677" name="Text 34"/>
+          <p:cNvPr id="758501066" name="Text 34"/>
           <p:cNvSpPr/>
           <p:nvPr/>
         </p:nvSpPr>
@@ -9425,7 +9425,7 @@
       </p:grpSpPr>
       <p:sp>
         <p:nvSpPr>
-          <p:cNvPr id="1136663593" name="Shape 0"/>
+          <p:cNvPr id="1496495845" name="Shape 0"/>
           <p:cNvSpPr/>
           <p:nvPr/>
         </p:nvSpPr>
@@ -9450,7 +9450,7 @@
       </p:sp>
       <p:sp>
         <p:nvSpPr>
-          <p:cNvPr id="142557957" name="Text 1"/>
+          <p:cNvPr id="1921282384" name="Text 1"/>
           <p:cNvSpPr/>
           <p:nvPr/>
         </p:nvSpPr>
@@ -9490,7 +9490,7 @@
       </p:sp>
       <p:sp>
         <p:nvSpPr>
-          <p:cNvPr id="570943661" name="Text 2"/>
+          <p:cNvPr id="1770077668" name="Text 2"/>
           <p:cNvSpPr/>
           <p:nvPr/>
         </p:nvSpPr>
@@ -9530,7 +9530,7 @@
       </p:sp>
       <p:graphicFrame>
         <p:nvGraphicFramePr>
-          <p:cNvPr id="538662315" name="Chart 0"/>
+          <p:cNvPr id="608968546" name="Chart 0"/>
           <p:cNvGraphicFramePr>
             <a:graphicFrameLocks xmlns:a="http://schemas.openxmlformats.org/drawingml/2006/main"/>
           </p:cNvGraphicFramePr>
@@ -9548,7 +9548,7 @@
       </p:graphicFrame>
       <p:sp>
         <p:nvSpPr>
-          <p:cNvPr id="1833194616" name="Text 3"/>
+          <p:cNvPr id="693088669" name="Text 3"/>
           <p:cNvSpPr/>
           <p:nvPr/>
         </p:nvSpPr>
@@ -9628,7 +9628,7 @@
       </p:grpSpPr>
       <p:sp>
         <p:nvSpPr>
-          <p:cNvPr id="187643257" name="Shape 0"/>
+          <p:cNvPr id="32890695" name="Shape 0"/>
           <p:cNvSpPr/>
           <p:nvPr/>
         </p:nvSpPr>
@@ -9653,7 +9653,7 @@
       </p:sp>
       <p:sp>
         <p:nvSpPr>
-          <p:cNvPr id="823832515" name="Text 1"/>
+          <p:cNvPr id="1170533820" name="Text 1"/>
           <p:cNvSpPr/>
           <p:nvPr/>
         </p:nvSpPr>
@@ -9693,7 +9693,7 @@
       </p:sp>
       <p:sp>
         <p:nvSpPr>
-          <p:cNvPr id="1639764156" name="Text 2"/>
+          <p:cNvPr id="262824177" name="Text 2"/>
           <p:cNvSpPr/>
           <p:nvPr/>
         </p:nvSpPr>
@@ -9733,7 +9733,7 @@
       </p:sp>
       <p:sp>
         <p:nvSpPr>
-          <p:cNvPr id="1808267942" name="Shape 3"/>
+          <p:cNvPr id="1615004947" name="Shape 3"/>
           <p:cNvSpPr/>
           <p:nvPr/>
         </p:nvSpPr>
@@ -9765,7 +9765,7 @@
       </p:sp>
       <p:sp>
         <p:nvSpPr>
-          <p:cNvPr id="298677927" name="Shape 4"/>
+          <p:cNvPr id="929136915" name="Shape 4"/>
           <p:cNvSpPr/>
           <p:nvPr/>
         </p:nvSpPr>
@@ -9790,7 +9790,7 @@
       </p:sp>
       <p:sp>
         <p:nvSpPr>
-          <p:cNvPr id="311159500" name="Shape 5"/>
+          <p:cNvPr id="1441857189" name="Shape 5"/>
           <p:cNvSpPr/>
           <p:nvPr/>
         </p:nvSpPr>
@@ -9822,7 +9822,7 @@
       </p:sp>
       <p:pic>
         <p:nvPicPr>
-          <p:cNvPr id="1808022716" name="Image 0" descr="preencoded.png"/>
+          <p:cNvPr id="1900645659" name="Image 0" descr="preencoded.png"/>
           <p:cNvPicPr>
             <a:picLocks noChangeAspect="1"/>
           </p:cNvPicPr>
@@ -9844,7 +9844,7 @@
       </p:pic>
       <p:sp>
         <p:nvSpPr>
-          <p:cNvPr id="465200898" name="Text 6"/>
+          <p:cNvPr id="1447042520" name="Text 6"/>
           <p:cNvSpPr/>
           <p:nvPr/>
         </p:nvSpPr>
@@ -9884,7 +9884,7 @@
       </p:sp>
       <p:sp>
         <p:nvSpPr>
-          <p:cNvPr id="759973425" name="Text 7"/>
+          <p:cNvPr id="1976198474" name="Text 7"/>
           <p:cNvSpPr/>
           <p:nvPr/>
         </p:nvSpPr>
@@ -9924,7 +9924,7 @@
       </p:sp>
       <p:sp>
         <p:nvSpPr>
-          <p:cNvPr id="698987790" name="Shape 8"/>
+          <p:cNvPr id="1418825100" name="Shape 8"/>
           <p:cNvSpPr/>
           <p:nvPr/>
         </p:nvSpPr>
@@ -9956,7 +9956,7 @@
       </p:sp>
       <p:sp>
         <p:nvSpPr>
-          <p:cNvPr id="1600305110" name="Shape 9"/>
+          <p:cNvPr id="785126043" name="Shape 9"/>
           <p:cNvSpPr/>
           <p:nvPr/>
         </p:nvSpPr>
@@ -9981,7 +9981,7 @@
       </p:sp>
       <p:sp>
         <p:nvSpPr>
-          <p:cNvPr id="1741411958" name="Shape 10"/>
+          <p:cNvPr id="595306676" name="Shape 10"/>
           <p:cNvSpPr/>
           <p:nvPr/>
         </p:nvSpPr>
@@ -10013,7 +10013,7 @@
       </p:sp>
       <p:pic>
         <p:nvPicPr>
-          <p:cNvPr id="801151156" name="Image 1" descr="preencoded.png"/>
+          <p:cNvPr id="77447532" name="Image 1" descr="preencoded.png"/>
           <p:cNvPicPr>
             <a:picLocks noChangeAspect="1"/>
           </p:cNvPicPr>
@@ -10035,7 +10035,7 @@
       </p:pic>
       <p:sp>
         <p:nvSpPr>
-          <p:cNvPr id="1088964713" name="Text 11"/>
+          <p:cNvPr id="1329390847" name="Text 11"/>
           <p:cNvSpPr/>
           <p:nvPr/>
         </p:nvSpPr>
@@ -10075,7 +10075,7 @@
       </p:sp>
       <p:sp>
         <p:nvSpPr>
-          <p:cNvPr id="217870411" name="Text 12"/>
+          <p:cNvPr id="1392347833" name="Text 12"/>
           <p:cNvSpPr/>
           <p:nvPr/>
         </p:nvSpPr>
@@ -10115,7 +10115,7 @@
       </p:sp>
       <p:sp>
         <p:nvSpPr>
-          <p:cNvPr id="2048238217" name="Shape 13"/>
+          <p:cNvPr id="197345563" name="Shape 13"/>
           <p:cNvSpPr/>
           <p:nvPr/>
         </p:nvSpPr>
@@ -10147,7 +10147,7 @@
       </p:sp>
       <p:sp>
         <p:nvSpPr>
-          <p:cNvPr id="1520192141" name="Shape 14"/>
+          <p:cNvPr id="819604040" name="Shape 14"/>
           <p:cNvSpPr/>
           <p:nvPr/>
         </p:nvSpPr>
@@ -10172,7 +10172,7 @@
       </p:sp>
       <p:sp>
         <p:nvSpPr>
-          <p:cNvPr id="620892915" name="Shape 15"/>
+          <p:cNvPr id="1855565151" name="Shape 15"/>
           <p:cNvSpPr/>
           <p:nvPr/>
         </p:nvSpPr>
@@ -10204,7 +10204,7 @@
       </p:sp>
       <p:pic>
         <p:nvPicPr>
-          <p:cNvPr id="1635698827" name="Image 2" descr="preencoded.png"/>
+          <p:cNvPr id="1130615543" name="Image 2" descr="preencoded.png"/>
           <p:cNvPicPr>
             <a:picLocks noChangeAspect="1"/>
           </p:cNvPicPr>
@@ -10226,7 +10226,7 @@
       </p:pic>
       <p:sp>
         <p:nvSpPr>
-          <p:cNvPr id="130036048" name="Text 16"/>
+          <p:cNvPr id="369981292" name="Text 16"/>
           <p:cNvSpPr/>
           <p:nvPr/>
         </p:nvSpPr>
@@ -10266,7 +10266,7 @@
       </p:sp>
       <p:sp>
         <p:nvSpPr>
-          <p:cNvPr id="2017520325" name="Text 17"/>
+          <p:cNvPr id="909392587" name="Text 17"/>
           <p:cNvSpPr/>
           <p:nvPr/>
         </p:nvSpPr>
@@ -10306,7 +10306,7 @@
       </p:sp>
       <p:sp>
         <p:nvSpPr>
-          <p:cNvPr id="1340362062" name="Shape 18"/>
+          <p:cNvPr id="764854293" name="Shape 18"/>
           <p:cNvSpPr/>
           <p:nvPr/>
         </p:nvSpPr>
@@ -10338,7 +10338,7 @@
       </p:sp>
       <p:sp>
         <p:nvSpPr>
-          <p:cNvPr id="1428609791" name="Shape 19"/>
+          <p:cNvPr id="1950099079" name="Shape 19"/>
           <p:cNvSpPr/>
           <p:nvPr/>
         </p:nvSpPr>
@@ -10363,7 +10363,7 @@
       </p:sp>
       <p:sp>
         <p:nvSpPr>
-          <p:cNvPr id="1705467836" name="Shape 20"/>
+          <p:cNvPr id="1970564086" name="Shape 20"/>
           <p:cNvSpPr/>
           <p:nvPr/>
         </p:nvSpPr>
@@ -10395,7 +10395,7 @@
       </p:sp>
       <p:pic>
         <p:nvPicPr>
-          <p:cNvPr id="1115100446" name="Image 3" descr="preencoded.png"/>
+          <p:cNvPr id="1195257798" name="Image 3" descr="preencoded.png"/>
           <p:cNvPicPr>
             <a:picLocks noChangeAspect="1"/>
           </p:cNvPicPr>
@@ -10417,7 +10417,7 @@
       </p:pic>
       <p:sp>
         <p:nvSpPr>
-          <p:cNvPr id="918704051" name="Text 21"/>
+          <p:cNvPr id="692282868" name="Text 21"/>
           <p:cNvSpPr/>
           <p:nvPr/>
         </p:nvSpPr>
@@ -10457,7 +10457,7 @@
       </p:sp>
       <p:sp>
         <p:nvSpPr>
-          <p:cNvPr id="1285953033" name="Text 22"/>
+          <p:cNvPr id="58178656" name="Text 22"/>
           <p:cNvSpPr/>
           <p:nvPr/>
         </p:nvSpPr>
@@ -10537,7 +10537,7 @@
       </p:grpSpPr>
       <p:sp>
         <p:nvSpPr>
-          <p:cNvPr id="659913850" name="Shape 0"/>
+          <p:cNvPr id="2040461791" name="Shape 0"/>
           <p:cNvSpPr/>
           <p:nvPr/>
         </p:nvSpPr>
@@ -10562,7 +10562,7 @@
       </p:sp>
       <p:sp>
         <p:nvSpPr>
-          <p:cNvPr id="681440131" name="Text 1"/>
+          <p:cNvPr id="1296334210" name="Text 1"/>
           <p:cNvSpPr/>
           <p:nvPr/>
         </p:nvSpPr>
@@ -10602,7 +10602,7 @@
       </p:sp>
       <p:sp>
         <p:nvSpPr>
-          <p:cNvPr id="80636078" name="Text 2"/>
+          <p:cNvPr id="1944493833" name="Text 2"/>
           <p:cNvSpPr/>
           <p:nvPr/>
         </p:nvSpPr>
@@ -10642,7 +10642,7 @@
       </p:sp>
       <p:sp>
         <p:nvSpPr>
-          <p:cNvPr id="2141018650" name="Shape 3"/>
+          <p:cNvPr id="431690153" name="Shape 3"/>
           <p:cNvSpPr/>
           <p:nvPr/>
         </p:nvSpPr>
@@ -10674,7 +10674,7 @@
       </p:sp>
       <p:pic>
         <p:nvPicPr>
-          <p:cNvPr id="1692607876" name="Image 0" descr="preencoded.png"/>
+          <p:cNvPr id="1274052136" name="Image 0" descr="preencoded.png"/>
           <p:cNvPicPr>
             <a:picLocks noChangeAspect="1"/>
           </p:cNvPicPr>
@@ -10696,7 +10696,7 @@
       </p:pic>
       <p:sp>
         <p:nvSpPr>
-          <p:cNvPr id="30337387" name="Text 4"/>
+          <p:cNvPr id="1610110956" name="Text 4"/>
           <p:cNvSpPr/>
           <p:nvPr/>
         </p:nvSpPr>
@@ -10736,7 +10736,7 @@
       </p:sp>
       <p:sp>
         <p:nvSpPr>
-          <p:cNvPr id="369854635" name="Text 5"/>
+          <p:cNvPr id="1087353705" name="Text 5"/>
           <p:cNvSpPr/>
           <p:nvPr/>
         </p:nvSpPr>
@@ -10776,7 +10776,7 @@
       </p:sp>
       <p:sp>
         <p:nvSpPr>
-          <p:cNvPr id="1346728186" name="Shape 6"/>
+          <p:cNvPr id="54125444" name="Shape 6"/>
           <p:cNvSpPr/>
           <p:nvPr/>
         </p:nvSpPr>
@@ -10803,7 +10803,7 @@
       </p:sp>
       <p:sp>
         <p:nvSpPr>
-          <p:cNvPr id="619522779" name="Text 7"/>
+          <p:cNvPr id="1221445571" name="Text 7"/>
           <p:cNvSpPr/>
           <p:nvPr/>
         </p:nvSpPr>
@@ -10843,7 +10843,7 @@
       </p:sp>
       <p:sp>
         <p:nvSpPr>
-          <p:cNvPr id="1245677122" name="Shape 8"/>
+          <p:cNvPr id="1637576336" name="Shape 8"/>
           <p:cNvSpPr/>
           <p:nvPr/>
         </p:nvSpPr>
@@ -10875,7 +10875,7 @@
       </p:sp>
       <p:pic>
         <p:nvPicPr>
-          <p:cNvPr id="1545088704" name="Image 1" descr="preencoded.png"/>
+          <p:cNvPr id="435606377" name="Image 1" descr="preencoded.png"/>
           <p:cNvPicPr>
             <a:picLocks noChangeAspect="1"/>
           </p:cNvPicPr>
@@ -10897,7 +10897,7 @@
       </p:pic>
       <p:sp>
         <p:nvSpPr>
-          <p:cNvPr id="1999258125" name="Text 9"/>
+          <p:cNvPr id="171617679" name="Text 9"/>
           <p:cNvSpPr/>
           <p:nvPr/>
         </p:nvSpPr>
@@ -10937,7 +10937,7 @@
       </p:sp>
       <p:sp>
         <p:nvSpPr>
-          <p:cNvPr id="1372553712" name="Text 10"/>
+          <p:cNvPr id="1179372716" name="Text 10"/>
           <p:cNvSpPr/>
           <p:nvPr/>
         </p:nvSpPr>
@@ -10977,7 +10977,7 @@
       </p:sp>
       <p:sp>
         <p:nvSpPr>
-          <p:cNvPr id="257265430" name="Shape 11"/>
+          <p:cNvPr id="1084004496" name="Shape 11"/>
           <p:cNvSpPr/>
           <p:nvPr/>
         </p:nvSpPr>
@@ -11004,7 +11004,7 @@
       </p:sp>
       <p:sp>
         <p:nvSpPr>
-          <p:cNvPr id="1924768760" name="Text 12"/>
+          <p:cNvPr id="2108601785" name="Text 12"/>
           <p:cNvSpPr/>
           <p:nvPr/>
         </p:nvSpPr>
@@ -11044,7 +11044,7 @@
       </p:sp>
       <p:sp>
         <p:nvSpPr>
-          <p:cNvPr id="470272464" name="Shape 13"/>
+          <p:cNvPr id="595426998" name="Shape 13"/>
           <p:cNvSpPr/>
           <p:nvPr/>
         </p:nvSpPr>
@@ -11076,7 +11076,7 @@
       </p:sp>
       <p:pic>
         <p:nvPicPr>
-          <p:cNvPr id="1459182381" name="Image 2" descr="preencoded.png"/>
+          <p:cNvPr id="868252876" name="Image 2" descr="preencoded.png"/>
           <p:cNvPicPr>
             <a:picLocks noChangeAspect="1"/>
           </p:cNvPicPr>
@@ -11098,7 +11098,7 @@
       </p:pic>
       <p:sp>
         <p:nvSpPr>
-          <p:cNvPr id="176852539" name="Text 14"/>
+          <p:cNvPr id="1396137579" name="Text 14"/>
           <p:cNvSpPr/>
           <p:nvPr/>
         </p:nvSpPr>
@@ -11138,7 +11138,7 @@
       </p:sp>
       <p:sp>
         <p:nvSpPr>
-          <p:cNvPr id="2065338849" name="Text 15"/>
+          <p:cNvPr id="1640405110" name="Text 15"/>
           <p:cNvSpPr/>
           <p:nvPr/>
         </p:nvSpPr>
@@ -11178,7 +11178,7 @@
       </p:sp>
       <p:sp>
         <p:nvSpPr>
-          <p:cNvPr id="1183274969" name="Shape 16"/>
+          <p:cNvPr id="975292991" name="Shape 16"/>
           <p:cNvSpPr/>
           <p:nvPr/>
         </p:nvSpPr>
@@ -11205,7 +11205,7 @@
       </p:sp>
       <p:sp>
         <p:nvSpPr>
-          <p:cNvPr id="683633210" name="Text 17"/>
+          <p:cNvPr id="1353651968" name="Text 17"/>
           <p:cNvSpPr/>
           <p:nvPr/>
         </p:nvSpPr>
@@ -11245,7 +11245,7 @@
       </p:sp>
       <p:sp>
         <p:nvSpPr>
-          <p:cNvPr id="1403178278" name="Shape 18"/>
+          <p:cNvPr id="1137161307" name="Shape 18"/>
           <p:cNvSpPr/>
           <p:nvPr/>
         </p:nvSpPr>
@@ -11277,7 +11277,7 @@
       </p:sp>
       <p:pic>
         <p:nvPicPr>
-          <p:cNvPr id="1311779024" name="Image 3" descr="preencoded.png"/>
+          <p:cNvPr id="1743764533" name="Image 3" descr="preencoded.png"/>
           <p:cNvPicPr>
             <a:picLocks noChangeAspect="1"/>
           </p:cNvPicPr>
@@ -11299,7 +11299,7 @@
       </p:pic>
       <p:sp>
         <p:nvSpPr>
-          <p:cNvPr id="1116635676" name="Text 19"/>
+          <p:cNvPr id="1946314645" name="Text 19"/>
           <p:cNvSpPr/>
           <p:nvPr/>
         </p:nvSpPr>
@@ -11339,7 +11339,7 @@
       </p:sp>
       <p:sp>
         <p:nvSpPr>
-          <p:cNvPr id="527664263" name="Text 20"/>
+          <p:cNvPr id="884859271" name="Text 20"/>
           <p:cNvSpPr/>
           <p:nvPr/>
         </p:nvSpPr>
@@ -11379,7 +11379,7 @@
       </p:sp>
       <p:sp>
         <p:nvSpPr>
-          <p:cNvPr id="1264816144" name="Shape 21"/>
+          <p:cNvPr id="157975455" name="Shape 21"/>
           <p:cNvSpPr/>
           <p:nvPr/>
         </p:nvSpPr>
@@ -11406,7 +11406,7 @@
       </p:sp>
       <p:sp>
         <p:nvSpPr>
-          <p:cNvPr id="1753703003" name="Text 22"/>
+          <p:cNvPr id="1145148207" name="Text 22"/>
           <p:cNvSpPr/>
           <p:nvPr/>
         </p:nvSpPr>
@@ -11446,7 +11446,7 @@
       </p:sp>
       <p:sp>
         <p:nvSpPr>
-          <p:cNvPr id="855275969" name="Text 23"/>
+          <p:cNvPr id="114313860" name="Text 23"/>
           <p:cNvSpPr/>
           <p:nvPr/>
         </p:nvSpPr>
@@ -11503,13 +11503,6 @@
 <file path=ppt/slides/slide9.xml><?xml version="1.0" encoding="utf-8"?>
 <p:sld xmlns:a="http://schemas.openxmlformats.org/drawingml/2006/main" xmlns:r="http://schemas.openxmlformats.org/officeDocument/2006/relationships" xmlns:p="http://schemas.openxmlformats.org/presentationml/2006/main" xmlns:m="http://schemas.openxmlformats.org/officeDocument/2006/math" xmlns:w="http://schemas.openxmlformats.org/wordprocessingml/2006/main" xmlns:mc="http://schemas.openxmlformats.org/markup-compatibility/2006" showMasterPhAnim="0" showMasterSp="1" show="1">
   <p:cSld name="Slide 9">
-    <p:bg>
-      <p:bgPr shadeToTitle="0">
-        <a:solidFill>
-          <a:srgbClr val="F4F7FB"/>
-        </a:solidFill>
-      </p:bgPr>
-    </p:bg>
     <p:spTree>
       <p:nvGrpSpPr>
         <p:cNvPr id="1" name=""/>
@@ -11526,7 +11519,7 @@
       </p:grpSpPr>
       <p:sp>
         <p:nvSpPr>
-          <p:cNvPr id="975648494" name="Shape 0"/>
+          <p:cNvPr id="192025294" name="Shape 0"/>
           <p:cNvSpPr/>
           <p:nvPr/>
         </p:nvSpPr>
@@ -11551,7 +11544,7 @@
       </p:sp>
       <p:sp>
         <p:nvSpPr>
-          <p:cNvPr id="1375239181" name="Text 1"/>
+          <p:cNvPr id="1894300523" name="Text 1"/>
           <p:cNvSpPr/>
           <p:nvPr/>
         </p:nvSpPr>
@@ -11591,13 +11584,13 @@
       </p:sp>
       <p:sp>
         <p:nvSpPr>
-          <p:cNvPr id="566564208" name=""/>
+          <p:cNvPr id="1747284253" name=""/>
           <p:cNvSpPr/>
           <p:nvPr/>
         </p:nvSpPr>
         <p:spPr bwMode="auto">
           <a:xfrm flipH="0" flipV="0">
-            <a:off x="6296263" y="1454241"/>
+            <a:off x="6402096" y="1454240"/>
             <a:ext cx="2373593" cy="2560679"/>
           </a:xfrm>
         </p:spPr>
@@ -11800,6 +11793,28 @@
           </a:p>
         </p:txBody>
       </p:sp>
+      <p:pic>
+        <p:nvPicPr>
+          <p:cNvPr id="2095430978" name=""/>
+          <p:cNvPicPr>
+            <a:picLocks noChangeAspect="1"/>
+          </p:cNvPicPr>
+          <p:nvPr/>
+        </p:nvPicPr>
+        <p:blipFill rotWithShape="1">
+          <a:blip r:embed="rId3"/>
+          <a:stretch/>
+        </p:blipFill>
+        <p:spPr bwMode="auto">
+          <a:xfrm flipH="0" flipV="0">
+            <a:off x="1198562" y="909637"/>
+            <a:ext cx="3529635" cy="4022664"/>
+          </a:xfrm>
+          <a:prstGeom prst="rect">
+            <a:avLst/>
+          </a:prstGeom>
+        </p:spPr>
+      </p:pic>
     </p:spTree>
   </p:cSld>
   <p:clrMapOvr>

--- a/Презентация .pptx
+++ b/Презентация .pptx
@@ -5,7 +5,7 @@
     <p:sldMasterId id="2147483648" r:id="rId1"/>
   </p:sldMasterIdLst>
   <p:notesMasterIdLst>
-    <p:notesMasterId r:id="rId17"/>
+    <p:notesMasterId r:id="rId18"/>
   </p:notesMasterIdLst>
   <p:sldIdLst>
     <p:sldId id="256" r:id="rId4"/>
@@ -21,6 +21,7 @@
     <p:sldId id="266" r:id="rId14"/>
     <p:sldId id="267" r:id="rId15"/>
     <p:sldId id="268" r:id="rId16"/>
+    <p:sldId id="269" r:id="rId17"/>
   </p:sldIdLst>
   <p:sldSz cx="9144000" cy="5143500" type="screen16x9"/>
   <p:notesSz cx="5143500" cy="9144000"/>
@@ -553,7 +554,7 @@
       </p:grpSpPr>
       <p:sp>
         <p:nvSpPr>
-          <p:cNvPr id="1913433061" name="Верхний колонтитул 1"/>
+          <p:cNvPr id="1678961104" name="Верхний колонтитул 1"/>
           <p:cNvSpPr>
             <a:spLocks noGrp="1"/>
           </p:cNvSpPr>
@@ -587,7 +588,7 @@
       </p:sp>
       <p:sp>
         <p:nvSpPr>
-          <p:cNvPr id="58732188" name="Дата 2"/>
+          <p:cNvPr id="276763225" name="Дата 2"/>
           <p:cNvSpPr>
             <a:spLocks noGrp="1"/>
           </p:cNvSpPr>
@@ -625,7 +626,7 @@
       </p:sp>
       <p:sp>
         <p:nvSpPr>
-          <p:cNvPr id="105570813" name="Образ слайда 3"/>
+          <p:cNvPr id="2029038532" name="Образ слайда 3"/>
           <p:cNvSpPr>
             <a:spLocks noChangeAspect="1" noGrp="1" noRot="1"/>
           </p:cNvSpPr>
@@ -661,7 +662,7 @@
       </p:sp>
       <p:sp>
         <p:nvSpPr>
-          <p:cNvPr id="375477049" name="Заметки 4"/>
+          <p:cNvPr id="1521250115" name="Заметки 4"/>
           <p:cNvSpPr>
             <a:spLocks noGrp="1"/>
           </p:cNvSpPr>
@@ -735,7 +736,7 @@
       </p:sp>
       <p:sp>
         <p:nvSpPr>
-          <p:cNvPr id="1515047366" name="Нижний колонтитул 5"/>
+          <p:cNvPr id="597681970" name="Нижний колонтитул 5"/>
           <p:cNvSpPr>
             <a:spLocks noGrp="1"/>
           </p:cNvSpPr>
@@ -769,7 +770,7 @@
       </p:sp>
       <p:sp>
         <p:nvSpPr>
-          <p:cNvPr id="906883902" name="Номер слайда 6"/>
+          <p:cNvPr id="1762900912" name="Номер слайда 6"/>
           <p:cNvSpPr>
             <a:spLocks noGrp="1"/>
           </p:cNvSpPr>
@@ -922,7 +923,7 @@
       </p:grpSpPr>
       <p:sp>
         <p:nvSpPr>
-          <p:cNvPr id="1948097269" name="Slide Image Placeholder 1"/>
+          <p:cNvPr id="1941690983" name="Slide Image Placeholder 1"/>
           <p:cNvSpPr>
             <a:spLocks noChangeAspect="1" noGrp="1" noRot="1"/>
           </p:cNvSpPr>
@@ -934,7 +935,7 @@
       </p:sp>
       <p:sp>
         <p:nvSpPr>
-          <p:cNvPr id="1220699666" name="Notes Placeholder 2"/>
+          <p:cNvPr id="1129068496" name="Notes Placeholder 2"/>
           <p:cNvSpPr>
             <a:spLocks noGrp="1"/>
           </p:cNvSpPr>
@@ -956,7 +957,7 @@
       </p:sp>
       <p:sp>
         <p:nvSpPr>
-          <p:cNvPr id="1240790983" name="Slide Number Placeholder 3"/>
+          <p:cNvPr id="937588603" name="Slide Number Placeholder 3"/>
           <p:cNvSpPr>
             <a:spLocks noGrp="1"/>
           </p:cNvSpPr>
@@ -1007,7 +1008,7 @@
       </p:grpSpPr>
       <p:sp>
         <p:nvSpPr>
-          <p:cNvPr id="296872050" name="Slide Image Placeholder 1"/>
+          <p:cNvPr id="303107902" name="Slide Image Placeholder 1"/>
           <p:cNvSpPr>
             <a:spLocks noChangeAspect="1" noGrp="1" noRot="1"/>
           </p:cNvSpPr>
@@ -1019,7 +1020,7 @@
       </p:sp>
       <p:sp>
         <p:nvSpPr>
-          <p:cNvPr id="864100848" name="Notes Placeholder 2"/>
+          <p:cNvPr id="1510017337" name="Notes Placeholder 2"/>
           <p:cNvSpPr>
             <a:spLocks noGrp="1"/>
           </p:cNvSpPr>
@@ -1041,7 +1042,7 @@
       </p:sp>
       <p:sp>
         <p:nvSpPr>
-          <p:cNvPr id="1983350655" name="Slide Number Placeholder 3"/>
+          <p:cNvPr id="1286068021" name="Slide Number Placeholder 3"/>
           <p:cNvSpPr>
             <a:spLocks noGrp="1"/>
           </p:cNvSpPr>
@@ -1092,7 +1093,7 @@
       </p:grpSpPr>
       <p:sp>
         <p:nvSpPr>
-          <p:cNvPr id="1285329555" name="Slide Image Placeholder 1"/>
+          <p:cNvPr id="457528479" name="Slide Image Placeholder 1"/>
           <p:cNvSpPr>
             <a:spLocks noChangeAspect="1" noGrp="1" noRot="1"/>
           </p:cNvSpPr>
@@ -1104,7 +1105,7 @@
       </p:sp>
       <p:sp>
         <p:nvSpPr>
-          <p:cNvPr id="896278353" name="Notes Placeholder 2"/>
+          <p:cNvPr id="1630779237" name="Notes Placeholder 2"/>
           <p:cNvSpPr>
             <a:spLocks noGrp="1"/>
           </p:cNvSpPr>
@@ -1126,7 +1127,7 @@
       </p:sp>
       <p:sp>
         <p:nvSpPr>
-          <p:cNvPr id="474824082" name="Slide Number Placeholder 3"/>
+          <p:cNvPr id="1835494868" name="Slide Number Placeholder 3"/>
           <p:cNvSpPr>
             <a:spLocks noGrp="1"/>
           </p:cNvSpPr>
@@ -1142,7 +1143,7 @@
             <a:pPr>
               <a:defRPr/>
             </a:pPr>
-            <a:fld id="{F7021451-1387-4CA6-816F-3879F97B5CBC}" type="slidenum">
+            <a:fld id="{22714996-0ABC-1AEA-BFA8-73D783D4BD7E}" type="slidenum">
               <a:rPr lang="en-US"/>
               <a:t>12</a:t>
             </a:fld>
@@ -1177,7 +1178,7 @@
       </p:grpSpPr>
       <p:sp>
         <p:nvSpPr>
-          <p:cNvPr id="1740164907" name="Slide Image Placeholder 1"/>
+          <p:cNvPr id="1960221516" name="Slide Image Placeholder 1"/>
           <p:cNvSpPr>
             <a:spLocks noChangeAspect="1" noGrp="1" noRot="1"/>
           </p:cNvSpPr>
@@ -1189,7 +1190,7 @@
       </p:sp>
       <p:sp>
         <p:nvSpPr>
-          <p:cNvPr id="715976550" name="Notes Placeholder 2"/>
+          <p:cNvPr id="1068632369" name="Notes Placeholder 2"/>
           <p:cNvSpPr>
             <a:spLocks noGrp="1"/>
           </p:cNvSpPr>
@@ -1211,7 +1212,7 @@
       </p:sp>
       <p:sp>
         <p:nvSpPr>
-          <p:cNvPr id="2138517074" name="Slide Number Placeholder 3"/>
+          <p:cNvPr id="1406034131" name="Slide Number Placeholder 3"/>
           <p:cNvSpPr>
             <a:spLocks noGrp="1"/>
           </p:cNvSpPr>
@@ -1229,7 +1230,7 @@
             </a:pPr>
             <a:fld id="{F7021451-1387-4CA6-816F-3879F97B5CBC}" type="slidenum">
               <a:rPr lang="en-US"/>
-              <a:t>14</a:t>
+              <a:t>12</a:t>
             </a:fld>
             <a:endParaRPr lang="en-US"/>
           </a:p>
@@ -1262,7 +1263,7 @@
       </p:grpSpPr>
       <p:sp>
         <p:nvSpPr>
-          <p:cNvPr id="1299357455" name="Slide Image Placeholder 1"/>
+          <p:cNvPr id="978241816" name="Slide Image Placeholder 1"/>
           <p:cNvSpPr>
             <a:spLocks noChangeAspect="1" noGrp="1" noRot="1"/>
           </p:cNvSpPr>
@@ -1274,7 +1275,7 @@
       </p:sp>
       <p:sp>
         <p:nvSpPr>
-          <p:cNvPr id="1285419015" name="Notes Placeholder 2"/>
+          <p:cNvPr id="1495558038" name="Notes Placeholder 2"/>
           <p:cNvSpPr>
             <a:spLocks noGrp="1"/>
           </p:cNvSpPr>
@@ -1296,7 +1297,92 @@
       </p:sp>
       <p:sp>
         <p:nvSpPr>
-          <p:cNvPr id="1405896994" name="Slide Number Placeholder 3"/>
+          <p:cNvPr id="1123196553" name="Slide Number Placeholder 3"/>
+          <p:cNvSpPr>
+            <a:spLocks noGrp="1"/>
+          </p:cNvSpPr>
+          <p:nvPr>
+            <p:ph type="sldNum" sz="quarter" idx="10"/>
+          </p:nvPr>
+        </p:nvSpPr>
+        <p:spPr bwMode="auto"/>
+        <p:txBody>
+          <a:bodyPr/>
+          <a:lstStyle/>
+          <a:p>
+            <a:pPr>
+              <a:defRPr/>
+            </a:pPr>
+            <a:fld id="{F7021451-1387-4CA6-816F-3879F97B5CBC}" type="slidenum">
+              <a:rPr lang="en-US"/>
+              <a:t>14</a:t>
+            </a:fld>
+            <a:endParaRPr lang="en-US"/>
+          </a:p>
+        </p:txBody>
+      </p:sp>
+    </p:spTree>
+  </p:cSld>
+  <p:clrMapOvr>
+    <a:masterClrMapping/>
+  </p:clrMapOvr>
+</p:notes>
+</file>
+
+<file path=ppt/notesSlides/notesSlide14.xml><?xml version="1.0" encoding="utf-8"?>
+<p:notes xmlns:a="http://schemas.openxmlformats.org/drawingml/2006/main" xmlns:r="http://schemas.openxmlformats.org/officeDocument/2006/relationships" xmlns:p="http://schemas.openxmlformats.org/presentationml/2006/main" xmlns:m="http://schemas.openxmlformats.org/officeDocument/2006/math" xmlns:w="http://schemas.openxmlformats.org/wordprocessingml/2006/main">
+  <p:cSld name="">
+    <p:spTree>
+      <p:nvGrpSpPr>
+        <p:cNvPr id="1" name=""/>
+        <p:cNvGrpSpPr/>
+        <p:nvPr/>
+      </p:nvGrpSpPr>
+      <p:grpSpPr bwMode="auto">
+        <a:xfrm>
+          <a:off x="0" y="0"/>
+          <a:ext cx="0" cy="0"/>
+          <a:chOff x="0" y="0"/>
+          <a:chExt cx="0" cy="0"/>
+        </a:xfrm>
+      </p:grpSpPr>
+      <p:sp>
+        <p:nvSpPr>
+          <p:cNvPr id="715108951" name="Slide Image Placeholder 1"/>
+          <p:cNvSpPr>
+            <a:spLocks noChangeAspect="1" noGrp="1" noRot="1"/>
+          </p:cNvSpPr>
+          <p:nvPr>
+            <p:ph type="sldImg"/>
+          </p:nvPr>
+        </p:nvSpPr>
+        <p:spPr bwMode="auto"/>
+      </p:sp>
+      <p:sp>
+        <p:nvSpPr>
+          <p:cNvPr id="1079759700" name="Notes Placeholder 2"/>
+          <p:cNvSpPr>
+            <a:spLocks noGrp="1"/>
+          </p:cNvSpPr>
+          <p:nvPr>
+            <p:ph type="body" idx="1"/>
+          </p:nvPr>
+        </p:nvSpPr>
+        <p:spPr bwMode="auto"/>
+        <p:txBody>
+          <a:bodyPr/>
+          <a:lstStyle/>
+          <a:p>
+            <a:pPr>
+              <a:defRPr/>
+            </a:pPr>
+            <a:endParaRPr lang="en-US"/>
+          </a:p>
+        </p:txBody>
+      </p:sp>
+      <p:sp>
+        <p:nvSpPr>
+          <p:cNvPr id="160667897" name="Slide Number Placeholder 3"/>
           <p:cNvSpPr>
             <a:spLocks noGrp="1"/>
           </p:cNvSpPr>
@@ -1347,7 +1433,7 @@
       </p:grpSpPr>
       <p:sp>
         <p:nvSpPr>
-          <p:cNvPr id="1625351437" name="Slide Image Placeholder 1"/>
+          <p:cNvPr id="1915835262" name="Slide Image Placeholder 1"/>
           <p:cNvSpPr>
             <a:spLocks noChangeAspect="1" noGrp="1" noRot="1"/>
           </p:cNvSpPr>
@@ -1359,7 +1445,7 @@
       </p:sp>
       <p:sp>
         <p:nvSpPr>
-          <p:cNvPr id="767991196" name="Notes Placeholder 2"/>
+          <p:cNvPr id="882524226" name="Notes Placeholder 2"/>
           <p:cNvSpPr>
             <a:spLocks noGrp="1"/>
           </p:cNvSpPr>
@@ -1381,7 +1467,7 @@
       </p:sp>
       <p:sp>
         <p:nvSpPr>
-          <p:cNvPr id="1808432060" name="Slide Number Placeholder 3"/>
+          <p:cNvPr id="2100986236" name="Slide Number Placeholder 3"/>
           <p:cNvSpPr>
             <a:spLocks noGrp="1"/>
           </p:cNvSpPr>
@@ -1432,7 +1518,7 @@
       </p:grpSpPr>
       <p:sp>
         <p:nvSpPr>
-          <p:cNvPr id="1279817297" name="Slide Image Placeholder 1"/>
+          <p:cNvPr id="1800469784" name="Slide Image Placeholder 1"/>
           <p:cNvSpPr>
             <a:spLocks noChangeAspect="1" noGrp="1" noRot="1"/>
           </p:cNvSpPr>
@@ -1444,7 +1530,7 @@
       </p:sp>
       <p:sp>
         <p:nvSpPr>
-          <p:cNvPr id="1969383721" name="Notes Placeholder 2"/>
+          <p:cNvPr id="83353382" name="Notes Placeholder 2"/>
           <p:cNvSpPr>
             <a:spLocks noGrp="1"/>
           </p:cNvSpPr>
@@ -1466,7 +1552,7 @@
       </p:sp>
       <p:sp>
         <p:nvSpPr>
-          <p:cNvPr id="1386401558" name="Slide Number Placeholder 3"/>
+          <p:cNvPr id="312643840" name="Slide Number Placeholder 3"/>
           <p:cNvSpPr>
             <a:spLocks noGrp="1"/>
           </p:cNvSpPr>
@@ -1517,7 +1603,7 @@
       </p:grpSpPr>
       <p:sp>
         <p:nvSpPr>
-          <p:cNvPr id="1290264239" name="Slide Image Placeholder 1"/>
+          <p:cNvPr id="333467472" name="Slide Image Placeholder 1"/>
           <p:cNvSpPr>
             <a:spLocks noChangeAspect="1" noGrp="1" noRot="1"/>
           </p:cNvSpPr>
@@ -1529,7 +1615,7 @@
       </p:sp>
       <p:sp>
         <p:nvSpPr>
-          <p:cNvPr id="618836791" name="Notes Placeholder 2"/>
+          <p:cNvPr id="298917178" name="Notes Placeholder 2"/>
           <p:cNvSpPr>
             <a:spLocks noGrp="1"/>
           </p:cNvSpPr>
@@ -1551,7 +1637,7 @@
       </p:sp>
       <p:sp>
         <p:nvSpPr>
-          <p:cNvPr id="1677702140" name="Slide Number Placeholder 3"/>
+          <p:cNvPr id="376643747" name="Slide Number Placeholder 3"/>
           <p:cNvSpPr>
             <a:spLocks noGrp="1"/>
           </p:cNvSpPr>
@@ -1602,7 +1688,7 @@
       </p:grpSpPr>
       <p:sp>
         <p:nvSpPr>
-          <p:cNvPr id="659889643" name="Slide Image Placeholder 1"/>
+          <p:cNvPr id="1902281531" name="Slide Image Placeholder 1"/>
           <p:cNvSpPr>
             <a:spLocks noChangeAspect="1" noGrp="1" noRot="1"/>
           </p:cNvSpPr>
@@ -1614,7 +1700,7 @@
       </p:sp>
       <p:sp>
         <p:nvSpPr>
-          <p:cNvPr id="1543389516" name="Notes Placeholder 2"/>
+          <p:cNvPr id="323745587" name="Notes Placeholder 2"/>
           <p:cNvSpPr>
             <a:spLocks noGrp="1"/>
           </p:cNvSpPr>
@@ -1636,7 +1722,7 @@
       </p:sp>
       <p:sp>
         <p:nvSpPr>
-          <p:cNvPr id="1406166137" name="Slide Number Placeholder 3"/>
+          <p:cNvPr id="1335350718" name="Slide Number Placeholder 3"/>
           <p:cNvSpPr>
             <a:spLocks noGrp="1"/>
           </p:cNvSpPr>
@@ -1687,7 +1773,7 @@
       </p:grpSpPr>
       <p:sp>
         <p:nvSpPr>
-          <p:cNvPr id="527870273" name="Slide Image Placeholder 1"/>
+          <p:cNvPr id="636905220" name="Slide Image Placeholder 1"/>
           <p:cNvSpPr>
             <a:spLocks noChangeAspect="1" noGrp="1" noRot="1"/>
           </p:cNvSpPr>
@@ -1699,7 +1785,7 @@
       </p:sp>
       <p:sp>
         <p:nvSpPr>
-          <p:cNvPr id="1308199462" name="Notes Placeholder 2"/>
+          <p:cNvPr id="295179715" name="Notes Placeholder 2"/>
           <p:cNvSpPr>
             <a:spLocks noGrp="1"/>
           </p:cNvSpPr>
@@ -1721,7 +1807,7 @@
       </p:sp>
       <p:sp>
         <p:nvSpPr>
-          <p:cNvPr id="1078277446" name="Slide Number Placeholder 3"/>
+          <p:cNvPr id="14573738" name="Slide Number Placeholder 3"/>
           <p:cNvSpPr>
             <a:spLocks noGrp="1"/>
           </p:cNvSpPr>
@@ -1772,7 +1858,7 @@
       </p:grpSpPr>
       <p:sp>
         <p:nvSpPr>
-          <p:cNvPr id="925654477" name="Slide Image Placeholder 1"/>
+          <p:cNvPr id="880899827" name="Slide Image Placeholder 1"/>
           <p:cNvSpPr>
             <a:spLocks noChangeAspect="1" noGrp="1" noRot="1"/>
           </p:cNvSpPr>
@@ -1784,7 +1870,7 @@
       </p:sp>
       <p:sp>
         <p:nvSpPr>
-          <p:cNvPr id="1867668820" name="Notes Placeholder 2"/>
+          <p:cNvPr id="2050361761" name="Notes Placeholder 2"/>
           <p:cNvSpPr>
             <a:spLocks noGrp="1"/>
           </p:cNvSpPr>
@@ -1806,7 +1892,7 @@
       </p:sp>
       <p:sp>
         <p:nvSpPr>
-          <p:cNvPr id="27684951" name="Slide Number Placeholder 3"/>
+          <p:cNvPr id="350708129" name="Slide Number Placeholder 3"/>
           <p:cNvSpPr>
             <a:spLocks noGrp="1"/>
           </p:cNvSpPr>
@@ -1857,7 +1943,7 @@
       </p:grpSpPr>
       <p:sp>
         <p:nvSpPr>
-          <p:cNvPr id="1622137958" name="Slide Image Placeholder 1"/>
+          <p:cNvPr id="1599624135" name="Slide Image Placeholder 1"/>
           <p:cNvSpPr>
             <a:spLocks noChangeAspect="1" noGrp="1" noRot="1"/>
           </p:cNvSpPr>
@@ -1869,7 +1955,7 @@
       </p:sp>
       <p:sp>
         <p:nvSpPr>
-          <p:cNvPr id="1861882055" name="Notes Placeholder 2"/>
+          <p:cNvPr id="1464355412" name="Notes Placeholder 2"/>
           <p:cNvSpPr>
             <a:spLocks noGrp="1"/>
           </p:cNvSpPr>
@@ -1891,7 +1977,7 @@
       </p:sp>
       <p:sp>
         <p:nvSpPr>
-          <p:cNvPr id="1659546684" name="Slide Number Placeholder 3"/>
+          <p:cNvPr id="1770277712" name="Slide Number Placeholder 3"/>
           <p:cNvSpPr>
             <a:spLocks noGrp="1"/>
           </p:cNvSpPr>
@@ -1942,7 +2028,7 @@
       </p:grpSpPr>
       <p:sp>
         <p:nvSpPr>
-          <p:cNvPr id="1650547962" name="Slide Image Placeholder 1"/>
+          <p:cNvPr id="1188040382" name="Slide Image Placeholder 1"/>
           <p:cNvSpPr>
             <a:spLocks noChangeAspect="1" noGrp="1" noRot="1"/>
           </p:cNvSpPr>
@@ -1954,7 +2040,7 @@
       </p:sp>
       <p:sp>
         <p:nvSpPr>
-          <p:cNvPr id="484983289" name="Notes Placeholder 2"/>
+          <p:cNvPr id="1911124358" name="Notes Placeholder 2"/>
           <p:cNvSpPr>
             <a:spLocks noGrp="1"/>
           </p:cNvSpPr>
@@ -1976,7 +2062,7 @@
       </p:sp>
       <p:sp>
         <p:nvSpPr>
-          <p:cNvPr id="981975456" name="Slide Number Placeholder 3"/>
+          <p:cNvPr id="1617564775" name="Slide Number Placeholder 3"/>
           <p:cNvSpPr>
             <a:spLocks noGrp="1"/>
           </p:cNvSpPr>
@@ -2346,7 +2432,7 @@
       </p:grpSpPr>
       <p:sp>
         <p:nvSpPr>
-          <p:cNvPr id="1930121853" name="Shape 0"/>
+          <p:cNvPr id="667463612" name="Shape 0"/>
           <p:cNvSpPr/>
           <p:nvPr/>
         </p:nvSpPr>
@@ -2373,7 +2459,7 @@
       </p:sp>
       <p:sp>
         <p:nvSpPr>
-          <p:cNvPr id="218366832" name="Shape 1"/>
+          <p:cNvPr id="905499494" name="Shape 1"/>
           <p:cNvSpPr/>
           <p:nvPr/>
         </p:nvSpPr>
@@ -2400,7 +2486,7 @@
       </p:sp>
       <p:sp>
         <p:nvSpPr>
-          <p:cNvPr id="1707642038" name="Shape 2"/>
+          <p:cNvPr id="1876916041" name="Shape 2"/>
           <p:cNvSpPr/>
           <p:nvPr/>
         </p:nvSpPr>
@@ -2427,7 +2513,7 @@
       </p:sp>
       <p:sp>
         <p:nvSpPr>
-          <p:cNvPr id="2118390868" name="Shape 3"/>
+          <p:cNvPr id="196128596" name="Shape 3"/>
           <p:cNvSpPr/>
           <p:nvPr/>
         </p:nvSpPr>
@@ -2454,7 +2540,7 @@
       </p:sp>
       <p:sp>
         <p:nvSpPr>
-          <p:cNvPr id="826242766" name="Shape 4"/>
+          <p:cNvPr id="1075245546" name="Shape 4"/>
           <p:cNvSpPr/>
           <p:nvPr/>
         </p:nvSpPr>
@@ -2481,7 +2567,7 @@
       </p:sp>
       <p:sp>
         <p:nvSpPr>
-          <p:cNvPr id="831411558" name="Shape 5"/>
+          <p:cNvPr id="637017700" name="Shape 5"/>
           <p:cNvSpPr/>
           <p:nvPr/>
         </p:nvSpPr>
@@ -2508,7 +2594,7 @@
       </p:sp>
       <p:sp>
         <p:nvSpPr>
-          <p:cNvPr id="615589068" name="Shape 6"/>
+          <p:cNvPr id="1468996299" name="Shape 6"/>
           <p:cNvSpPr/>
           <p:nvPr/>
         </p:nvSpPr>
@@ -2533,7 +2619,7 @@
       </p:sp>
       <p:sp>
         <p:nvSpPr>
-          <p:cNvPr id="211503985" name="Shape 7"/>
+          <p:cNvPr id="2066173544" name="Shape 7"/>
           <p:cNvSpPr/>
           <p:nvPr/>
         </p:nvSpPr>
@@ -2558,7 +2644,7 @@
       </p:sp>
       <p:sp>
         <p:nvSpPr>
-          <p:cNvPr id="991843873" name="Text 8"/>
+          <p:cNvPr id="962227714" name="Text 8"/>
           <p:cNvSpPr/>
           <p:nvPr/>
         </p:nvSpPr>
@@ -2598,7 +2684,7 @@
       </p:sp>
       <p:sp>
         <p:nvSpPr>
-          <p:cNvPr id="1309144285" name="Text 9"/>
+          <p:cNvPr id="558921808" name="Text 9"/>
           <p:cNvSpPr/>
           <p:nvPr/>
         </p:nvSpPr>
@@ -2630,86 +2716,119 @@
                 <a:ea typeface="Arial Black"/>
                 <a:cs typeface="Arial Black"/>
               </a:rPr>
-              <a:t>ДИПЛОМНЫЙ ПРОЕКТ</a:t>
-            </a:r>
-            <a:endParaRPr lang="en-US" sz="1200"/>
-          </a:p>
-        </p:txBody>
-      </p:sp>
-      <p:sp>
-        <p:nvSpPr>
-          <p:cNvPr id="1492773267" name="Text 10"/>
-          <p:cNvSpPr/>
-          <p:nvPr/>
-        </p:nvSpPr>
-        <p:spPr bwMode="auto">
-          <a:xfrm>
-            <a:off x="502920" y="1691640"/>
-            <a:ext cx="8229600" cy="822960"/>
-          </a:xfrm>
-          <a:prstGeom prst="rect">
-            <a:avLst/>
-          </a:prstGeom>
-          <a:noFill/>
-          <a:ln/>
-        </p:spPr>
-        <p:txBody>
-          <a:bodyPr wrap="square" lIns="0" tIns="0" rIns="0" bIns="0" rtlCol="0" anchor="ctr"/>
-          <a:lstStyle/>
-          <a:p>
-            <a:pPr marL="0" indent="0">
-              <a:buNone/>
-              <a:defRPr/>
-            </a:pPr>
-            <a:r>
-              <a:rPr lang="en-US" sz="5000" b="1">
-                <a:solidFill>
-                  <a:srgbClr val="FFFFFF"/>
+              <a:t>ДИПЛОМН</a:t>
+            </a:r>
+            <a:r>
+              <a:rPr lang="ru-RU" sz="1200" b="1" spc="799">
+                <a:solidFill>
+                  <a:srgbClr val="E94B35"/>
                 </a:solidFill>
                 <a:latin typeface="Arial Black"/>
                 <a:ea typeface="Arial Black"/>
                 <a:cs typeface="Arial Black"/>
               </a:rPr>
-              <a:t>Мониторинг</a:t>
-            </a:r>
-            <a:endParaRPr lang="en-US" sz="5000"/>
-          </a:p>
-        </p:txBody>
-      </p:sp>
-      <p:sp>
-        <p:nvSpPr>
-          <p:cNvPr id="837309727" name="Text 11"/>
-          <p:cNvSpPr/>
-          <p:nvPr/>
-        </p:nvSpPr>
-        <p:spPr bwMode="auto">
-          <a:xfrm>
-            <a:off x="502920" y="2514600"/>
-            <a:ext cx="8229600" cy="640080"/>
-          </a:xfrm>
-          <a:prstGeom prst="rect">
-            <a:avLst/>
-          </a:prstGeom>
-          <a:noFill/>
-          <a:ln/>
-        </p:spPr>
-        <p:txBody>
-          <a:bodyPr wrap="square" lIns="0" tIns="0" rIns="0" bIns="0" rtlCol="0" anchor="ctr"/>
-          <a:lstStyle/>
-          <a:p>
-            <a:pPr marL="0" indent="0">
-              <a:buNone/>
-              <a:defRPr/>
-            </a:pPr>
-            <a:r>
-              <a:rPr lang="en-US" sz="3200" b="1">
-                <a:solidFill>
-                  <a:srgbClr val="F39C12"/>
+              <a:t>АЯ</a:t>
+            </a:r>
+            <a:r>
+              <a:rPr lang="en-US" sz="1200" b="1" spc="799">
+                <a:solidFill>
+                  <a:srgbClr val="E94B35"/>
                 </a:solidFill>
                 <a:latin typeface="Arial Black"/>
                 <a:ea typeface="Arial Black"/>
                 <a:cs typeface="Arial Black"/>
               </a:rPr>
+              <a:t> </a:t>
+            </a:r>
+            <a:r>
+              <a:rPr lang="ru-RU" sz="1200" b="1" spc="799">
+                <a:solidFill>
+                  <a:srgbClr val="E94B35"/>
+                </a:solidFill>
+                <a:latin typeface="Arial Black"/>
+                <a:ea typeface="Arial Black"/>
+                <a:cs typeface="Arial Black"/>
+              </a:rPr>
+              <a:t>РАБОТА</a:t>
+            </a:r>
+            <a:endParaRPr lang="en-US" sz="1200"/>
+          </a:p>
+        </p:txBody>
+      </p:sp>
+      <p:sp>
+        <p:nvSpPr>
+          <p:cNvPr id="1802942349" name="Text 10"/>
+          <p:cNvSpPr/>
+          <p:nvPr/>
+        </p:nvSpPr>
+        <p:spPr bwMode="auto">
+          <a:xfrm>
+            <a:off x="502920" y="1691640"/>
+            <a:ext cx="8229600" cy="822960"/>
+          </a:xfrm>
+          <a:prstGeom prst="rect">
+            <a:avLst/>
+          </a:prstGeom>
+          <a:noFill/>
+          <a:ln/>
+        </p:spPr>
+        <p:txBody>
+          <a:bodyPr wrap="square" lIns="0" tIns="0" rIns="0" bIns="0" rtlCol="0" anchor="ctr"/>
+          <a:lstStyle/>
+          <a:p>
+            <a:pPr marL="0" indent="0">
+              <a:buNone/>
+              <a:defRPr/>
+            </a:pPr>
+            <a:r>
+              <a:rPr lang="en-US" sz="5000" b="1">
+                <a:solidFill>
+                  <a:srgbClr val="FFFFFF"/>
+                </a:solidFill>
+                <a:latin typeface="Arial Black"/>
+                <a:ea typeface="Arial Black"/>
+                <a:cs typeface="Arial Black"/>
+              </a:rPr>
+              <a:t>Мониторинг</a:t>
+            </a:r>
+            <a:endParaRPr lang="en-US" sz="5000"/>
+          </a:p>
+        </p:txBody>
+      </p:sp>
+      <p:sp>
+        <p:nvSpPr>
+          <p:cNvPr id="1699552769" name="Text 11"/>
+          <p:cNvSpPr/>
+          <p:nvPr/>
+        </p:nvSpPr>
+        <p:spPr bwMode="auto">
+          <a:xfrm>
+            <a:off x="502920" y="2514600"/>
+            <a:ext cx="8229600" cy="640080"/>
+          </a:xfrm>
+          <a:prstGeom prst="rect">
+            <a:avLst/>
+          </a:prstGeom>
+          <a:noFill/>
+          <a:ln/>
+        </p:spPr>
+        <p:txBody>
+          <a:bodyPr wrap="square" lIns="0" tIns="0" rIns="0" bIns="0" rtlCol="0" anchor="ctr"/>
+          <a:lstStyle/>
+          <a:p>
+            <a:pPr marL="0" indent="0">
+              <a:buNone/>
+              <a:defRPr/>
+            </a:pPr>
+            <a:r>
+              <a:rPr lang="en-US" sz="3200" b="1">
+                <a:solidFill>
+                  <a:srgbClr val="F39C12"/>
+                </a:solidFill>
+                <a:latin typeface="Arial Black"/>
+                <a:ea typeface="Arial Black"/>
+                <a:cs typeface="Arial Black"/>
+              </a:rPr>
               <a:t>локально-вычислительной сети</a:t>
             </a:r>
             <a:endParaRPr lang="en-US" sz="3200"/>
@@ -2718,7 +2837,7 @@
       </p:sp>
       <p:sp>
         <p:nvSpPr>
-          <p:cNvPr id="1528447096" name="Shape 12"/>
+          <p:cNvPr id="1369102860" name="Shape 12"/>
           <p:cNvSpPr/>
           <p:nvPr/>
         </p:nvSpPr>
@@ -2743,7 +2862,7 @@
       </p:sp>
       <p:sp>
         <p:nvSpPr>
-          <p:cNvPr id="2018946230" name="Text 13"/>
+          <p:cNvPr id="1468635365" name="Text 13"/>
           <p:cNvSpPr/>
           <p:nvPr/>
         </p:nvSpPr>
@@ -2775,10 +2894,10 @@
                 <a:ea typeface="Calibri"/>
                 <a:cs typeface="Calibri"/>
               </a:rPr>
-              <a:t>Выполнил студент группы 222СА</a:t>
-            </a:r>
-            <a:br>
-              <a:rPr lang="en-US" sz="1300">
+              <a:t>Выполнил студент </a:t>
+            </a:r>
+            <a:r>
+              <a:rPr lang="ru-RU" sz="1300">
                 <a:solidFill>
                   <a:srgbClr val="C9D4E0"/>
                 </a:solidFill>
@@ -2786,17 +2905,32 @@
                 <a:ea typeface="Calibri"/>
                 <a:cs typeface="Calibri"/>
               </a:rPr>
-            </a:br>
-            <a:r>
-              <a:rPr lang="en-US" sz="1400" b="1">
-                <a:solidFill>
-                  <a:srgbClr val="FFFFFF"/>
+              <a:t>Моногаров М.А.</a:t>
+            </a:r>
+            <a:endParaRPr lang="en-US" sz="1300">
+              <a:solidFill>
+                <a:srgbClr val="C9D4E0"/>
+              </a:solidFill>
+              <a:latin typeface="Calibri"/>
+              <a:ea typeface="Calibri"/>
+              <a:cs typeface="Calibri"/>
+            </a:endParaRPr>
+          </a:p>
+          <a:p>
+            <a:pPr marL="0" indent="0">
+              <a:buNone/>
+              <a:defRPr/>
+            </a:pPr>
+            <a:r>
+              <a:rPr lang="en-US" sz="1300">
+                <a:solidFill>
+                  <a:srgbClr val="C9D4E0"/>
                 </a:solidFill>
                 <a:latin typeface="Calibri"/>
                 <a:ea typeface="Calibri"/>
                 <a:cs typeface="Calibri"/>
               </a:rPr>
-              <a:t>_________________________</a:t>
+              <a:t>группы 222СА</a:t>
             </a:r>
             <a:br>
               <a:rPr lang="en-US" sz="1400" b="1">
@@ -2867,7 +3001,7 @@
       </p:sp>
       <p:sp>
         <p:nvSpPr>
-          <p:cNvPr id="1165210451" name="Text 14"/>
+          <p:cNvPr id="123847373" name="Text 14"/>
           <p:cNvSpPr/>
           <p:nvPr/>
         </p:nvSpPr>
@@ -2947,7 +3081,7 @@
       </p:grpSpPr>
       <p:sp>
         <p:nvSpPr>
-          <p:cNvPr id="1097757062" name="Shape 0"/>
+          <p:cNvPr id="589962466" name="Shape 0"/>
           <p:cNvSpPr/>
           <p:nvPr/>
         </p:nvSpPr>
@@ -2972,7 +3106,7 @@
       </p:sp>
       <p:sp>
         <p:nvSpPr>
-          <p:cNvPr id="113271494" name="Text 1"/>
+          <p:cNvPr id="1653497228" name="Text 1"/>
           <p:cNvSpPr/>
           <p:nvPr/>
         </p:nvSpPr>
@@ -3012,7 +3146,7 @@
       </p:sp>
       <p:pic>
         <p:nvPicPr>
-          <p:cNvPr id="192147799" name=""/>
+          <p:cNvPr id="1450515881" name=""/>
           <p:cNvPicPr>
             <a:picLocks noChangeAspect="1"/>
           </p:cNvPicPr>
@@ -3034,7 +3168,7 @@
       </p:pic>
       <p:pic>
         <p:nvPicPr>
-          <p:cNvPr id="1528153695" name=""/>
+          <p:cNvPr id="5791416" name=""/>
           <p:cNvPicPr>
             <a:picLocks noChangeAspect="1"/>
           </p:cNvPicPr>
@@ -3056,7 +3190,7 @@
       </p:pic>
       <p:sp>
         <p:nvSpPr>
-          <p:cNvPr id="457825313" name="Text 2"/>
+          <p:cNvPr id="153618344" name="Text 2"/>
           <p:cNvSpPr/>
           <p:nvPr/>
         </p:nvSpPr>
@@ -3135,7 +3269,7 @@
       </p:grpSpPr>
       <p:sp>
         <p:nvSpPr>
-          <p:cNvPr id="470341133" name="Shape 0"/>
+          <p:cNvPr id="777814874" name="Shape 0"/>
           <p:cNvSpPr/>
           <p:nvPr/>
         </p:nvSpPr>
@@ -3160,13 +3294,13 @@
       </p:sp>
       <p:sp>
         <p:nvSpPr>
-          <p:cNvPr id="585619580" name="Text 1"/>
-          <p:cNvSpPr/>
-          <p:nvPr/>
-        </p:nvSpPr>
-        <p:spPr bwMode="auto">
-          <a:xfrm>
-            <a:off x="502920" y="256032"/>
+          <p:cNvPr id="2068200585" name="Text 1"/>
+          <p:cNvSpPr/>
+          <p:nvPr/>
+        </p:nvSpPr>
+        <p:spPr bwMode="auto">
+          <a:xfrm>
+            <a:off x="960279" y="184594"/>
             <a:ext cx="7863840" cy="548640"/>
           </a:xfrm>
           <a:prstGeom prst="rect">
@@ -3184,7 +3318,7 @@
               <a:defRPr/>
             </a:pPr>
             <a:r>
-              <a:rPr lang="en-US" sz="2800" b="1">
+              <a:rPr lang="ru-RU" sz="2800" b="1">
                 <a:solidFill>
                   <a:srgbClr val="0F2A47"/>
                 </a:solidFill>
@@ -3192,119 +3326,15 @@
                 <a:ea typeface="Arial Black"/>
                 <a:cs typeface="Arial Black"/>
               </a:rPr>
-              <a:t>Экономическое обоснование</a:t>
+              <a:t>Дашборд</a:t>
             </a:r>
             <a:endParaRPr lang="en-US" sz="2800"/>
           </a:p>
         </p:txBody>
-      </p:sp>
-      <p:sp>
-        <p:nvSpPr>
-          <p:cNvPr id="894820185" name="Text 2"/>
-          <p:cNvSpPr/>
-          <p:nvPr/>
-        </p:nvSpPr>
-        <p:spPr bwMode="auto">
-          <a:xfrm>
-            <a:off x="502920" y="777240"/>
-            <a:ext cx="7863840" cy="274320"/>
-          </a:xfrm>
-          <a:prstGeom prst="rect">
-            <a:avLst/>
-          </a:prstGeom>
-          <a:noFill/>
-          <a:ln/>
-        </p:spPr>
-        <p:txBody>
-          <a:bodyPr wrap="square" lIns="0" tIns="0" rIns="0" bIns="0" rtlCol="0" anchor="ctr"/>
-          <a:lstStyle/>
-          <a:p>
-            <a:pPr marL="0" indent="0">
-              <a:buNone/>
-              <a:defRPr/>
-            </a:pPr>
-            <a:r>
-              <a:rPr lang="en-US" sz="1300">
-                <a:solidFill>
-                  <a:srgbClr val="6B7785"/>
-                </a:solidFill>
-                <a:latin typeface="Calibri"/>
-                <a:ea typeface="Calibri"/>
-                <a:cs typeface="Calibri"/>
-              </a:rPr>
-              <a:t>Затраты на внедрение</a:t>
-            </a:r>
-            <a:endParaRPr lang="en-US" sz="1300"/>
-          </a:p>
-        </p:txBody>
-      </p:sp>
-      <p:sp>
-        <p:nvSpPr>
-          <p:cNvPr id="2074203470" name="Shape 3"/>
-          <p:cNvSpPr/>
-          <p:nvPr/>
-        </p:nvSpPr>
-        <p:spPr bwMode="auto">
-          <a:xfrm>
-            <a:off x="165528" y="1273274"/>
-            <a:ext cx="3128240" cy="3291840"/>
-          </a:xfrm>
-          <a:prstGeom prst="rect">
-            <a:avLst/>
-          </a:prstGeom>
-          <a:solidFill>
-            <a:srgbClr val="0F2A47"/>
-          </a:solidFill>
-          <a:ln w="12700">
-            <a:solidFill>
-              <a:srgbClr val="0F2A47"/>
-            </a:solidFill>
-            <a:prstDash val="solid"/>
-          </a:ln>
-          <a:effectLst>
-            <a:outerShdw blurRad="152400" dist="38100" dir="5400000" algn="bl" rotWithShape="0">
-              <a:srgbClr val="000000">
-                <a:alpha val="12000"/>
-              </a:srgbClr>
-            </a:outerShdw>
-          </a:effectLst>
-        </p:spPr>
-      </p:sp>
-      <p:sp>
-        <p:nvSpPr>
-          <p:cNvPr id="1158697705" name="Shape 4"/>
-          <p:cNvSpPr/>
-          <p:nvPr/>
-        </p:nvSpPr>
-        <p:spPr bwMode="auto">
-          <a:xfrm>
-            <a:off x="439848" y="1554479"/>
-            <a:ext cx="571224" cy="640080"/>
-          </a:xfrm>
-          <a:prstGeom prst="ellipse">
-            <a:avLst/>
-          </a:prstGeom>
-          <a:solidFill>
-            <a:srgbClr val="10B981"/>
-          </a:solidFill>
-          <a:ln w="12700">
-            <a:solidFill>
-              <a:srgbClr val="10B981"/>
-            </a:solidFill>
-            <a:prstDash val="solid"/>
-          </a:ln>
-          <a:effectLst>
-            <a:outerShdw blurRad="152400" dist="38100" dir="5400000" algn="bl" rotWithShape="0">
-              <a:srgbClr val="000000">
-                <a:alpha val="12000"/>
-              </a:srgbClr>
-            </a:outerShdw>
-          </a:effectLst>
-        </p:spPr>
       </p:sp>
       <p:pic>
         <p:nvPicPr>
-          <p:cNvPr id="1879913658" name="Image 0" descr="preencoded.png"/>
+          <p:cNvPr id="1355898971" name=""/>
           <p:cNvPicPr>
             <a:picLocks noChangeAspect="1"/>
           </p:cNvPicPr>
@@ -3315,671 +3345,15 @@
           <a:stretch/>
         </p:blipFill>
         <p:spPr bwMode="auto">
-          <a:xfrm>
-            <a:off x="599868" y="1714498"/>
-            <a:ext cx="278727" cy="320040"/>
+          <a:xfrm flipH="0" flipV="0">
+            <a:off x="960279" y="804672"/>
+            <a:ext cx="7223441" cy="4338828"/>
           </a:xfrm>
           <a:prstGeom prst="rect">
             <a:avLst/>
           </a:prstGeom>
         </p:spPr>
       </p:pic>
-      <p:sp>
-        <p:nvSpPr>
-          <p:cNvPr id="132363293" name="Text 5"/>
-          <p:cNvSpPr/>
-          <p:nvPr/>
-        </p:nvSpPr>
-        <p:spPr bwMode="auto">
-          <a:xfrm>
-            <a:off x="1217088" y="1547594"/>
-            <a:ext cx="2130387" cy="365760"/>
-          </a:xfrm>
-          <a:prstGeom prst="rect">
-            <a:avLst/>
-          </a:prstGeom>
-          <a:noFill/>
-          <a:ln/>
-        </p:spPr>
-        <p:txBody>
-          <a:bodyPr wrap="square" lIns="0" tIns="0" rIns="0" bIns="0" rtlCol="0" anchor="ctr"/>
-          <a:lstStyle/>
-          <a:p>
-            <a:pPr marL="0" indent="0">
-              <a:buNone/>
-              <a:defRPr/>
-            </a:pPr>
-            <a:r>
-              <a:rPr lang="en-US" sz="1300" b="1">
-                <a:solidFill>
-                  <a:srgbClr val="FFFFFF"/>
-                </a:solidFill>
-                <a:latin typeface="Arial Black"/>
-                <a:ea typeface="Arial Black"/>
-                <a:cs typeface="Arial Black"/>
-              </a:rPr>
-              <a:t>Программное обеспечение</a:t>
-            </a:r>
-            <a:endParaRPr lang="en-US" sz="1300"/>
-          </a:p>
-        </p:txBody>
-      </p:sp>
-      <p:sp>
-        <p:nvSpPr>
-          <p:cNvPr id="1400271851" name="Text 6"/>
-          <p:cNvSpPr/>
-          <p:nvPr/>
-        </p:nvSpPr>
-        <p:spPr bwMode="auto">
-          <a:xfrm>
-            <a:off x="1217088" y="1913354"/>
-            <a:ext cx="2130387" cy="365760"/>
-          </a:xfrm>
-          <a:prstGeom prst="rect">
-            <a:avLst/>
-          </a:prstGeom>
-          <a:noFill/>
-          <a:ln/>
-        </p:spPr>
-        <p:txBody>
-          <a:bodyPr wrap="square" lIns="0" tIns="0" rIns="0" bIns="0" rtlCol="0" anchor="t"/>
-          <a:lstStyle/>
-          <a:p>
-            <a:pPr marL="0" indent="0">
-              <a:buNone/>
-              <a:defRPr/>
-            </a:pPr>
-            <a:r>
-              <a:rPr lang="en-US" sz="1000" i="1">
-                <a:solidFill>
-                  <a:srgbClr val="C9D4E0"/>
-                </a:solidFill>
-                <a:latin typeface="Calibri"/>
-                <a:ea typeface="Calibri"/>
-                <a:cs typeface="Calibri"/>
-              </a:rPr>
-              <a:t>Альт Сервер · PostgreSQL · Apache · Zabbix — всё свободное</a:t>
-            </a:r>
-            <a:endParaRPr lang="en-US" sz="1000"/>
-          </a:p>
-        </p:txBody>
-      </p:sp>
-      <p:sp>
-        <p:nvSpPr>
-          <p:cNvPr id="118823340" name="Text 7"/>
-          <p:cNvSpPr/>
-          <p:nvPr/>
-        </p:nvSpPr>
-        <p:spPr bwMode="auto">
-          <a:xfrm>
-            <a:off x="165528" y="2599154"/>
-            <a:ext cx="3128240" cy="1280160"/>
-          </a:xfrm>
-          <a:prstGeom prst="rect">
-            <a:avLst/>
-          </a:prstGeom>
-          <a:noFill/>
-          <a:ln/>
-        </p:spPr>
-        <p:txBody>
-          <a:bodyPr wrap="square" lIns="0" tIns="0" rIns="0" bIns="0" rtlCol="0" anchor="ctr"/>
-          <a:lstStyle/>
-          <a:p>
-            <a:pPr marL="0" indent="0" algn="ctr">
-              <a:buNone/>
-              <a:defRPr/>
-            </a:pPr>
-            <a:r>
-              <a:rPr lang="en-US" sz="9000" b="1">
-                <a:solidFill>
-                  <a:srgbClr val="10B981"/>
-                </a:solidFill>
-                <a:latin typeface="Arial Black"/>
-                <a:ea typeface="Arial Black"/>
-                <a:cs typeface="Arial Black"/>
-              </a:rPr>
-              <a:t>0 ₽</a:t>
-            </a:r>
-            <a:endParaRPr lang="en-US" sz="9000"/>
-          </a:p>
-        </p:txBody>
-      </p:sp>
-      <p:sp>
-        <p:nvSpPr>
-          <p:cNvPr id="88213045" name="Text 8"/>
-          <p:cNvSpPr/>
-          <p:nvPr/>
-        </p:nvSpPr>
-        <p:spPr bwMode="auto">
-          <a:xfrm>
-            <a:off x="165528" y="4016474"/>
-            <a:ext cx="3128240" cy="274320"/>
-          </a:xfrm>
-          <a:prstGeom prst="rect">
-            <a:avLst/>
-          </a:prstGeom>
-          <a:noFill/>
-          <a:ln/>
-        </p:spPr>
-        <p:txBody>
-          <a:bodyPr wrap="square" lIns="0" tIns="0" rIns="0" bIns="0" rtlCol="0" anchor="ctr"/>
-          <a:lstStyle/>
-          <a:p>
-            <a:pPr marL="0" indent="0" algn="ctr">
-              <a:buNone/>
-              <a:defRPr/>
-            </a:pPr>
-            <a:r>
-              <a:rPr lang="en-US" sz="1100" i="1">
-                <a:solidFill>
-                  <a:srgbClr val="F39C12"/>
-                </a:solidFill>
-                <a:latin typeface="Calibri"/>
-                <a:ea typeface="Calibri"/>
-                <a:cs typeface="Calibri"/>
-              </a:rPr>
-              <a:t>Лицензионных отчислений нет</a:t>
-            </a:r>
-            <a:endParaRPr lang="en-US" sz="1100"/>
-          </a:p>
-        </p:txBody>
-      </p:sp>
-      <p:sp>
-        <p:nvSpPr>
-          <p:cNvPr id="115327655" name="Shape 9"/>
-          <p:cNvSpPr/>
-          <p:nvPr/>
-        </p:nvSpPr>
-        <p:spPr bwMode="auto">
-          <a:xfrm>
-            <a:off x="3297624" y="1259503"/>
-            <a:ext cx="3050571" cy="3278070"/>
-          </a:xfrm>
-          <a:prstGeom prst="rect">
-            <a:avLst/>
-          </a:prstGeom>
-          <a:solidFill>
-            <a:srgbClr val="FFFFFF"/>
-          </a:solidFill>
-          <a:ln w="6350">
-            <a:solidFill>
-              <a:srgbClr val="D6DDE6"/>
-            </a:solidFill>
-            <a:prstDash val="solid"/>
-          </a:ln>
-          <a:effectLst>
-            <a:outerShdw blurRad="152400" dist="38100" dir="5400000" algn="bl" rotWithShape="0">
-              <a:srgbClr val="000000">
-                <a:alpha val="12000"/>
-              </a:srgbClr>
-            </a:outerShdw>
-          </a:effectLst>
-        </p:spPr>
-      </p:sp>
-      <p:sp>
-        <p:nvSpPr>
-          <p:cNvPr id="466117146" name="Shape 10"/>
-          <p:cNvSpPr/>
-          <p:nvPr/>
-        </p:nvSpPr>
-        <p:spPr bwMode="auto">
-          <a:xfrm>
-            <a:off x="3571944" y="1526938"/>
-            <a:ext cx="640080" cy="640080"/>
-          </a:xfrm>
-          <a:prstGeom prst="ellipse">
-            <a:avLst/>
-          </a:prstGeom>
-          <a:solidFill>
-            <a:srgbClr val="E94B35"/>
-          </a:solidFill>
-          <a:ln w="12700">
-            <a:solidFill>
-              <a:srgbClr val="E94B35"/>
-            </a:solidFill>
-            <a:prstDash val="solid"/>
-          </a:ln>
-          <a:effectLst>
-            <a:outerShdw blurRad="152400" dist="38100" dir="5400000" algn="bl" rotWithShape="0">
-              <a:srgbClr val="000000">
-                <a:alpha val="12000"/>
-              </a:srgbClr>
-            </a:outerShdw>
-          </a:effectLst>
-        </p:spPr>
-      </p:sp>
-      <p:pic>
-        <p:nvPicPr>
-          <p:cNvPr id="1971951832" name="Image 1" descr="preencoded.png"/>
-          <p:cNvPicPr>
-            <a:picLocks noChangeAspect="1"/>
-          </p:cNvPicPr>
-          <p:nvPr/>
-        </p:nvPicPr>
-        <p:blipFill rotWithShape="1">
-          <a:blip r:embed="rId4"/>
-          <a:stretch/>
-        </p:blipFill>
-        <p:spPr bwMode="auto">
-          <a:xfrm>
-            <a:off x="3731964" y="1686958"/>
-            <a:ext cx="320040" cy="320040"/>
-          </a:xfrm>
-          <a:prstGeom prst="rect">
-            <a:avLst/>
-          </a:prstGeom>
-        </p:spPr>
-      </p:pic>
-      <p:sp>
-        <p:nvSpPr>
-          <p:cNvPr id="526763527" name="Text 11"/>
-          <p:cNvSpPr/>
-          <p:nvPr/>
-        </p:nvSpPr>
-        <p:spPr bwMode="auto">
-          <a:xfrm>
-            <a:off x="4349184" y="1526938"/>
-            <a:ext cx="2743200" cy="365760"/>
-          </a:xfrm>
-          <a:prstGeom prst="rect">
-            <a:avLst/>
-          </a:prstGeom>
-          <a:noFill/>
-          <a:ln/>
-        </p:spPr>
-        <p:txBody>
-          <a:bodyPr wrap="square" lIns="0" tIns="0" rIns="0" bIns="0" rtlCol="0" anchor="ctr"/>
-          <a:lstStyle/>
-          <a:p>
-            <a:pPr marL="0" indent="0">
-              <a:buNone/>
-              <a:defRPr/>
-            </a:pPr>
-            <a:r>
-              <a:rPr lang="en-US" sz="1300" b="1">
-                <a:solidFill>
-                  <a:srgbClr val="0F2A47"/>
-                </a:solidFill>
-                <a:latin typeface="Arial Black"/>
-                <a:ea typeface="Arial Black"/>
-                <a:cs typeface="Arial Black"/>
-              </a:rPr>
-              <a:t>Работы специалиста</a:t>
-            </a:r>
-            <a:endParaRPr lang="en-US" sz="1300"/>
-          </a:p>
-        </p:txBody>
-      </p:sp>
-      <p:sp>
-        <p:nvSpPr>
-          <p:cNvPr id="28280413" name="Text 12"/>
-          <p:cNvSpPr/>
-          <p:nvPr/>
-        </p:nvSpPr>
-        <p:spPr bwMode="auto">
-          <a:xfrm>
-            <a:off x="4349184" y="1892698"/>
-            <a:ext cx="2743200" cy="365760"/>
-          </a:xfrm>
-          <a:prstGeom prst="rect">
-            <a:avLst/>
-          </a:prstGeom>
-          <a:noFill/>
-          <a:ln/>
-        </p:spPr>
-        <p:txBody>
-          <a:bodyPr wrap="square" lIns="0" tIns="0" rIns="0" bIns="0" rtlCol="0" anchor="t"/>
-          <a:lstStyle/>
-          <a:p>
-            <a:pPr marL="0" indent="0">
-              <a:buNone/>
-              <a:defRPr/>
-            </a:pPr>
-            <a:r>
-              <a:rPr lang="en-US" sz="1000" i="1">
-                <a:solidFill>
-                  <a:srgbClr val="6B7785"/>
-                </a:solidFill>
-                <a:latin typeface="Calibri"/>
-                <a:ea typeface="Calibri"/>
-                <a:cs typeface="Calibri"/>
-              </a:rPr>
-              <a:t>20 </a:t>
-            </a:r>
-            <a:r>
-              <a:rPr lang="en-US" sz="1000" i="1">
-                <a:solidFill>
-                  <a:srgbClr val="6B7785"/>
-                </a:solidFill>
-                <a:latin typeface="Calibri"/>
-                <a:ea typeface="Calibri"/>
-                <a:cs typeface="Calibri"/>
-              </a:rPr>
-              <a:t>человеко-часов</a:t>
-            </a:r>
-            <a:r>
-              <a:rPr lang="en-US" sz="1000" i="1">
-                <a:solidFill>
-                  <a:srgbClr val="6B7785"/>
-                </a:solidFill>
-                <a:latin typeface="Calibri"/>
-                <a:ea typeface="Calibri"/>
-                <a:cs typeface="Calibri"/>
-              </a:rPr>
-              <a:t> × 1500 ₽/</a:t>
-            </a:r>
-            <a:r>
-              <a:rPr lang="en-US" sz="1000" i="1">
-                <a:solidFill>
-                  <a:srgbClr val="6B7785"/>
-                </a:solidFill>
-                <a:latin typeface="Calibri"/>
-                <a:ea typeface="Calibri"/>
-                <a:cs typeface="Calibri"/>
-              </a:rPr>
-              <a:t>час</a:t>
-            </a:r>
-            <a:endParaRPr lang="en-US" sz="1000">
-              <a:latin typeface="Calibri"/>
-              <a:ea typeface="Calibri"/>
-              <a:cs typeface="Calibri"/>
-            </a:endParaRPr>
-          </a:p>
-        </p:txBody>
-      </p:sp>
-      <p:sp>
-        <p:nvSpPr>
-          <p:cNvPr id="1525856823" name="Text 13"/>
-          <p:cNvSpPr/>
-          <p:nvPr/>
-        </p:nvSpPr>
-        <p:spPr bwMode="auto">
-          <a:xfrm>
-            <a:off x="2856949" y="2454557"/>
-            <a:ext cx="3931920" cy="1280160"/>
-          </a:xfrm>
-          <a:prstGeom prst="rect">
-            <a:avLst/>
-          </a:prstGeom>
-          <a:noFill/>
-          <a:ln/>
-        </p:spPr>
-        <p:txBody>
-          <a:bodyPr wrap="square" lIns="0" tIns="0" rIns="0" bIns="0" rtlCol="0" anchor="ctr"/>
-          <a:lstStyle/>
-          <a:p>
-            <a:pPr marL="0" indent="0" algn="ctr">
-              <a:buNone/>
-              <a:defRPr/>
-            </a:pPr>
-            <a:r>
-              <a:rPr lang="en-US" sz="5400" b="1">
-                <a:solidFill>
-                  <a:srgbClr val="E94B35"/>
-                </a:solidFill>
-                <a:latin typeface="Arial Black"/>
-                <a:ea typeface="Arial Black"/>
-                <a:cs typeface="Arial Black"/>
-              </a:rPr>
-              <a:t>30000 </a:t>
-            </a:r>
-            <a:r>
-              <a:rPr lang="en-US" sz="5400" b="1">
-                <a:solidFill>
-                  <a:srgbClr val="E94B35"/>
-                </a:solidFill>
-                <a:latin typeface="Arial Black"/>
-                <a:ea typeface="Arial Black"/>
-                <a:cs typeface="Arial Black"/>
-              </a:rPr>
-              <a:t>₽</a:t>
-            </a:r>
-            <a:endParaRPr lang="en-US" sz="5400">
-              <a:latin typeface="Arial Black"/>
-            </a:endParaRPr>
-          </a:p>
-        </p:txBody>
-      </p:sp>
-      <p:sp>
-        <p:nvSpPr>
-          <p:cNvPr id="1444959082" name="Text 14"/>
-          <p:cNvSpPr/>
-          <p:nvPr/>
-        </p:nvSpPr>
-        <p:spPr bwMode="auto">
-          <a:xfrm>
-            <a:off x="2856949" y="3988932"/>
-            <a:ext cx="3931920" cy="274320"/>
-          </a:xfrm>
-          <a:prstGeom prst="rect">
-            <a:avLst/>
-          </a:prstGeom>
-          <a:noFill/>
-          <a:ln/>
-        </p:spPr>
-        <p:txBody>
-          <a:bodyPr wrap="square" lIns="0" tIns="0" rIns="0" bIns="0" rtlCol="0" anchor="ctr"/>
-          <a:lstStyle/>
-          <a:p>
-            <a:pPr marL="0" indent="0" algn="ctr">
-              <a:buNone/>
-              <a:defRPr/>
-            </a:pPr>
-            <a:r>
-              <a:rPr lang="en-US" sz="1100" i="1">
-                <a:solidFill>
-                  <a:srgbClr val="6B7785"/>
-                </a:solidFill>
-                <a:latin typeface="Calibri"/>
-                <a:ea typeface="Calibri"/>
-                <a:cs typeface="Calibri"/>
-              </a:rPr>
-              <a:t>Единоразовые затраты на внедрение</a:t>
-            </a:r>
-            <a:endParaRPr lang="en-US" sz="1100"/>
-          </a:p>
-        </p:txBody>
-      </p:sp>
-      <p:sp>
-        <p:nvSpPr>
-          <p:cNvPr id="486216073" name="Shape 3"/>
-          <p:cNvSpPr/>
-          <p:nvPr/>
-        </p:nvSpPr>
-        <p:spPr bwMode="auto">
-          <a:xfrm>
-            <a:off x="6348744" y="1273274"/>
-            <a:ext cx="2797734" cy="3291840"/>
-          </a:xfrm>
-          <a:prstGeom prst="rect">
-            <a:avLst/>
-          </a:prstGeom>
-          <a:solidFill>
-            <a:srgbClr val="0F2A47"/>
-          </a:solidFill>
-          <a:ln w="12700">
-            <a:solidFill>
-              <a:srgbClr val="0F2A47"/>
-            </a:solidFill>
-            <a:prstDash val="solid"/>
-          </a:ln>
-          <a:effectLst>
-            <a:outerShdw blurRad="152400" dist="38100" dir="5400000" algn="bl" rotWithShape="0">
-              <a:srgbClr val="000000">
-                <a:alpha val="12000"/>
-              </a:srgbClr>
-            </a:outerShdw>
-          </a:effectLst>
-        </p:spPr>
-      </p:sp>
-      <p:sp>
-        <p:nvSpPr>
-          <p:cNvPr id="1293394532" name="Text 5"/>
-          <p:cNvSpPr/>
-          <p:nvPr/>
-        </p:nvSpPr>
-        <p:spPr bwMode="auto">
-          <a:xfrm>
-            <a:off x="6787491" y="1554479"/>
-            <a:ext cx="2130387" cy="365760"/>
-          </a:xfrm>
-          <a:prstGeom prst="rect">
-            <a:avLst/>
-          </a:prstGeom>
-          <a:noFill/>
-          <a:ln/>
-        </p:spPr>
-        <p:txBody>
-          <a:bodyPr wrap="square" lIns="0" tIns="0" rIns="0" bIns="0" rtlCol="0" anchor="ctr"/>
-          <a:lstStyle/>
-          <a:p>
-            <a:pPr>
-              <a:defRPr/>
-            </a:pPr>
-            <a:r>
-              <a:rPr lang="en-US" sz="1300" b="1">
-                <a:solidFill>
-                  <a:srgbClr val="FFFFFF"/>
-                </a:solidFill>
-                <a:latin typeface="Arial Black"/>
-              </a:rPr>
-              <a:t>Стоимость</a:t>
-            </a:r>
-            <a:r>
-              <a:rPr lang="en-US" sz="1300" b="1">
-                <a:solidFill>
-                  <a:srgbClr val="FFFFFF"/>
-                </a:solidFill>
-                <a:latin typeface="Arial Black"/>
-              </a:rPr>
-              <a:t> </a:t>
-            </a:r>
-            <a:r>
-              <a:rPr lang="en-US" sz="1300" b="1">
-                <a:solidFill>
-                  <a:srgbClr val="FFFFFF"/>
-                </a:solidFill>
-                <a:latin typeface="Arial Black"/>
-              </a:rPr>
-              <a:t>оборудования</a:t>
-            </a:r>
-            <a:endParaRPr/>
-          </a:p>
-        </p:txBody>
-      </p:sp>
-      <p:sp>
-        <p:nvSpPr>
-          <p:cNvPr id="105545086" name="TextBox 22"/>
-          <p:cNvSpPr txBox="1"/>
-          <p:nvPr/>
-        </p:nvSpPr>
-        <p:spPr bwMode="auto">
-          <a:xfrm>
-            <a:off x="6431097" y="2688803"/>
-            <a:ext cx="2630276" cy="1046440"/>
-          </a:xfrm>
-          <a:prstGeom prst="rect">
-            <a:avLst/>
-          </a:prstGeom>
-          <a:noFill/>
-        </p:spPr>
-        <p:txBody>
-          <a:bodyPr rot="0" spcFirstLastPara="0" vertOverflow="overflow" horzOverflow="overflow" vert="horz" wrap="square" lIns="91440" tIns="45720" rIns="91440" bIns="45720" numCol="1" spcCol="0" rtlCol="0" fromWordArt="0" anchor="t" anchorCtr="0" forceAA="0" compatLnSpc="1">
-            <a:prstTxWarp prst="textNoShape"/>
-            <a:spAutoFit/>
-          </a:bodyPr>
-          <a:lstStyle/>
-          <a:p>
-            <a:pPr>
-              <a:defRPr/>
-            </a:pPr>
-            <a:r>
-              <a:rPr lang="en-US" sz="4400" b="1">
-                <a:solidFill>
-                  <a:srgbClr val="10B981"/>
-                </a:solidFill>
-                <a:latin typeface="Arial Black"/>
-                <a:ea typeface="Arial Black"/>
-                <a:cs typeface="Arial Black"/>
-              </a:rPr>
-              <a:t>30000</a:t>
-            </a:r>
-            <a:r>
-              <a:rPr lang="en-US" sz="4400" b="1" i="0" u="none" strike="noStrike">
-                <a:solidFill>
-                  <a:srgbClr val="10B981"/>
-                </a:solidFill>
-                <a:latin typeface="Arial Black"/>
-                <a:ea typeface="Arial Black"/>
-                <a:cs typeface="Arial Black"/>
-              </a:rPr>
-              <a:t> ₽</a:t>
-            </a:r>
-            <a:endParaRPr lang="ru-RU" sz="4400"/>
-          </a:p>
-          <a:p>
-            <a:pPr algn="ctr">
-              <a:defRPr/>
-            </a:pPr>
-            <a:endParaRPr lang="ru-RU"/>
-          </a:p>
-        </p:txBody>
-      </p:sp>
-      <p:sp>
-        <p:nvSpPr>
-          <p:cNvPr id="330612990" name="TextBox 23"/>
-          <p:cNvSpPr txBox="1"/>
-          <p:nvPr/>
-        </p:nvSpPr>
-        <p:spPr bwMode="auto">
-          <a:xfrm>
-            <a:off x="6431096" y="4017714"/>
-            <a:ext cx="2547651" cy="538609"/>
-          </a:xfrm>
-          <a:prstGeom prst="rect">
-            <a:avLst/>
-          </a:prstGeom>
-          <a:noFill/>
-        </p:spPr>
-        <p:txBody>
-          <a:bodyPr rot="0" spcFirstLastPara="0" vertOverflow="overflow" horzOverflow="overflow" vert="horz" wrap="square" lIns="91440" tIns="45720" rIns="91440" bIns="45720" numCol="1" spcCol="0" rtlCol="0" fromWordArt="0" anchor="t" anchorCtr="0" forceAA="0" compatLnSpc="1">
-            <a:prstTxWarp prst="textNoShape"/>
-            <a:spAutoFit/>
-          </a:bodyPr>
-          <a:lstStyle/>
-          <a:p>
-            <a:pPr>
-              <a:defRPr/>
-            </a:pPr>
-            <a:r>
-              <a:rPr lang="en-US" sz="1100" b="0" i="1" u="none" strike="noStrike">
-                <a:solidFill>
-                  <a:srgbClr val="ED7D31"/>
-                </a:solidFill>
-                <a:latin typeface="Calibri"/>
-                <a:ea typeface="Calibri"/>
-                <a:cs typeface="Calibri"/>
-              </a:rPr>
-              <a:t>Единоразовые затраты на внедрение</a:t>
-            </a:r>
-            <a:endParaRPr lang="ru-RU">
-              <a:solidFill>
-                <a:srgbClr val="ED7D31"/>
-              </a:solidFill>
-            </a:endParaRPr>
-          </a:p>
-          <a:p>
-            <a:pPr algn="ctr">
-              <a:defRPr/>
-            </a:pPr>
-            <a:endParaRPr lang="ru-RU">
-              <a:solidFill>
-                <a:srgbClr val="ED7D31"/>
-              </a:solidFill>
-            </a:endParaRPr>
-          </a:p>
-        </p:txBody>
-      </p:sp>
     </p:spTree>
   </p:cSld>
   <p:clrMapOvr>
@@ -3997,6 +3371,935 @@
 </file>
 
 <file path=ppt/slides/slide12.xml><?xml version="1.0" encoding="utf-8"?>
+<p:sld xmlns:a="http://schemas.openxmlformats.org/drawingml/2006/main" xmlns:r="http://schemas.openxmlformats.org/officeDocument/2006/relationships" xmlns:p="http://schemas.openxmlformats.org/presentationml/2006/main" xmlns:m="http://schemas.openxmlformats.org/officeDocument/2006/math" xmlns:w="http://schemas.openxmlformats.org/wordprocessingml/2006/main" xmlns:mc="http://schemas.openxmlformats.org/markup-compatibility/2006" showMasterPhAnim="0" showMasterSp="1" show="1">
+  <p:cSld name="Slide 11">
+    <p:bg>
+      <p:bgPr shadeToTitle="0">
+        <a:solidFill>
+          <a:srgbClr val="F4F7FB"/>
+        </a:solidFill>
+      </p:bgPr>
+    </p:bg>
+    <p:spTree>
+      <p:nvGrpSpPr>
+        <p:cNvPr id="1" name=""/>
+        <p:cNvGrpSpPr/>
+        <p:nvPr/>
+      </p:nvGrpSpPr>
+      <p:grpSpPr bwMode="auto">
+        <a:xfrm>
+          <a:off x="0" y="0"/>
+          <a:ext cx="0" cy="0"/>
+          <a:chOff x="0" y="0"/>
+          <a:chExt cx="0" cy="0"/>
+        </a:xfrm>
+      </p:grpSpPr>
+      <p:sp>
+        <p:nvSpPr>
+          <p:cNvPr id="1739835935" name="Shape 0"/>
+          <p:cNvSpPr/>
+          <p:nvPr/>
+        </p:nvSpPr>
+        <p:spPr bwMode="auto">
+          <a:xfrm>
+            <a:off x="0" y="0"/>
+            <a:ext cx="164592" cy="5143500"/>
+          </a:xfrm>
+          <a:prstGeom prst="rect">
+            <a:avLst/>
+          </a:prstGeom>
+          <a:solidFill>
+            <a:srgbClr val="E94B35"/>
+          </a:solidFill>
+          <a:ln w="12700">
+            <a:solidFill>
+              <a:srgbClr val="E94B35"/>
+            </a:solidFill>
+            <a:prstDash val="solid"/>
+          </a:ln>
+        </p:spPr>
+      </p:sp>
+      <p:sp>
+        <p:nvSpPr>
+          <p:cNvPr id="218680783" name="Text 1"/>
+          <p:cNvSpPr/>
+          <p:nvPr/>
+        </p:nvSpPr>
+        <p:spPr bwMode="auto">
+          <a:xfrm>
+            <a:off x="502920" y="256032"/>
+            <a:ext cx="7863840" cy="548640"/>
+          </a:xfrm>
+          <a:prstGeom prst="rect">
+            <a:avLst/>
+          </a:prstGeom>
+          <a:noFill/>
+          <a:ln/>
+        </p:spPr>
+        <p:txBody>
+          <a:bodyPr wrap="square" lIns="0" tIns="0" rIns="0" bIns="0" rtlCol="0" anchor="ctr"/>
+          <a:lstStyle/>
+          <a:p>
+            <a:pPr marL="0" indent="0">
+              <a:buNone/>
+              <a:defRPr/>
+            </a:pPr>
+            <a:r>
+              <a:rPr lang="en-US" sz="2800" b="1">
+                <a:solidFill>
+                  <a:srgbClr val="0F2A47"/>
+                </a:solidFill>
+                <a:latin typeface="Arial Black"/>
+                <a:ea typeface="Arial Black"/>
+                <a:cs typeface="Arial Black"/>
+              </a:rPr>
+              <a:t>Экономическое обоснование</a:t>
+            </a:r>
+            <a:endParaRPr lang="en-US" sz="2800"/>
+          </a:p>
+        </p:txBody>
+      </p:sp>
+      <p:sp>
+        <p:nvSpPr>
+          <p:cNvPr id="731522470" name="Text 2"/>
+          <p:cNvSpPr/>
+          <p:nvPr/>
+        </p:nvSpPr>
+        <p:spPr bwMode="auto">
+          <a:xfrm>
+            <a:off x="502920" y="777240"/>
+            <a:ext cx="7863840" cy="274320"/>
+          </a:xfrm>
+          <a:prstGeom prst="rect">
+            <a:avLst/>
+          </a:prstGeom>
+          <a:noFill/>
+          <a:ln/>
+        </p:spPr>
+        <p:txBody>
+          <a:bodyPr wrap="square" lIns="0" tIns="0" rIns="0" bIns="0" rtlCol="0" anchor="ctr"/>
+          <a:lstStyle/>
+          <a:p>
+            <a:pPr marL="0" indent="0">
+              <a:buNone/>
+              <a:defRPr/>
+            </a:pPr>
+            <a:r>
+              <a:rPr lang="en-US" sz="1300">
+                <a:solidFill>
+                  <a:srgbClr val="6B7785"/>
+                </a:solidFill>
+                <a:latin typeface="Calibri"/>
+                <a:ea typeface="Calibri"/>
+                <a:cs typeface="Calibri"/>
+              </a:rPr>
+              <a:t>Затраты на внедрение</a:t>
+            </a:r>
+            <a:endParaRPr lang="en-US" sz="1300"/>
+          </a:p>
+        </p:txBody>
+      </p:sp>
+      <p:sp>
+        <p:nvSpPr>
+          <p:cNvPr id="1969122865" name="Shape 3"/>
+          <p:cNvSpPr/>
+          <p:nvPr/>
+        </p:nvSpPr>
+        <p:spPr bwMode="auto">
+          <a:xfrm>
+            <a:off x="165528" y="1273274"/>
+            <a:ext cx="3128240" cy="3291840"/>
+          </a:xfrm>
+          <a:prstGeom prst="rect">
+            <a:avLst/>
+          </a:prstGeom>
+          <a:solidFill>
+            <a:srgbClr val="0F2A47"/>
+          </a:solidFill>
+          <a:ln w="12700">
+            <a:solidFill>
+              <a:srgbClr val="0F2A47"/>
+            </a:solidFill>
+            <a:prstDash val="solid"/>
+          </a:ln>
+          <a:effectLst>
+            <a:outerShdw blurRad="152400" dist="38100" dir="5400000" algn="bl" rotWithShape="0">
+              <a:srgbClr val="000000">
+                <a:alpha val="12000"/>
+              </a:srgbClr>
+            </a:outerShdw>
+          </a:effectLst>
+        </p:spPr>
+      </p:sp>
+      <p:sp>
+        <p:nvSpPr>
+          <p:cNvPr id="1822567854" name="Shape 4"/>
+          <p:cNvSpPr/>
+          <p:nvPr/>
+        </p:nvSpPr>
+        <p:spPr bwMode="auto">
+          <a:xfrm>
+            <a:off x="439848" y="1554479"/>
+            <a:ext cx="571224" cy="640080"/>
+          </a:xfrm>
+          <a:prstGeom prst="ellipse">
+            <a:avLst/>
+          </a:prstGeom>
+          <a:solidFill>
+            <a:srgbClr val="10B981"/>
+          </a:solidFill>
+          <a:ln w="12700">
+            <a:solidFill>
+              <a:srgbClr val="10B981"/>
+            </a:solidFill>
+            <a:prstDash val="solid"/>
+          </a:ln>
+          <a:effectLst>
+            <a:outerShdw blurRad="152400" dist="38100" dir="5400000" algn="bl" rotWithShape="0">
+              <a:srgbClr val="000000">
+                <a:alpha val="12000"/>
+              </a:srgbClr>
+            </a:outerShdw>
+          </a:effectLst>
+        </p:spPr>
+      </p:sp>
+      <p:pic>
+        <p:nvPicPr>
+          <p:cNvPr id="1468951846" name="Image 0" descr="preencoded.png"/>
+          <p:cNvPicPr>
+            <a:picLocks noChangeAspect="1"/>
+          </p:cNvPicPr>
+          <p:nvPr/>
+        </p:nvPicPr>
+        <p:blipFill rotWithShape="1">
+          <a:blip r:embed="rId3"/>
+          <a:stretch/>
+        </p:blipFill>
+        <p:spPr bwMode="auto">
+          <a:xfrm>
+            <a:off x="599868" y="1714498"/>
+            <a:ext cx="278727" cy="320040"/>
+          </a:xfrm>
+          <a:prstGeom prst="rect">
+            <a:avLst/>
+          </a:prstGeom>
+        </p:spPr>
+      </p:pic>
+      <p:sp>
+        <p:nvSpPr>
+          <p:cNvPr id="1624815220" name="Text 5"/>
+          <p:cNvSpPr/>
+          <p:nvPr/>
+        </p:nvSpPr>
+        <p:spPr bwMode="auto">
+          <a:xfrm>
+            <a:off x="1217088" y="1547594"/>
+            <a:ext cx="2130387" cy="365760"/>
+          </a:xfrm>
+          <a:prstGeom prst="rect">
+            <a:avLst/>
+          </a:prstGeom>
+          <a:noFill/>
+          <a:ln/>
+        </p:spPr>
+        <p:txBody>
+          <a:bodyPr wrap="square" lIns="0" tIns="0" rIns="0" bIns="0" rtlCol="0" anchor="ctr"/>
+          <a:lstStyle/>
+          <a:p>
+            <a:pPr marL="0" indent="0">
+              <a:buNone/>
+              <a:defRPr/>
+            </a:pPr>
+            <a:r>
+              <a:rPr lang="en-US" sz="1300" b="1">
+                <a:solidFill>
+                  <a:srgbClr val="FFFFFF"/>
+                </a:solidFill>
+                <a:latin typeface="Arial Black"/>
+                <a:ea typeface="Arial Black"/>
+                <a:cs typeface="Arial Black"/>
+              </a:rPr>
+              <a:t>Программное обеспечение</a:t>
+            </a:r>
+            <a:endParaRPr lang="en-US" sz="1300"/>
+          </a:p>
+        </p:txBody>
+      </p:sp>
+      <p:sp>
+        <p:nvSpPr>
+          <p:cNvPr id="1802039941" name="Text 6"/>
+          <p:cNvSpPr/>
+          <p:nvPr/>
+        </p:nvSpPr>
+        <p:spPr bwMode="auto">
+          <a:xfrm>
+            <a:off x="1217088" y="1913354"/>
+            <a:ext cx="2130387" cy="365760"/>
+          </a:xfrm>
+          <a:prstGeom prst="rect">
+            <a:avLst/>
+          </a:prstGeom>
+          <a:noFill/>
+          <a:ln/>
+        </p:spPr>
+        <p:txBody>
+          <a:bodyPr wrap="square" lIns="0" tIns="0" rIns="0" bIns="0" rtlCol="0" anchor="t"/>
+          <a:lstStyle/>
+          <a:p>
+            <a:pPr marL="0" indent="0">
+              <a:buNone/>
+              <a:defRPr/>
+            </a:pPr>
+            <a:r>
+              <a:rPr lang="en-US" sz="1000" i="1">
+                <a:solidFill>
+                  <a:srgbClr val="C9D4E0"/>
+                </a:solidFill>
+                <a:latin typeface="Calibri"/>
+                <a:ea typeface="Calibri"/>
+                <a:cs typeface="Calibri"/>
+              </a:rPr>
+              <a:t>Альт Сервер · PostgreSQL · Apache · Zabbix — всё свободное</a:t>
+            </a:r>
+            <a:endParaRPr lang="en-US" sz="1000"/>
+          </a:p>
+        </p:txBody>
+      </p:sp>
+      <p:sp>
+        <p:nvSpPr>
+          <p:cNvPr id="571831560" name="Text 7"/>
+          <p:cNvSpPr/>
+          <p:nvPr/>
+        </p:nvSpPr>
+        <p:spPr bwMode="auto">
+          <a:xfrm>
+            <a:off x="169383" y="2454556"/>
+            <a:ext cx="3128240" cy="1280160"/>
+          </a:xfrm>
+          <a:prstGeom prst="rect">
+            <a:avLst/>
+          </a:prstGeom>
+          <a:noFill/>
+          <a:ln/>
+        </p:spPr>
+        <p:txBody>
+          <a:bodyPr wrap="square" lIns="0" tIns="0" rIns="0" bIns="0" rtlCol="0" anchor="ctr"/>
+          <a:lstStyle/>
+          <a:p>
+            <a:pPr marL="0" indent="0" algn="ctr">
+              <a:buNone/>
+              <a:defRPr/>
+            </a:pPr>
+            <a:r>
+              <a:rPr lang="en-US" sz="4800" b="1">
+                <a:solidFill>
+                  <a:srgbClr val="10B981"/>
+                </a:solidFill>
+                <a:latin typeface="Arial Black"/>
+                <a:ea typeface="Arial Black"/>
+                <a:cs typeface="Arial Black"/>
+              </a:rPr>
+              <a:t>15000 ₽</a:t>
+            </a:r>
+            <a:endParaRPr lang="en-US" sz="9000"/>
+          </a:p>
+        </p:txBody>
+      </p:sp>
+      <p:sp>
+        <p:nvSpPr>
+          <p:cNvPr id="1580119182" name="Text 8"/>
+          <p:cNvSpPr/>
+          <p:nvPr/>
+        </p:nvSpPr>
+        <p:spPr bwMode="auto">
+          <a:xfrm>
+            <a:off x="165528" y="4016474"/>
+            <a:ext cx="3128240" cy="274320"/>
+          </a:xfrm>
+          <a:prstGeom prst="rect">
+            <a:avLst/>
+          </a:prstGeom>
+          <a:noFill/>
+          <a:ln/>
+        </p:spPr>
+        <p:txBody>
+          <a:bodyPr wrap="square" lIns="0" tIns="0" rIns="0" bIns="0" rtlCol="0" anchor="ctr"/>
+          <a:lstStyle/>
+          <a:p>
+            <a:pPr marL="0" indent="0" algn="ctr">
+              <a:buNone/>
+              <a:defRPr/>
+            </a:pPr>
+            <a:r>
+              <a:rPr lang="en-US" sz="1100" i="1">
+                <a:solidFill>
+                  <a:srgbClr val="F39C12"/>
+                </a:solidFill>
+                <a:latin typeface="Calibri"/>
+                <a:ea typeface="Calibri"/>
+                <a:cs typeface="Calibri"/>
+              </a:rPr>
+              <a:t>Лицензионных отчислений нет</a:t>
+            </a:r>
+            <a:endParaRPr lang="en-US" sz="1100"/>
+          </a:p>
+        </p:txBody>
+      </p:sp>
+      <p:sp>
+        <p:nvSpPr>
+          <p:cNvPr id="1685634468" name="Shape 9"/>
+          <p:cNvSpPr/>
+          <p:nvPr/>
+        </p:nvSpPr>
+        <p:spPr bwMode="auto">
+          <a:xfrm>
+            <a:off x="3297624" y="1259503"/>
+            <a:ext cx="3050571" cy="3278070"/>
+          </a:xfrm>
+          <a:prstGeom prst="rect">
+            <a:avLst/>
+          </a:prstGeom>
+          <a:solidFill>
+            <a:srgbClr val="FFFFFF"/>
+          </a:solidFill>
+          <a:ln w="6350">
+            <a:solidFill>
+              <a:srgbClr val="D6DDE6"/>
+            </a:solidFill>
+            <a:prstDash val="solid"/>
+          </a:ln>
+          <a:effectLst>
+            <a:outerShdw blurRad="152400" dist="38100" dir="5400000" algn="bl" rotWithShape="0">
+              <a:srgbClr val="000000">
+                <a:alpha val="12000"/>
+              </a:srgbClr>
+            </a:outerShdw>
+          </a:effectLst>
+        </p:spPr>
+      </p:sp>
+      <p:sp>
+        <p:nvSpPr>
+          <p:cNvPr id="514915184" name="Shape 10"/>
+          <p:cNvSpPr/>
+          <p:nvPr/>
+        </p:nvSpPr>
+        <p:spPr bwMode="auto">
+          <a:xfrm>
+            <a:off x="3571944" y="1526938"/>
+            <a:ext cx="640080" cy="640080"/>
+          </a:xfrm>
+          <a:prstGeom prst="ellipse">
+            <a:avLst/>
+          </a:prstGeom>
+          <a:solidFill>
+            <a:srgbClr val="E94B35"/>
+          </a:solidFill>
+          <a:ln w="12700">
+            <a:solidFill>
+              <a:srgbClr val="E94B35"/>
+            </a:solidFill>
+            <a:prstDash val="solid"/>
+          </a:ln>
+          <a:effectLst>
+            <a:outerShdw blurRad="152400" dist="38100" dir="5400000" algn="bl" rotWithShape="0">
+              <a:srgbClr val="000000">
+                <a:alpha val="12000"/>
+              </a:srgbClr>
+            </a:outerShdw>
+          </a:effectLst>
+        </p:spPr>
+      </p:sp>
+      <p:pic>
+        <p:nvPicPr>
+          <p:cNvPr id="1096853203" name="Image 1" descr="preencoded.png"/>
+          <p:cNvPicPr>
+            <a:picLocks noChangeAspect="1"/>
+          </p:cNvPicPr>
+          <p:nvPr/>
+        </p:nvPicPr>
+        <p:blipFill rotWithShape="1">
+          <a:blip r:embed="rId4"/>
+          <a:stretch/>
+        </p:blipFill>
+        <p:spPr bwMode="auto">
+          <a:xfrm>
+            <a:off x="3731964" y="1686958"/>
+            <a:ext cx="320040" cy="320040"/>
+          </a:xfrm>
+          <a:prstGeom prst="rect">
+            <a:avLst/>
+          </a:prstGeom>
+        </p:spPr>
+      </p:pic>
+      <p:sp>
+        <p:nvSpPr>
+          <p:cNvPr id="80667094" name="Text 11"/>
+          <p:cNvSpPr/>
+          <p:nvPr/>
+        </p:nvSpPr>
+        <p:spPr bwMode="auto">
+          <a:xfrm>
+            <a:off x="4349184" y="1526938"/>
+            <a:ext cx="2743200" cy="365760"/>
+          </a:xfrm>
+          <a:prstGeom prst="rect">
+            <a:avLst/>
+          </a:prstGeom>
+          <a:noFill/>
+          <a:ln/>
+        </p:spPr>
+        <p:txBody>
+          <a:bodyPr wrap="square" lIns="0" tIns="0" rIns="0" bIns="0" rtlCol="0" anchor="ctr"/>
+          <a:lstStyle/>
+          <a:p>
+            <a:pPr marL="0" indent="0">
+              <a:buNone/>
+              <a:defRPr/>
+            </a:pPr>
+            <a:r>
+              <a:rPr lang="en-US" sz="1300" b="1">
+                <a:solidFill>
+                  <a:srgbClr val="0F2A47"/>
+                </a:solidFill>
+                <a:latin typeface="Arial Black"/>
+                <a:ea typeface="Arial Black"/>
+                <a:cs typeface="Arial Black"/>
+              </a:rPr>
+              <a:t>Работы специалиста</a:t>
+            </a:r>
+            <a:endParaRPr lang="en-US" sz="1300"/>
+          </a:p>
+        </p:txBody>
+      </p:sp>
+      <p:sp>
+        <p:nvSpPr>
+          <p:cNvPr id="1772146168" name="Text 12"/>
+          <p:cNvSpPr/>
+          <p:nvPr/>
+        </p:nvSpPr>
+        <p:spPr bwMode="auto">
+          <a:xfrm>
+            <a:off x="4349184" y="1892698"/>
+            <a:ext cx="2743200" cy="365760"/>
+          </a:xfrm>
+          <a:prstGeom prst="rect">
+            <a:avLst/>
+          </a:prstGeom>
+          <a:noFill/>
+          <a:ln/>
+        </p:spPr>
+        <p:txBody>
+          <a:bodyPr wrap="square" lIns="0" tIns="0" rIns="0" bIns="0" rtlCol="0" anchor="t"/>
+          <a:lstStyle/>
+          <a:p>
+            <a:pPr marL="0" indent="0">
+              <a:buNone/>
+              <a:defRPr/>
+            </a:pPr>
+            <a:r>
+              <a:rPr lang="en-US" sz="1000" i="1">
+                <a:solidFill>
+                  <a:srgbClr val="6B7785"/>
+                </a:solidFill>
+                <a:latin typeface="Calibri"/>
+                <a:ea typeface="Calibri"/>
+                <a:cs typeface="Calibri"/>
+              </a:rPr>
+              <a:t>20 </a:t>
+            </a:r>
+            <a:r>
+              <a:rPr lang="en-US" sz="1000" i="1">
+                <a:solidFill>
+                  <a:srgbClr val="6B7785"/>
+                </a:solidFill>
+                <a:latin typeface="Calibri"/>
+                <a:ea typeface="Calibri"/>
+                <a:cs typeface="Calibri"/>
+              </a:rPr>
+              <a:t>человеко-часов</a:t>
+            </a:r>
+            <a:r>
+              <a:rPr lang="en-US" sz="1000" i="1">
+                <a:solidFill>
+                  <a:srgbClr val="6B7785"/>
+                </a:solidFill>
+                <a:latin typeface="Calibri"/>
+                <a:ea typeface="Calibri"/>
+                <a:cs typeface="Calibri"/>
+              </a:rPr>
+              <a:t> × 1500 ₽/</a:t>
+            </a:r>
+            <a:r>
+              <a:rPr lang="en-US" sz="1000" i="1">
+                <a:solidFill>
+                  <a:srgbClr val="6B7785"/>
+                </a:solidFill>
+                <a:latin typeface="Calibri"/>
+                <a:ea typeface="Calibri"/>
+                <a:cs typeface="Calibri"/>
+              </a:rPr>
+              <a:t>час</a:t>
+            </a:r>
+            <a:endParaRPr lang="en-US" sz="1000">
+              <a:latin typeface="Calibri"/>
+              <a:ea typeface="Calibri"/>
+              <a:cs typeface="Calibri"/>
+            </a:endParaRPr>
+          </a:p>
+        </p:txBody>
+      </p:sp>
+      <p:sp>
+        <p:nvSpPr>
+          <p:cNvPr id="1041488993" name="Text 13"/>
+          <p:cNvSpPr/>
+          <p:nvPr/>
+        </p:nvSpPr>
+        <p:spPr bwMode="auto">
+          <a:xfrm>
+            <a:off x="2856949" y="2454557"/>
+            <a:ext cx="3931920" cy="1280160"/>
+          </a:xfrm>
+          <a:prstGeom prst="rect">
+            <a:avLst/>
+          </a:prstGeom>
+          <a:noFill/>
+          <a:ln/>
+        </p:spPr>
+        <p:txBody>
+          <a:bodyPr wrap="square" lIns="0" tIns="0" rIns="0" bIns="0" rtlCol="0" anchor="ctr"/>
+          <a:lstStyle/>
+          <a:p>
+            <a:pPr marL="0" indent="0" algn="ctr">
+              <a:buNone/>
+              <a:defRPr/>
+            </a:pPr>
+            <a:r>
+              <a:rPr lang="en-US" sz="5400" b="1">
+                <a:solidFill>
+                  <a:srgbClr val="E94B35"/>
+                </a:solidFill>
+                <a:latin typeface="Arial Black"/>
+                <a:ea typeface="Arial Black"/>
+                <a:cs typeface="Arial Black"/>
+              </a:rPr>
+              <a:t>30000 </a:t>
+            </a:r>
+            <a:r>
+              <a:rPr lang="en-US" sz="5400" b="1">
+                <a:solidFill>
+                  <a:srgbClr val="E94B35"/>
+                </a:solidFill>
+                <a:latin typeface="Arial Black"/>
+                <a:ea typeface="Arial Black"/>
+                <a:cs typeface="Arial Black"/>
+              </a:rPr>
+              <a:t>₽</a:t>
+            </a:r>
+            <a:endParaRPr lang="en-US" sz="5400">
+              <a:latin typeface="Arial Black"/>
+            </a:endParaRPr>
+          </a:p>
+        </p:txBody>
+      </p:sp>
+      <p:sp>
+        <p:nvSpPr>
+          <p:cNvPr id="207915173" name="Text 14"/>
+          <p:cNvSpPr/>
+          <p:nvPr/>
+        </p:nvSpPr>
+        <p:spPr bwMode="auto">
+          <a:xfrm>
+            <a:off x="2856949" y="3988932"/>
+            <a:ext cx="3931920" cy="274320"/>
+          </a:xfrm>
+          <a:prstGeom prst="rect">
+            <a:avLst/>
+          </a:prstGeom>
+          <a:noFill/>
+          <a:ln/>
+        </p:spPr>
+        <p:txBody>
+          <a:bodyPr wrap="square" lIns="0" tIns="0" rIns="0" bIns="0" rtlCol="0" anchor="ctr"/>
+          <a:lstStyle/>
+          <a:p>
+            <a:pPr marL="0" indent="0" algn="ctr">
+              <a:buNone/>
+              <a:defRPr/>
+            </a:pPr>
+            <a:r>
+              <a:rPr lang="en-US" sz="1100" i="1">
+                <a:solidFill>
+                  <a:srgbClr val="6B7785"/>
+                </a:solidFill>
+                <a:latin typeface="Calibri"/>
+                <a:ea typeface="Calibri"/>
+                <a:cs typeface="Calibri"/>
+              </a:rPr>
+              <a:t>Единоразовые затраты на внедрение</a:t>
+            </a:r>
+            <a:endParaRPr lang="en-US" sz="1100"/>
+          </a:p>
+        </p:txBody>
+      </p:sp>
+      <p:sp>
+        <p:nvSpPr>
+          <p:cNvPr id="1543947690" name="Shape 3"/>
+          <p:cNvSpPr/>
+          <p:nvPr/>
+        </p:nvSpPr>
+        <p:spPr bwMode="auto">
+          <a:xfrm>
+            <a:off x="6348744" y="1273274"/>
+            <a:ext cx="2797734" cy="3291840"/>
+          </a:xfrm>
+          <a:prstGeom prst="rect">
+            <a:avLst/>
+          </a:prstGeom>
+          <a:solidFill>
+            <a:srgbClr val="0F2A47"/>
+          </a:solidFill>
+          <a:ln w="12700">
+            <a:solidFill>
+              <a:srgbClr val="0F2A47"/>
+            </a:solidFill>
+            <a:prstDash val="solid"/>
+          </a:ln>
+          <a:effectLst>
+            <a:outerShdw blurRad="152400" dist="38100" dir="5400000" algn="bl" rotWithShape="0">
+              <a:srgbClr val="000000">
+                <a:alpha val="12000"/>
+              </a:srgbClr>
+            </a:outerShdw>
+          </a:effectLst>
+        </p:spPr>
+      </p:sp>
+      <p:sp>
+        <p:nvSpPr>
+          <p:cNvPr id="1126954697" name="Text 5"/>
+          <p:cNvSpPr/>
+          <p:nvPr/>
+        </p:nvSpPr>
+        <p:spPr bwMode="auto">
+          <a:xfrm flipH="0" flipV="0">
+            <a:off x="6787490" y="1554478"/>
+            <a:ext cx="2130386" cy="541754"/>
+          </a:xfrm>
+          <a:prstGeom prst="rect">
+            <a:avLst/>
+          </a:prstGeom>
+          <a:noFill/>
+          <a:ln/>
+        </p:spPr>
+        <p:txBody>
+          <a:bodyPr wrap="square" lIns="0" tIns="0" rIns="0" bIns="0" rtlCol="0" anchor="ctr"/>
+          <a:lstStyle/>
+          <a:p>
+            <a:pPr>
+              <a:defRPr/>
+            </a:pPr>
+            <a:r>
+              <a:rPr lang="en-US" sz="1300" b="1">
+                <a:solidFill>
+                  <a:srgbClr val="FFFFFF"/>
+                </a:solidFill>
+                <a:latin typeface="Arial Black"/>
+              </a:rPr>
+              <a:t>Стоимость</a:t>
+            </a:r>
+            <a:r>
+              <a:rPr lang="en-US" sz="1300" b="1">
+                <a:solidFill>
+                  <a:srgbClr val="FFFFFF"/>
+                </a:solidFill>
+                <a:latin typeface="Arial Black"/>
+              </a:rPr>
+              <a:t> </a:t>
+            </a:r>
+            <a:r>
+              <a:rPr lang="en-US" sz="1300" b="1">
+                <a:solidFill>
+                  <a:srgbClr val="FFFFFF"/>
+                </a:solidFill>
+                <a:latin typeface="Arial Black"/>
+              </a:rPr>
+              <a:t>оборудования </a:t>
+            </a:r>
+            <a:r>
+              <a:rPr lang="ru-RU" sz="1300" b="1">
+                <a:solidFill>
+                  <a:srgbClr val="FFFFFF"/>
+                </a:solidFill>
+                <a:latin typeface="Arial Black"/>
+              </a:rPr>
+              <a:t>и лицензии</a:t>
+            </a:r>
+            <a:endParaRPr/>
+          </a:p>
+        </p:txBody>
+      </p:sp>
+      <p:sp>
+        <p:nvSpPr>
+          <p:cNvPr id="1756206790" name="TextBox 22"/>
+          <p:cNvSpPr txBox="1"/>
+          <p:nvPr/>
+        </p:nvSpPr>
+        <p:spPr bwMode="auto">
+          <a:xfrm>
+            <a:off x="6431096" y="2688802"/>
+            <a:ext cx="2632435" cy="1036679"/>
+          </a:xfrm>
+          <a:prstGeom prst="rect">
+            <a:avLst/>
+          </a:prstGeom>
+          <a:noFill/>
+        </p:spPr>
+        <p:txBody>
+          <a:bodyPr rot="0" spcFirstLastPara="0" vertOverflow="overflow" horzOverflow="overflow" vert="horz" wrap="square" lIns="91440" tIns="45720" rIns="91440" bIns="45720" numCol="1" spcCol="0" rtlCol="0" fromWordArt="0" anchor="t" anchorCtr="0" forceAA="0" compatLnSpc="1">
+            <a:prstTxWarp prst="textNoShape"/>
+            <a:spAutoFit/>
+          </a:bodyPr>
+          <a:lstStyle/>
+          <a:p>
+            <a:pPr>
+              <a:defRPr/>
+            </a:pPr>
+            <a:r>
+              <a:rPr lang="en-US" sz="4400" b="1">
+                <a:solidFill>
+                  <a:srgbClr val="10B981"/>
+                </a:solidFill>
+                <a:latin typeface="Arial Black"/>
+                <a:ea typeface="Arial Black"/>
+                <a:cs typeface="Arial Black"/>
+              </a:rPr>
+              <a:t>3</a:t>
+            </a:r>
+            <a:r>
+              <a:rPr lang="ru-RU" sz="4400" b="1">
+                <a:solidFill>
+                  <a:srgbClr val="10B981"/>
+                </a:solidFill>
+                <a:latin typeface="Arial Black"/>
+                <a:ea typeface="Arial Black"/>
+                <a:cs typeface="Arial Black"/>
+              </a:rPr>
+              <a:t>62</a:t>
+            </a:r>
+            <a:r>
+              <a:rPr lang="en-US" sz="4400" b="1">
+                <a:solidFill>
+                  <a:srgbClr val="10B981"/>
+                </a:solidFill>
+                <a:latin typeface="Arial Black"/>
+                <a:ea typeface="Arial Black"/>
+                <a:cs typeface="Arial Black"/>
+              </a:rPr>
+              <a:t>00</a:t>
+            </a:r>
+            <a:r>
+              <a:rPr lang="en-US" sz="4400" b="1" i="0" u="none" strike="noStrike">
+                <a:solidFill>
+                  <a:srgbClr val="10B981"/>
+                </a:solidFill>
+                <a:latin typeface="Arial Black"/>
+                <a:ea typeface="Arial Black"/>
+                <a:cs typeface="Arial Black"/>
+              </a:rPr>
+              <a:t> ₽</a:t>
+            </a:r>
+            <a:endParaRPr lang="ru-RU" sz="4400"/>
+          </a:p>
+          <a:p>
+            <a:pPr algn="ctr">
+              <a:defRPr/>
+            </a:pPr>
+            <a:endParaRPr lang="ru-RU"/>
+          </a:p>
+        </p:txBody>
+      </p:sp>
+      <p:sp>
+        <p:nvSpPr>
+          <p:cNvPr id="1991388140" name="TextBox 23"/>
+          <p:cNvSpPr txBox="1"/>
+          <p:nvPr/>
+        </p:nvSpPr>
+        <p:spPr bwMode="auto">
+          <a:xfrm>
+            <a:off x="6431095" y="4017713"/>
+            <a:ext cx="2557010" cy="701399"/>
+          </a:xfrm>
+          <a:prstGeom prst="rect">
+            <a:avLst/>
+          </a:prstGeom>
+          <a:noFill/>
+        </p:spPr>
+        <p:txBody>
+          <a:bodyPr rot="0" spcFirstLastPara="0" vertOverflow="overflow" horzOverflow="overflow" vert="horz" wrap="square" lIns="91440" tIns="45720" rIns="91440" bIns="45720" numCol="1" spcCol="0" rtlCol="0" fromWordArt="0" anchor="t" anchorCtr="0" forceAA="0" compatLnSpc="1">
+            <a:prstTxWarp prst="textNoShape"/>
+            <a:spAutoFit/>
+          </a:bodyPr>
+          <a:lstStyle/>
+          <a:p>
+            <a:pPr>
+              <a:defRPr/>
+            </a:pPr>
+            <a:r>
+              <a:rPr lang="en-US" sz="1100" b="0" i="1" u="none" strike="noStrike">
+                <a:solidFill>
+                  <a:srgbClr val="ED7D31"/>
+                </a:solidFill>
+                <a:latin typeface="Calibri"/>
+                <a:ea typeface="Calibri"/>
+                <a:cs typeface="Calibri"/>
+              </a:rPr>
+              <a:t>Единоразовые затраты на внедрение</a:t>
+            </a:r>
+            <a:r>
+              <a:rPr lang="ru-RU" sz="1100" b="0" i="1" u="none" strike="noStrike">
+                <a:solidFill>
+                  <a:srgbClr val="ED7D31"/>
+                </a:solidFill>
+                <a:latin typeface="Calibri"/>
+                <a:ea typeface="Calibri"/>
+                <a:cs typeface="Calibri"/>
+              </a:rPr>
+              <a:t>, кроме лицензии</a:t>
+            </a:r>
+            <a:endParaRPr lang="ru-RU">
+              <a:solidFill>
+                <a:srgbClr val="ED7D31"/>
+              </a:solidFill>
+            </a:endParaRPr>
+          </a:p>
+          <a:p>
+            <a:pPr algn="ctr">
+              <a:defRPr/>
+            </a:pPr>
+            <a:endParaRPr lang="ru-RU">
+              <a:solidFill>
+                <a:srgbClr val="ED7D31"/>
+              </a:solidFill>
+            </a:endParaRPr>
+          </a:p>
+        </p:txBody>
+      </p:sp>
+    </p:spTree>
+  </p:cSld>
+  <p:clrMapOvr>
+    <a:masterClrMapping/>
+  </p:clrMapOvr>
+  <mc:AlternateContent xmlns:mc="http://schemas.openxmlformats.org/markup-compatibility/2006">
+    <mc:Choice xmlns:p159="http://schemas.microsoft.com/office/powerpoint/2015/09/main" xmlns:p14="http://schemas.microsoft.com/office/powerpoint/2010/main" Requires="p159">
+      <p:transition p14:dur="500" advClick="1"/>
+    </mc:Choice>
+    <mc:Fallback>
+      <p:transition advClick="1"/>
+    </mc:Fallback>
+  </mc:AlternateContent>
+</p:sld>
+</file>
+
+<file path=ppt/slides/slide13.xml><?xml version="1.0" encoding="utf-8"?>
 <p:sld xmlns:a="http://schemas.openxmlformats.org/drawingml/2006/main" xmlns:r="http://schemas.openxmlformats.org/officeDocument/2006/relationships" xmlns:p="http://schemas.openxmlformats.org/presentationml/2006/main" xmlns:m="http://schemas.openxmlformats.org/officeDocument/2006/math" xmlns:w="http://schemas.openxmlformats.org/wordprocessingml/2006/main" xmlns:mc="http://schemas.openxmlformats.org/markup-compatibility/2006" showMasterPhAnim="0" showMasterSp="1" show="1">
   <p:cSld name="Slide 12">
     <p:bg>
@@ -4022,7 +4325,7 @@
       </p:grpSpPr>
       <p:sp>
         <p:nvSpPr>
-          <p:cNvPr id="778747952" name="Shape 0"/>
+          <p:cNvPr id="1418006655" name="Shape 0"/>
           <p:cNvSpPr/>
           <p:nvPr/>
         </p:nvSpPr>
@@ -4047,7 +4350,7 @@
       </p:sp>
       <p:sp>
         <p:nvSpPr>
-          <p:cNvPr id="487148341" name="Text 1"/>
+          <p:cNvPr id="180863827" name="Text 1"/>
           <p:cNvSpPr/>
           <p:nvPr/>
         </p:nvSpPr>
@@ -4087,7 +4390,7 @@
       </p:sp>
       <p:sp>
         <p:nvSpPr>
-          <p:cNvPr id="1191454435" name="Text 2"/>
+          <p:cNvPr id="1147506202" name="Text 2"/>
           <p:cNvSpPr/>
           <p:nvPr/>
         </p:nvSpPr>
@@ -4127,7 +4430,7 @@
       </p:sp>
       <p:sp>
         <p:nvSpPr>
-          <p:cNvPr id="604215010" name="Shape 3"/>
+          <p:cNvPr id="1610682891" name="Shape 3"/>
           <p:cNvSpPr/>
           <p:nvPr/>
         </p:nvSpPr>
@@ -4159,7 +4462,7 @@
       </p:sp>
       <p:sp>
         <p:nvSpPr>
-          <p:cNvPr id="720520212" name="Shape 4"/>
+          <p:cNvPr id="2118357190" name="Shape 4"/>
           <p:cNvSpPr/>
           <p:nvPr/>
         </p:nvSpPr>
@@ -4191,7 +4494,7 @@
       </p:sp>
       <p:pic>
         <p:nvPicPr>
-          <p:cNvPr id="1058176303" name="Image 0" descr="preencoded.png"/>
+          <p:cNvPr id="960075781" name="Image 0" descr="preencoded.png"/>
           <p:cNvPicPr>
             <a:picLocks noChangeAspect="1"/>
           </p:cNvPicPr>
@@ -4213,7 +4516,7 @@
       </p:pic>
       <p:sp>
         <p:nvSpPr>
-          <p:cNvPr id="1768541092" name="Text 5"/>
+          <p:cNvPr id="979798663" name="Text 5"/>
           <p:cNvSpPr/>
           <p:nvPr/>
         </p:nvSpPr>
@@ -4253,7 +4556,7 @@
       </p:sp>
       <p:sp>
         <p:nvSpPr>
-          <p:cNvPr id="971465954" name="Shape 6"/>
+          <p:cNvPr id="1576322823" name="Shape 6"/>
           <p:cNvSpPr/>
           <p:nvPr/>
         </p:nvSpPr>
@@ -4285,7 +4588,7 @@
       </p:sp>
       <p:sp>
         <p:nvSpPr>
-          <p:cNvPr id="1580544684" name="Shape 7"/>
+          <p:cNvPr id="2062933095" name="Shape 7"/>
           <p:cNvSpPr/>
           <p:nvPr/>
         </p:nvSpPr>
@@ -4317,7 +4620,7 @@
       </p:sp>
       <p:pic>
         <p:nvPicPr>
-          <p:cNvPr id="2101598221" name="Image 1" descr="preencoded.png"/>
+          <p:cNvPr id="163312440" name="Image 1" descr="preencoded.png"/>
           <p:cNvPicPr>
             <a:picLocks noChangeAspect="1"/>
           </p:cNvPicPr>
@@ -4339,7 +4642,7 @@
       </p:pic>
       <p:sp>
         <p:nvSpPr>
-          <p:cNvPr id="1024403945" name="Text 8"/>
+          <p:cNvPr id="1639021309" name="Text 8"/>
           <p:cNvSpPr/>
           <p:nvPr/>
         </p:nvSpPr>
@@ -4379,7 +4682,7 @@
       </p:sp>
       <p:sp>
         <p:nvSpPr>
-          <p:cNvPr id="354915399" name="Shape 9"/>
+          <p:cNvPr id="1125208322" name="Shape 9"/>
           <p:cNvSpPr/>
           <p:nvPr/>
         </p:nvSpPr>
@@ -4411,7 +4714,7 @@
       </p:sp>
       <p:sp>
         <p:nvSpPr>
-          <p:cNvPr id="2071664302" name="Shape 10"/>
+          <p:cNvPr id="1731905294" name="Shape 10"/>
           <p:cNvSpPr/>
           <p:nvPr/>
         </p:nvSpPr>
@@ -4443,7 +4746,7 @@
       </p:sp>
       <p:pic>
         <p:nvPicPr>
-          <p:cNvPr id="95279112" name="Image 2" descr="preencoded.png"/>
+          <p:cNvPr id="1589924383" name="Image 2" descr="preencoded.png"/>
           <p:cNvPicPr>
             <a:picLocks noChangeAspect="1"/>
           </p:cNvPicPr>
@@ -4465,7 +4768,7 @@
       </p:pic>
       <p:sp>
         <p:nvSpPr>
-          <p:cNvPr id="213729424" name="Text 11"/>
+          <p:cNvPr id="598395524" name="Text 11"/>
           <p:cNvSpPr/>
           <p:nvPr/>
         </p:nvSpPr>
@@ -4505,7 +4808,7 @@
       </p:sp>
       <p:sp>
         <p:nvSpPr>
-          <p:cNvPr id="1013106372" name="Shape 12"/>
+          <p:cNvPr id="1362968863" name="Shape 12"/>
           <p:cNvSpPr/>
           <p:nvPr/>
         </p:nvSpPr>
@@ -4537,7 +4840,7 @@
       </p:sp>
       <p:sp>
         <p:nvSpPr>
-          <p:cNvPr id="1995062344" name="Shape 13"/>
+          <p:cNvPr id="906670541" name="Shape 13"/>
           <p:cNvSpPr/>
           <p:nvPr/>
         </p:nvSpPr>
@@ -4569,7 +4872,7 @@
       </p:sp>
       <p:pic>
         <p:nvPicPr>
-          <p:cNvPr id="1999415043" name="Image 3" descr="preencoded.png"/>
+          <p:cNvPr id="1937944736" name="Image 3" descr="preencoded.png"/>
           <p:cNvPicPr>
             <a:picLocks noChangeAspect="1"/>
           </p:cNvPicPr>
@@ -4591,7 +4894,7 @@
       </p:pic>
       <p:sp>
         <p:nvSpPr>
-          <p:cNvPr id="295070591" name="Text 14"/>
+          <p:cNvPr id="2112165212" name="Text 14"/>
           <p:cNvSpPr/>
           <p:nvPr/>
         </p:nvSpPr>
@@ -4631,7 +4934,7 @@
       </p:sp>
       <p:sp>
         <p:nvSpPr>
-          <p:cNvPr id="1656284031" name="Shape 15"/>
+          <p:cNvPr id="494437858" name="Shape 15"/>
           <p:cNvSpPr/>
           <p:nvPr/>
         </p:nvSpPr>
@@ -4663,7 +4966,7 @@
       </p:sp>
       <p:sp>
         <p:nvSpPr>
-          <p:cNvPr id="1516325894" name="Shape 16"/>
+          <p:cNvPr id="828117810" name="Shape 16"/>
           <p:cNvSpPr/>
           <p:nvPr/>
         </p:nvSpPr>
@@ -4695,7 +4998,7 @@
       </p:sp>
       <p:pic>
         <p:nvPicPr>
-          <p:cNvPr id="436917188" name="Image 4" descr="preencoded.png"/>
+          <p:cNvPr id="606292439" name="Image 4" descr="preencoded.png"/>
           <p:cNvPicPr>
             <a:picLocks noChangeAspect="1"/>
           </p:cNvPicPr>
@@ -4717,7 +5020,7 @@
       </p:pic>
       <p:sp>
         <p:nvSpPr>
-          <p:cNvPr id="1269719802" name="Text 17"/>
+          <p:cNvPr id="1621006332" name="Text 17"/>
           <p:cNvSpPr/>
           <p:nvPr/>
         </p:nvSpPr>
@@ -4757,7 +5060,7 @@
       </p:sp>
       <p:sp>
         <p:nvSpPr>
-          <p:cNvPr id="1406014147" name="Shape 18"/>
+          <p:cNvPr id="643233349" name="Shape 18"/>
           <p:cNvSpPr/>
           <p:nvPr/>
         </p:nvSpPr>
@@ -4789,7 +5092,7 @@
       </p:sp>
       <p:sp>
         <p:nvSpPr>
-          <p:cNvPr id="304098396" name="Shape 19"/>
+          <p:cNvPr id="1655347706" name="Shape 19"/>
           <p:cNvSpPr/>
           <p:nvPr/>
         </p:nvSpPr>
@@ -4821,7 +5124,7 @@
       </p:sp>
       <p:pic>
         <p:nvPicPr>
-          <p:cNvPr id="661509078" name="Image 5" descr="preencoded.png"/>
+          <p:cNvPr id="794858578" name="Image 5" descr="preencoded.png"/>
           <p:cNvPicPr>
             <a:picLocks noChangeAspect="1"/>
           </p:cNvPicPr>
@@ -4843,7 +5146,7 @@
       </p:pic>
       <p:sp>
         <p:nvSpPr>
-          <p:cNvPr id="167280004" name="Text 20"/>
+          <p:cNvPr id="1356450867" name="Text 20"/>
           <p:cNvSpPr/>
           <p:nvPr/>
         </p:nvSpPr>
@@ -4897,7 +5200,7 @@
 </p:sld>
 </file>
 
-<file path=ppt/slides/slide13.xml><?xml version="1.0" encoding="utf-8"?>
+<file path=ppt/slides/slide14.xml><?xml version="1.0" encoding="utf-8"?>
 <p:sld xmlns:a="http://schemas.openxmlformats.org/drawingml/2006/main" xmlns:r="http://schemas.openxmlformats.org/officeDocument/2006/relationships" xmlns:p="http://schemas.openxmlformats.org/presentationml/2006/main" xmlns:m="http://schemas.openxmlformats.org/officeDocument/2006/math" xmlns:w="http://schemas.openxmlformats.org/wordprocessingml/2006/main" xmlns:mc="http://schemas.openxmlformats.org/markup-compatibility/2006" showMasterPhAnim="0" showMasterSp="1" show="1">
   <p:cSld name="Slide 13">
     <p:bg>
@@ -4923,7 +5226,7 @@
       </p:grpSpPr>
       <p:sp>
         <p:nvSpPr>
-          <p:cNvPr id="1914272880" name="Shape 0"/>
+          <p:cNvPr id="1102314555" name="Shape 0"/>
           <p:cNvSpPr/>
           <p:nvPr/>
         </p:nvSpPr>
@@ -4950,7 +5253,7 @@
       </p:sp>
       <p:sp>
         <p:nvSpPr>
-          <p:cNvPr id="983992647" name="Shape 1"/>
+          <p:cNvPr id="286107040" name="Shape 1"/>
           <p:cNvSpPr/>
           <p:nvPr/>
         </p:nvSpPr>
@@ -4977,7 +5280,7 @@
       </p:sp>
       <p:sp>
         <p:nvSpPr>
-          <p:cNvPr id="750687154" name="Shape 2"/>
+          <p:cNvPr id="1148176956" name="Shape 2"/>
           <p:cNvSpPr/>
           <p:nvPr/>
         </p:nvSpPr>
@@ -5004,7 +5307,7 @@
       </p:sp>
       <p:sp>
         <p:nvSpPr>
-          <p:cNvPr id="1311412695" name="Shape 3"/>
+          <p:cNvPr id="1924516060" name="Shape 3"/>
           <p:cNvSpPr/>
           <p:nvPr/>
         </p:nvSpPr>
@@ -5031,7 +5334,7 @@
       </p:sp>
       <p:sp>
         <p:nvSpPr>
-          <p:cNvPr id="35650924" name="Shape 4"/>
+          <p:cNvPr id="1290482914" name="Shape 4"/>
           <p:cNvSpPr/>
           <p:nvPr/>
         </p:nvSpPr>
@@ -5058,7 +5361,7 @@
       </p:sp>
       <p:sp>
         <p:nvSpPr>
-          <p:cNvPr id="1146470773" name="Text 5"/>
+          <p:cNvPr id="1058965102" name="Text 5"/>
           <p:cNvSpPr/>
           <p:nvPr/>
         </p:nvSpPr>
@@ -5098,7 +5401,7 @@
       </p:sp>
       <p:sp>
         <p:nvSpPr>
-          <p:cNvPr id="1079644608" name="Shape 6"/>
+          <p:cNvPr id="1342946929" name="Shape 6"/>
           <p:cNvSpPr/>
           <p:nvPr/>
         </p:nvSpPr>
@@ -5123,7 +5426,7 @@
       </p:sp>
       <p:sp>
         <p:nvSpPr>
-          <p:cNvPr id="439011236" name="Shape 8"/>
+          <p:cNvPr id="43612063" name="Shape 8"/>
           <p:cNvSpPr/>
           <p:nvPr/>
         </p:nvSpPr>
@@ -5155,7 +5458,7 @@
       </p:sp>
       <p:pic>
         <p:nvPicPr>
-          <p:cNvPr id="959860513" name="Image 0" descr="preencoded.png"/>
+          <p:cNvPr id="1226675244" name="Image 0" descr="preencoded.png"/>
           <p:cNvPicPr>
             <a:picLocks noChangeAspect="1"/>
           </p:cNvPicPr>
@@ -5175,6 +5478,92 @@
           </a:prstGeom>
         </p:spPr>
       </p:pic>
+      <p:sp>
+        <p:nvSpPr>
+          <p:cNvPr id="248053199" name=""/>
+          <p:cNvSpPr txBox="1"/>
+          <p:nvPr/>
+        </p:nvSpPr>
+        <p:spPr bwMode="auto">
+          <a:xfrm rot="0" flipH="0" flipV="0">
+            <a:off x="181617" y="4137024"/>
+            <a:ext cx="3614404" cy="838199"/>
+          </a:xfrm>
+          <a:prstGeom prst="rect">
+            <a:avLst/>
+          </a:prstGeom>
+          <a:noFill/>
+        </p:spPr>
+        <p:txBody>
+          <a:bodyPr vertOverflow="overflow" horzOverflow="overflow" vert="horz" wrap="square" lIns="91440" tIns="45720" rIns="91440" bIns="45720" numCol="1" spcCol="0" rtlCol="0" fromWordArt="0" anchor="t" anchorCtr="0" forceAA="0" upright="0" compatLnSpc="0">
+            <a:spAutoFit/>
+          </a:bodyPr>
+          <a:p>
+            <a:pPr marL="0" indent="0" algn="l">
+              <a:buNone/>
+              <a:defRPr/>
+            </a:pPr>
+            <a:r>
+              <a:rPr lang="en-US">
+                <a:solidFill>
+                  <a:srgbClr val="C9D4E0"/>
+                </a:solidFill>
+                <a:latin typeface="Calibri"/>
+                <a:ea typeface="Calibri"/>
+                <a:cs typeface="Calibri"/>
+              </a:rPr>
+              <a:t>Выполнил студент </a:t>
+            </a:r>
+            <a:r>
+              <a:rPr lang="ru-RU">
+                <a:solidFill>
+                  <a:srgbClr val="C9D4E0"/>
+                </a:solidFill>
+                <a:latin typeface="Calibri"/>
+                <a:ea typeface="Calibri"/>
+                <a:cs typeface="Calibri"/>
+              </a:rPr>
+              <a:t>Моногаров М.А.</a:t>
+            </a:r>
+            <a:endParaRPr lang="en-US" sz="1300">
+              <a:solidFill>
+                <a:srgbClr val="C9D4E0"/>
+              </a:solidFill>
+              <a:latin typeface="Calibri"/>
+              <a:ea typeface="Calibri"/>
+              <a:cs typeface="Calibri"/>
+            </a:endParaRPr>
+          </a:p>
+          <a:p>
+            <a:pPr marL="0" indent="0" algn="l">
+              <a:buNone/>
+              <a:defRPr/>
+            </a:pPr>
+            <a:r>
+              <a:rPr lang="en-US">
+                <a:solidFill>
+                  <a:srgbClr val="C9D4E0"/>
+                </a:solidFill>
+                <a:latin typeface="Calibri"/>
+                <a:ea typeface="Calibri"/>
+                <a:cs typeface="Calibri"/>
+              </a:rPr>
+              <a:t>группы 222СА</a:t>
+            </a:r>
+            <a:br>
+              <a:rPr lang="en-US" b="1">
+                <a:solidFill>
+                  <a:srgbClr val="FFFFFF"/>
+                </a:solidFill>
+                <a:latin typeface="Calibri"/>
+                <a:ea typeface="Calibri"/>
+                <a:cs typeface="Calibri"/>
+              </a:rPr>
+            </a:br>
+            <a:endParaRPr lang="en-US" sz="1300"/>
+          </a:p>
+        </p:txBody>
+      </p:sp>
     </p:spTree>
   </p:cSld>
   <p:clrMapOvr>
@@ -5217,7 +5606,7 @@
       </p:grpSpPr>
       <p:sp>
         <p:nvSpPr>
-          <p:cNvPr id="2109419452" name="Shape 0"/>
+          <p:cNvPr id="943386923" name="Shape 0"/>
           <p:cNvSpPr/>
           <p:nvPr/>
         </p:nvSpPr>
@@ -5242,7 +5631,7 @@
       </p:sp>
       <p:sp>
         <p:nvSpPr>
-          <p:cNvPr id="1001777923" name="Text 1"/>
+          <p:cNvPr id="1047161146" name="Text 1"/>
           <p:cNvSpPr/>
           <p:nvPr/>
         </p:nvSpPr>
@@ -5282,7 +5671,7 @@
       </p:sp>
       <p:sp>
         <p:nvSpPr>
-          <p:cNvPr id="720476468" name="Text 2"/>
+          <p:cNvPr id="1729161929" name="Text 2"/>
           <p:cNvSpPr/>
           <p:nvPr/>
         </p:nvSpPr>
@@ -5322,7 +5711,7 @@
       </p:sp>
       <p:sp>
         <p:nvSpPr>
-          <p:cNvPr id="1505836075" name="Shape 3"/>
+          <p:cNvPr id="85893048" name="Shape 3"/>
           <p:cNvSpPr/>
           <p:nvPr/>
         </p:nvSpPr>
@@ -5354,7 +5743,7 @@
       </p:sp>
       <p:sp>
         <p:nvSpPr>
-          <p:cNvPr id="786218639" name="Shape 4"/>
+          <p:cNvPr id="462662020" name="Shape 4"/>
           <p:cNvSpPr/>
           <p:nvPr/>
         </p:nvSpPr>
@@ -5379,7 +5768,7 @@
       </p:sp>
       <p:sp>
         <p:nvSpPr>
-          <p:cNvPr id="751798827" name="Shape 5"/>
+          <p:cNvPr id="1700101470" name="Shape 5"/>
           <p:cNvSpPr/>
           <p:nvPr/>
         </p:nvSpPr>
@@ -5411,7 +5800,7 @@
       </p:sp>
       <p:pic>
         <p:nvPicPr>
-          <p:cNvPr id="218682987" name="Image 0" descr="preencoded.png"/>
+          <p:cNvPr id="846936402" name="Image 0" descr="preencoded.png"/>
           <p:cNvPicPr>
             <a:picLocks noChangeAspect="1"/>
           </p:cNvPicPr>
@@ -5433,7 +5822,7 @@
       </p:pic>
       <p:sp>
         <p:nvSpPr>
-          <p:cNvPr id="350501496" name="Text 6"/>
+          <p:cNvPr id="525212917" name="Text 6"/>
           <p:cNvSpPr/>
           <p:nvPr/>
         </p:nvSpPr>
@@ -5473,7 +5862,7 @@
       </p:sp>
       <p:sp>
         <p:nvSpPr>
-          <p:cNvPr id="6901842" name="Text 7"/>
+          <p:cNvPr id="712390155" name="Text 7"/>
           <p:cNvSpPr/>
           <p:nvPr/>
         </p:nvSpPr>
@@ -5513,7 +5902,7 @@
       </p:sp>
       <p:sp>
         <p:nvSpPr>
-          <p:cNvPr id="1709536553" name="Shape 8"/>
+          <p:cNvPr id="331576640" name="Shape 8"/>
           <p:cNvSpPr/>
           <p:nvPr/>
         </p:nvSpPr>
@@ -5545,7 +5934,7 @@
       </p:sp>
       <p:sp>
         <p:nvSpPr>
-          <p:cNvPr id="1012110611" name="Shape 9"/>
+          <p:cNvPr id="1740888178" name="Shape 9"/>
           <p:cNvSpPr/>
           <p:nvPr/>
         </p:nvSpPr>
@@ -5570,7 +5959,7 @@
       </p:sp>
       <p:sp>
         <p:nvSpPr>
-          <p:cNvPr id="2022576433" name="Shape 10"/>
+          <p:cNvPr id="298218354" name="Shape 10"/>
           <p:cNvSpPr/>
           <p:nvPr/>
         </p:nvSpPr>
@@ -5602,7 +5991,7 @@
       </p:sp>
       <p:pic>
         <p:nvPicPr>
-          <p:cNvPr id="129358881" name="Image 1" descr="preencoded.png"/>
+          <p:cNvPr id="1420866597" name="Image 1" descr="preencoded.png"/>
           <p:cNvPicPr>
             <a:picLocks noChangeAspect="1"/>
           </p:cNvPicPr>
@@ -5624,7 +6013,7 @@
       </p:pic>
       <p:sp>
         <p:nvSpPr>
-          <p:cNvPr id="386290676" name="Text 11"/>
+          <p:cNvPr id="1340155624" name="Text 11"/>
           <p:cNvSpPr/>
           <p:nvPr/>
         </p:nvSpPr>
@@ -5664,7 +6053,7 @@
       </p:sp>
       <p:sp>
         <p:nvSpPr>
-          <p:cNvPr id="1624989774" name="Text 12"/>
+          <p:cNvPr id="219139397" name="Text 12"/>
           <p:cNvSpPr/>
           <p:nvPr/>
         </p:nvSpPr>
@@ -5704,7 +6093,7 @@
       </p:sp>
       <p:sp>
         <p:nvSpPr>
-          <p:cNvPr id="293889952" name="Shape 13"/>
+          <p:cNvPr id="1919339770" name="Shape 13"/>
           <p:cNvSpPr/>
           <p:nvPr/>
         </p:nvSpPr>
@@ -5736,7 +6125,7 @@
       </p:sp>
       <p:sp>
         <p:nvSpPr>
-          <p:cNvPr id="1739622085" name="Shape 14"/>
+          <p:cNvPr id="1180454958" name="Shape 14"/>
           <p:cNvSpPr/>
           <p:nvPr/>
         </p:nvSpPr>
@@ -5761,7 +6150,7 @@
       </p:sp>
       <p:sp>
         <p:nvSpPr>
-          <p:cNvPr id="1137506151" name="Shape 15"/>
+          <p:cNvPr id="485390296" name="Shape 15"/>
           <p:cNvSpPr/>
           <p:nvPr/>
         </p:nvSpPr>
@@ -5793,7 +6182,7 @@
       </p:sp>
       <p:pic>
         <p:nvPicPr>
-          <p:cNvPr id="721442312" name="Image 2" descr="preencoded.png"/>
+          <p:cNvPr id="1396626809" name="Image 2" descr="preencoded.png"/>
           <p:cNvPicPr>
             <a:picLocks noChangeAspect="1"/>
           </p:cNvPicPr>
@@ -5815,7 +6204,7 @@
       </p:pic>
       <p:sp>
         <p:nvSpPr>
-          <p:cNvPr id="1473625277" name="Text 16"/>
+          <p:cNvPr id="462649084" name="Text 16"/>
           <p:cNvSpPr/>
           <p:nvPr/>
         </p:nvSpPr>
@@ -5870,7 +6259,7 @@
       </p:sp>
       <p:sp>
         <p:nvSpPr>
-          <p:cNvPr id="1874911913" name="Text 17"/>
+          <p:cNvPr id="1734177637" name="Text 17"/>
           <p:cNvSpPr/>
           <p:nvPr/>
         </p:nvSpPr>
@@ -5910,7 +6299,7 @@
       </p:sp>
       <p:sp>
         <p:nvSpPr>
-          <p:cNvPr id="221148470" name="Shape 18"/>
+          <p:cNvPr id="905851693" name="Shape 18"/>
           <p:cNvSpPr/>
           <p:nvPr/>
         </p:nvSpPr>
@@ -5942,7 +6331,7 @@
       </p:sp>
       <p:sp>
         <p:nvSpPr>
-          <p:cNvPr id="1125321871" name="Shape 19"/>
+          <p:cNvPr id="1095382623" name="Shape 19"/>
           <p:cNvSpPr/>
           <p:nvPr/>
         </p:nvSpPr>
@@ -5967,7 +6356,7 @@
       </p:sp>
       <p:sp>
         <p:nvSpPr>
-          <p:cNvPr id="464108670" name="Shape 20"/>
+          <p:cNvPr id="981020727" name="Shape 20"/>
           <p:cNvSpPr/>
           <p:nvPr/>
         </p:nvSpPr>
@@ -5999,7 +6388,7 @@
       </p:sp>
       <p:pic>
         <p:nvPicPr>
-          <p:cNvPr id="2132931211" name="Image 3" descr="preencoded.png"/>
+          <p:cNvPr id="418614611" name="Image 3" descr="preencoded.png"/>
           <p:cNvPicPr>
             <a:picLocks noChangeAspect="1"/>
           </p:cNvPicPr>
@@ -6021,7 +6410,7 @@
       </p:pic>
       <p:sp>
         <p:nvSpPr>
-          <p:cNvPr id="1468482971" name="Text 21"/>
+          <p:cNvPr id="536677472" name="Text 21"/>
           <p:cNvSpPr/>
           <p:nvPr/>
         </p:nvSpPr>
@@ -6061,7 +6450,7 @@
       </p:sp>
       <p:sp>
         <p:nvSpPr>
-          <p:cNvPr id="1542404835" name="Text 22"/>
+          <p:cNvPr id="1423556863" name="Text 22"/>
           <p:cNvSpPr/>
           <p:nvPr/>
         </p:nvSpPr>
@@ -6141,7 +6530,7 @@
       </p:grpSpPr>
       <p:sp>
         <p:nvSpPr>
-          <p:cNvPr id="56188742" name="Shape 0"/>
+          <p:cNvPr id="1955492075" name="Shape 0"/>
           <p:cNvSpPr/>
           <p:nvPr/>
         </p:nvSpPr>
@@ -6166,7 +6555,7 @@
       </p:sp>
       <p:sp>
         <p:nvSpPr>
-          <p:cNvPr id="841784139" name="Text 1"/>
+          <p:cNvPr id="172647289" name="Text 1"/>
           <p:cNvSpPr/>
           <p:nvPr/>
         </p:nvSpPr>
@@ -6206,7 +6595,7 @@
       </p:sp>
       <p:sp>
         <p:nvSpPr>
-          <p:cNvPr id="1920258270" name="Text 2"/>
+          <p:cNvPr id="127020551" name="Text 2"/>
           <p:cNvSpPr/>
           <p:nvPr/>
         </p:nvSpPr>
@@ -6246,7 +6635,7 @@
       </p:sp>
       <p:sp>
         <p:nvSpPr>
-          <p:cNvPr id="2083287906" name="Shape 3"/>
+          <p:cNvPr id="1577919203" name="Shape 3"/>
           <p:cNvSpPr/>
           <p:nvPr/>
         </p:nvSpPr>
@@ -6278,7 +6667,7 @@
       </p:sp>
       <p:sp>
         <p:nvSpPr>
-          <p:cNvPr id="49809654" name="Shape 4"/>
+          <p:cNvPr id="113759695" name="Shape 4"/>
           <p:cNvSpPr/>
           <p:nvPr/>
         </p:nvSpPr>
@@ -6310,7 +6699,7 @@
       </p:sp>
       <p:pic>
         <p:nvPicPr>
-          <p:cNvPr id="285799518" name="Image 0" descr="preencoded.png"/>
+          <p:cNvPr id="194309138" name="Image 0" descr="preencoded.png"/>
           <p:cNvPicPr>
             <a:picLocks noChangeAspect="1"/>
           </p:cNvPicPr>
@@ -6332,7 +6721,7 @@
       </p:pic>
       <p:sp>
         <p:nvSpPr>
-          <p:cNvPr id="716493340" name="Text 5"/>
+          <p:cNvPr id="537963908" name="Text 5"/>
           <p:cNvSpPr/>
           <p:nvPr/>
         </p:nvSpPr>
@@ -6372,7 +6761,7 @@
       </p:sp>
       <p:sp>
         <p:nvSpPr>
-          <p:cNvPr id="1759781622" name="Text 6"/>
+          <p:cNvPr id="1251113074" name="Text 6"/>
           <p:cNvSpPr/>
           <p:nvPr/>
         </p:nvSpPr>
@@ -6412,7 +6801,7 @@
       </p:sp>
       <p:sp>
         <p:nvSpPr>
-          <p:cNvPr id="200742188" name="Text 7"/>
+          <p:cNvPr id="1051612291" name="Text 7"/>
           <p:cNvSpPr/>
           <p:nvPr/>
         </p:nvSpPr>
@@ -6452,7 +6841,7 @@
       </p:sp>
       <p:sp>
         <p:nvSpPr>
-          <p:cNvPr id="1949846274" name="Shape 8"/>
+          <p:cNvPr id="778200915" name="Shape 8"/>
           <p:cNvSpPr/>
           <p:nvPr/>
         </p:nvSpPr>
@@ -6477,7 +6866,7 @@
       </p:sp>
       <p:sp>
         <p:nvSpPr>
-          <p:cNvPr id="1370053967" name="Text 9"/>
+          <p:cNvPr id="1163073181" name="Text 9"/>
           <p:cNvSpPr/>
           <p:nvPr/>
         </p:nvSpPr>
@@ -6517,7 +6906,7 @@
       </p:sp>
       <p:sp>
         <p:nvSpPr>
-          <p:cNvPr id="96077420" name="Text 10"/>
+          <p:cNvPr id="117950818" name="Text 10"/>
           <p:cNvSpPr/>
           <p:nvPr/>
         </p:nvSpPr>
@@ -6557,7 +6946,7 @@
       </p:sp>
       <p:sp>
         <p:nvSpPr>
-          <p:cNvPr id="2066512314" name="Shape 11"/>
+          <p:cNvPr id="892442098" name="Shape 11"/>
           <p:cNvSpPr/>
           <p:nvPr/>
         </p:nvSpPr>
@@ -6582,7 +6971,7 @@
       </p:sp>
       <p:sp>
         <p:nvSpPr>
-          <p:cNvPr id="554585337" name="Text 12"/>
+          <p:cNvPr id="1202678764" name="Text 12"/>
           <p:cNvSpPr/>
           <p:nvPr/>
         </p:nvSpPr>
@@ -6622,7 +7011,7 @@
       </p:sp>
       <p:sp>
         <p:nvSpPr>
-          <p:cNvPr id="1486866523" name="Text 13"/>
+          <p:cNvPr id="1812871055" name="Text 13"/>
           <p:cNvSpPr/>
           <p:nvPr/>
         </p:nvSpPr>
@@ -6662,7 +7051,7 @@
       </p:sp>
       <p:sp>
         <p:nvSpPr>
-          <p:cNvPr id="2081813224" name="Shape 14"/>
+          <p:cNvPr id="310120548" name="Shape 14"/>
           <p:cNvSpPr/>
           <p:nvPr/>
         </p:nvSpPr>
@@ -6687,7 +7076,7 @@
       </p:sp>
       <p:sp>
         <p:nvSpPr>
-          <p:cNvPr id="1961868831" name="Text 15"/>
+          <p:cNvPr id="1635020982" name="Text 15"/>
           <p:cNvSpPr/>
           <p:nvPr/>
         </p:nvSpPr>
@@ -6727,7 +7116,7 @@
       </p:sp>
       <p:sp>
         <p:nvSpPr>
-          <p:cNvPr id="1396242514" name="Text 16"/>
+          <p:cNvPr id="1884300559" name="Text 16"/>
           <p:cNvSpPr/>
           <p:nvPr/>
         </p:nvSpPr>
@@ -6767,7 +7156,7 @@
       </p:sp>
       <p:sp>
         <p:nvSpPr>
-          <p:cNvPr id="919285378" name="Shape 17"/>
+          <p:cNvPr id="1313766804" name="Shape 17"/>
           <p:cNvSpPr/>
           <p:nvPr/>
         </p:nvSpPr>
@@ -6792,7 +7181,7 @@
       </p:sp>
       <p:sp>
         <p:nvSpPr>
-          <p:cNvPr id="1776617547" name="Text 18"/>
+          <p:cNvPr id="2013275343" name="Text 18"/>
           <p:cNvSpPr/>
           <p:nvPr/>
         </p:nvSpPr>
@@ -6832,7 +7221,7 @@
       </p:sp>
       <p:sp>
         <p:nvSpPr>
-          <p:cNvPr id="1123305782" name="Text 19"/>
+          <p:cNvPr id="1692677394" name="Text 19"/>
           <p:cNvSpPr/>
           <p:nvPr/>
         </p:nvSpPr>
@@ -6872,7 +7261,7 @@
       </p:sp>
       <p:sp>
         <p:nvSpPr>
-          <p:cNvPr id="22592910" name="Shape 20"/>
+          <p:cNvPr id="930662395" name="Shape 20"/>
           <p:cNvSpPr/>
           <p:nvPr/>
         </p:nvSpPr>
@@ -6897,7 +7286,7 @@
       </p:sp>
       <p:sp>
         <p:nvSpPr>
-          <p:cNvPr id="1013197058" name="Text 21"/>
+          <p:cNvPr id="1080580774" name="Text 21"/>
           <p:cNvSpPr/>
           <p:nvPr/>
         </p:nvSpPr>
@@ -6937,7 +7326,7 @@
       </p:sp>
       <p:sp>
         <p:nvSpPr>
-          <p:cNvPr id="1789888856" name="Text 22"/>
+          <p:cNvPr id="898472149" name="Text 22"/>
           <p:cNvSpPr/>
           <p:nvPr/>
         </p:nvSpPr>
@@ -7017,7 +7406,7 @@
       </p:grpSpPr>
       <p:sp>
         <p:nvSpPr>
-          <p:cNvPr id="308606071" name="Shape 0"/>
+          <p:cNvPr id="1267760313" name="Shape 0"/>
           <p:cNvSpPr/>
           <p:nvPr/>
         </p:nvSpPr>
@@ -7042,7 +7431,7 @@
       </p:sp>
       <p:sp>
         <p:nvSpPr>
-          <p:cNvPr id="287199587" name="Text 1"/>
+          <p:cNvPr id="1928589862" name="Text 1"/>
           <p:cNvSpPr/>
           <p:nvPr/>
         </p:nvSpPr>
@@ -7082,7 +7471,7 @@
       </p:sp>
       <p:sp>
         <p:nvSpPr>
-          <p:cNvPr id="1357745029" name="Text 2"/>
+          <p:cNvPr id="916243475" name="Text 2"/>
           <p:cNvSpPr/>
           <p:nvPr/>
         </p:nvSpPr>
@@ -7122,7 +7511,7 @@
       </p:sp>
       <p:sp>
         <p:nvSpPr>
-          <p:cNvPr id="2075645802" name="Shape 3"/>
+          <p:cNvPr id="1645860644" name="Shape 3"/>
           <p:cNvSpPr/>
           <p:nvPr/>
         </p:nvSpPr>
@@ -7154,7 +7543,7 @@
       </p:sp>
       <p:sp>
         <p:nvSpPr>
-          <p:cNvPr id="1654853298" name="Shape 4"/>
+          <p:cNvPr id="1535787932" name="Shape 4"/>
           <p:cNvSpPr/>
           <p:nvPr/>
         </p:nvSpPr>
@@ -7186,7 +7575,7 @@
       </p:sp>
       <p:pic>
         <p:nvPicPr>
-          <p:cNvPr id="1134583862" name="Image 0" descr="preencoded.png"/>
+          <p:cNvPr id="855406982" name="Image 0" descr="preencoded.png"/>
           <p:cNvPicPr>
             <a:picLocks noChangeAspect="1"/>
           </p:cNvPicPr>
@@ -7208,7 +7597,7 @@
       </p:pic>
       <p:sp>
         <p:nvSpPr>
-          <p:cNvPr id="346076543" name="Text 5"/>
+          <p:cNvPr id="1172286464" name="Text 5"/>
           <p:cNvSpPr/>
           <p:nvPr/>
         </p:nvSpPr>
@@ -7248,7 +7637,7 @@
       </p:sp>
       <p:sp>
         <p:nvSpPr>
-          <p:cNvPr id="1031984340" name="Text 6"/>
+          <p:cNvPr id="807622930" name="Text 6"/>
           <p:cNvSpPr/>
           <p:nvPr/>
         </p:nvSpPr>
@@ -7288,7 +7677,7 @@
       </p:sp>
       <p:sp>
         <p:nvSpPr>
-          <p:cNvPr id="1563193561" name="Shape 7"/>
+          <p:cNvPr id="507473871" name="Shape 7"/>
           <p:cNvSpPr/>
           <p:nvPr/>
         </p:nvSpPr>
@@ -7311,7 +7700,7 @@
       </p:sp>
       <p:sp>
         <p:nvSpPr>
-          <p:cNvPr id="114592637" name="Shape 8"/>
+          <p:cNvPr id="570970285" name="Shape 8"/>
           <p:cNvSpPr/>
           <p:nvPr/>
         </p:nvSpPr>
@@ -7343,7 +7732,7 @@
       </p:sp>
       <p:pic>
         <p:nvPicPr>
-          <p:cNvPr id="605533655" name="Image 1" descr="preencoded.png"/>
+          <p:cNvPr id="444909511" name="Image 1" descr="preencoded.png"/>
           <p:cNvPicPr>
             <a:picLocks noChangeAspect="1"/>
           </p:cNvPicPr>
@@ -7365,7 +7754,7 @@
       </p:pic>
       <p:sp>
         <p:nvSpPr>
-          <p:cNvPr id="557364136" name="Text 9"/>
+          <p:cNvPr id="1746956371" name="Text 9"/>
           <p:cNvSpPr/>
           <p:nvPr/>
         </p:nvSpPr>
@@ -7405,7 +7794,7 @@
       </p:sp>
       <p:sp>
         <p:nvSpPr>
-          <p:cNvPr id="105480357" name="Shape 10"/>
+          <p:cNvPr id="274243283" name="Shape 10"/>
           <p:cNvSpPr/>
           <p:nvPr/>
         </p:nvSpPr>
@@ -7437,7 +7826,7 @@
       </p:sp>
       <p:sp>
         <p:nvSpPr>
-          <p:cNvPr id="1284105673" name="Text 11"/>
+          <p:cNvPr id="1582344417" name="Text 11"/>
           <p:cNvSpPr/>
           <p:nvPr/>
         </p:nvSpPr>
@@ -7477,7 +7866,7 @@
       </p:sp>
       <p:sp>
         <p:nvSpPr>
-          <p:cNvPr id="170112149" name="Shape 12"/>
+          <p:cNvPr id="281117644" name="Shape 12"/>
           <p:cNvSpPr/>
           <p:nvPr/>
         </p:nvSpPr>
@@ -7502,7 +7891,7 @@
       </p:sp>
       <p:pic>
         <p:nvPicPr>
-          <p:cNvPr id="624891177" name="Image 2" descr="preencoded.png"/>
+          <p:cNvPr id="926687106" name="Image 2" descr="preencoded.png"/>
           <p:cNvPicPr>
             <a:picLocks noChangeAspect="1"/>
           </p:cNvPicPr>
@@ -7524,7 +7913,7 @@
       </p:pic>
       <p:sp>
         <p:nvSpPr>
-          <p:cNvPr id="1875864463" name="Text 13"/>
+          <p:cNvPr id="1245084727" name="Text 13"/>
           <p:cNvSpPr/>
           <p:nvPr/>
         </p:nvSpPr>
@@ -7564,7 +7953,7 @@
       </p:sp>
       <p:sp>
         <p:nvSpPr>
-          <p:cNvPr id="438673643" name="Shape 15"/>
+          <p:cNvPr id="1148890733" name="Shape 15"/>
           <p:cNvSpPr/>
           <p:nvPr/>
         </p:nvSpPr>
@@ -7589,7 +7978,7 @@
       </p:sp>
       <p:pic>
         <p:nvPicPr>
-          <p:cNvPr id="34621584" name="Image 3" descr="preencoded.png"/>
+          <p:cNvPr id="1662080180" name="Image 3" descr="preencoded.png"/>
           <p:cNvPicPr>
             <a:picLocks noChangeAspect="1"/>
           </p:cNvPicPr>
@@ -7611,7 +8000,7 @@
       </p:pic>
       <p:sp>
         <p:nvSpPr>
-          <p:cNvPr id="949872932" name="Text 16"/>
+          <p:cNvPr id="1088260839" name="Text 16"/>
           <p:cNvSpPr/>
           <p:nvPr/>
         </p:nvSpPr>
@@ -7651,7 +8040,7 @@
       </p:sp>
       <p:sp>
         <p:nvSpPr>
-          <p:cNvPr id="1797657603" name="Shape 18"/>
+          <p:cNvPr id="548786523" name="Shape 18"/>
           <p:cNvSpPr/>
           <p:nvPr/>
         </p:nvSpPr>
@@ -7676,7 +8065,7 @@
       </p:sp>
       <p:pic>
         <p:nvPicPr>
-          <p:cNvPr id="1963051682" name="Image 4" descr="preencoded.png"/>
+          <p:cNvPr id="1496671569" name="Image 4" descr="preencoded.png"/>
           <p:cNvPicPr>
             <a:picLocks noChangeAspect="1"/>
           </p:cNvPicPr>
@@ -7698,7 +8087,7 @@
       </p:pic>
       <p:sp>
         <p:nvSpPr>
-          <p:cNvPr id="1997413185" name="Text 19"/>
+          <p:cNvPr id="1690448597" name="Text 19"/>
           <p:cNvSpPr/>
           <p:nvPr/>
         </p:nvSpPr>
@@ -7738,7 +8127,7 @@
       </p:sp>
       <p:sp>
         <p:nvSpPr>
-          <p:cNvPr id="1088942813" name="Shape 21"/>
+          <p:cNvPr id="351228942" name="Shape 21"/>
           <p:cNvSpPr/>
           <p:nvPr/>
         </p:nvSpPr>
@@ -7763,7 +8152,7 @@
       </p:sp>
       <p:pic>
         <p:nvPicPr>
-          <p:cNvPr id="1913752744" name="Image 5" descr="preencoded.png"/>
+          <p:cNvPr id="2116695421" name="Image 5" descr="preencoded.png"/>
           <p:cNvPicPr>
             <a:picLocks noChangeAspect="1"/>
           </p:cNvPicPr>
@@ -7785,7 +8174,7 @@
       </p:pic>
       <p:sp>
         <p:nvSpPr>
-          <p:cNvPr id="2038835693" name="Text 22"/>
+          <p:cNvPr id="302703754" name="Text 22"/>
           <p:cNvSpPr/>
           <p:nvPr/>
         </p:nvSpPr>
@@ -7825,7 +8214,7 @@
       </p:sp>
       <p:sp>
         <p:nvSpPr>
-          <p:cNvPr id="1041255233" name="Shape 24"/>
+          <p:cNvPr id="602236838" name="Shape 24"/>
           <p:cNvSpPr/>
           <p:nvPr/>
         </p:nvSpPr>
@@ -7850,7 +8239,7 @@
       </p:sp>
       <p:pic>
         <p:nvPicPr>
-          <p:cNvPr id="650832778" name="Image 6" descr="preencoded.png"/>
+          <p:cNvPr id="113935503" name="Image 6" descr="preencoded.png"/>
           <p:cNvPicPr>
             <a:picLocks noChangeAspect="1"/>
           </p:cNvPicPr>
@@ -7872,7 +8261,7 @@
       </p:pic>
       <p:sp>
         <p:nvSpPr>
-          <p:cNvPr id="1845852900" name="Text 25"/>
+          <p:cNvPr id="1663771172" name="Text 25"/>
           <p:cNvSpPr/>
           <p:nvPr/>
         </p:nvSpPr>
@@ -7952,7 +8341,7 @@
       </p:grpSpPr>
       <p:sp>
         <p:nvSpPr>
-          <p:cNvPr id="1005350615" name="Shape 0"/>
+          <p:cNvPr id="1394102872" name="Shape 0"/>
           <p:cNvSpPr/>
           <p:nvPr/>
         </p:nvSpPr>
@@ -7977,7 +8366,7 @@
       </p:sp>
       <p:sp>
         <p:nvSpPr>
-          <p:cNvPr id="1046809915" name="Text 1"/>
+          <p:cNvPr id="17213554" name="Text 1"/>
           <p:cNvSpPr/>
           <p:nvPr/>
         </p:nvSpPr>
@@ -8017,7 +8406,7 @@
       </p:sp>
       <p:sp>
         <p:nvSpPr>
-          <p:cNvPr id="373659431" name="Text 2"/>
+          <p:cNvPr id="138032912" name="Text 2"/>
           <p:cNvSpPr/>
           <p:nvPr/>
         </p:nvSpPr>
@@ -8057,7 +8446,7 @@
       </p:sp>
       <p:sp>
         <p:nvSpPr>
-          <p:cNvPr id="1342598547" name="Shape 3"/>
+          <p:cNvPr id="490329186" name="Shape 3"/>
           <p:cNvSpPr/>
           <p:nvPr/>
         </p:nvSpPr>
@@ -8089,7 +8478,7 @@
       </p:sp>
       <p:sp>
         <p:nvSpPr>
-          <p:cNvPr id="1807450988" name="Shape 4"/>
+          <p:cNvPr id="977485402" name="Shape 4"/>
           <p:cNvSpPr/>
           <p:nvPr/>
         </p:nvSpPr>
@@ -8121,7 +8510,7 @@
       </p:sp>
       <p:pic>
         <p:nvPicPr>
-          <p:cNvPr id="1054150284" name="Image 0" descr="preencoded.png"/>
+          <p:cNvPr id="114319510" name="Image 0" descr="preencoded.png"/>
           <p:cNvPicPr>
             <a:picLocks noChangeAspect="1"/>
           </p:cNvPicPr>
@@ -8143,7 +8532,7 @@
       </p:pic>
       <p:sp>
         <p:nvSpPr>
-          <p:cNvPr id="1819118019" name="Text 5"/>
+          <p:cNvPr id="622695704" name="Text 5"/>
           <p:cNvSpPr/>
           <p:nvPr/>
         </p:nvSpPr>
@@ -8183,7 +8572,7 @@
       </p:sp>
       <p:sp>
         <p:nvSpPr>
-          <p:cNvPr id="61449660" name="Text 6"/>
+          <p:cNvPr id="436004240" name="Text 6"/>
           <p:cNvSpPr/>
           <p:nvPr/>
         </p:nvSpPr>
@@ -8223,7 +8612,7 @@
       </p:sp>
       <p:sp>
         <p:nvSpPr>
-          <p:cNvPr id="813982457" name="Shape 7"/>
+          <p:cNvPr id="1921293994" name="Shape 7"/>
           <p:cNvSpPr/>
           <p:nvPr/>
         </p:nvSpPr>
@@ -8255,7 +8644,7 @@
       </p:sp>
       <p:sp>
         <p:nvSpPr>
-          <p:cNvPr id="879639067" name="Shape 8"/>
+          <p:cNvPr id="1156905985" name="Shape 8"/>
           <p:cNvSpPr/>
           <p:nvPr/>
         </p:nvSpPr>
@@ -8287,7 +8676,7 @@
       </p:sp>
       <p:pic>
         <p:nvPicPr>
-          <p:cNvPr id="1123337864" name="Image 1" descr="preencoded.png"/>
+          <p:cNvPr id="64560236" name="Image 1" descr="preencoded.png"/>
           <p:cNvPicPr>
             <a:picLocks noChangeAspect="1"/>
           </p:cNvPicPr>
@@ -8309,7 +8698,7 @@
       </p:pic>
       <p:sp>
         <p:nvSpPr>
-          <p:cNvPr id="1790583989" name="Text 9"/>
+          <p:cNvPr id="1967992611" name="Text 9"/>
           <p:cNvSpPr/>
           <p:nvPr/>
         </p:nvSpPr>
@@ -8349,7 +8738,7 @@
       </p:sp>
       <p:sp>
         <p:nvSpPr>
-          <p:cNvPr id="895047781" name="Text 10"/>
+          <p:cNvPr id="1971791916" name="Text 10"/>
           <p:cNvSpPr/>
           <p:nvPr/>
         </p:nvSpPr>
@@ -8389,7 +8778,7 @@
       </p:sp>
       <p:sp>
         <p:nvSpPr>
-          <p:cNvPr id="208667359" name="Shape 11"/>
+          <p:cNvPr id="1976613758" name="Shape 11"/>
           <p:cNvSpPr/>
           <p:nvPr/>
         </p:nvSpPr>
@@ -8421,7 +8810,7 @@
       </p:sp>
       <p:sp>
         <p:nvSpPr>
-          <p:cNvPr id="75472595" name="Shape 12"/>
+          <p:cNvPr id="2091791317" name="Shape 12"/>
           <p:cNvSpPr/>
           <p:nvPr/>
         </p:nvSpPr>
@@ -8453,7 +8842,7 @@
       </p:sp>
       <p:pic>
         <p:nvPicPr>
-          <p:cNvPr id="1086710954" name="Image 2" descr="preencoded.png"/>
+          <p:cNvPr id="598743170" name="Image 2" descr="preencoded.png"/>
           <p:cNvPicPr>
             <a:picLocks noChangeAspect="1"/>
           </p:cNvPicPr>
@@ -8475,7 +8864,7 @@
       </p:pic>
       <p:sp>
         <p:nvSpPr>
-          <p:cNvPr id="1029291384" name="Text 13"/>
+          <p:cNvPr id="240172622" name="Text 13"/>
           <p:cNvSpPr/>
           <p:nvPr/>
         </p:nvSpPr>
@@ -8515,7 +8904,7 @@
       </p:sp>
       <p:sp>
         <p:nvSpPr>
-          <p:cNvPr id="865568296" name="Text 14"/>
+          <p:cNvPr id="659984755" name="Text 14"/>
           <p:cNvSpPr/>
           <p:nvPr/>
         </p:nvSpPr>
@@ -8555,7 +8944,7 @@
       </p:sp>
       <p:sp>
         <p:nvSpPr>
-          <p:cNvPr id="18098999" name="Shape 15"/>
+          <p:cNvPr id="431913370" name="Shape 15"/>
           <p:cNvSpPr/>
           <p:nvPr/>
         </p:nvSpPr>
@@ -8587,7 +8976,7 @@
       </p:sp>
       <p:sp>
         <p:nvSpPr>
-          <p:cNvPr id="1238095575" name="Shape 16"/>
+          <p:cNvPr id="306630648" name="Shape 16"/>
           <p:cNvSpPr/>
           <p:nvPr/>
         </p:nvSpPr>
@@ -8619,7 +9008,7 @@
       </p:sp>
       <p:pic>
         <p:nvPicPr>
-          <p:cNvPr id="816100770" name="Image 3" descr="preencoded.png"/>
+          <p:cNvPr id="1894494508" name="Image 3" descr="preencoded.png"/>
           <p:cNvPicPr>
             <a:picLocks noChangeAspect="1"/>
           </p:cNvPicPr>
@@ -8641,7 +9030,7 @@
       </p:pic>
       <p:sp>
         <p:nvSpPr>
-          <p:cNvPr id="833168143" name="Text 17"/>
+          <p:cNvPr id="1033331493" name="Text 17"/>
           <p:cNvSpPr/>
           <p:nvPr/>
         </p:nvSpPr>
@@ -8681,7 +9070,7 @@
       </p:sp>
       <p:sp>
         <p:nvSpPr>
-          <p:cNvPr id="1447454764" name="Text 18"/>
+          <p:cNvPr id="262405748" name="Text 18"/>
           <p:cNvSpPr/>
           <p:nvPr/>
         </p:nvSpPr>
@@ -8721,7 +9110,7 @@
       </p:sp>
       <p:sp>
         <p:nvSpPr>
-          <p:cNvPr id="963023417" name="Shape 19"/>
+          <p:cNvPr id="650260330" name="Shape 19"/>
           <p:cNvSpPr/>
           <p:nvPr/>
         </p:nvSpPr>
@@ -8753,7 +9142,7 @@
       </p:sp>
       <p:sp>
         <p:nvSpPr>
-          <p:cNvPr id="1121948843" name="Shape 20"/>
+          <p:cNvPr id="454269260" name="Shape 20"/>
           <p:cNvSpPr/>
           <p:nvPr/>
         </p:nvSpPr>
@@ -8785,7 +9174,7 @@
       </p:sp>
       <p:pic>
         <p:nvPicPr>
-          <p:cNvPr id="1161990824" name="Image 4" descr="preencoded.png"/>
+          <p:cNvPr id="655308518" name="Image 4" descr="preencoded.png"/>
           <p:cNvPicPr>
             <a:picLocks noChangeAspect="1"/>
           </p:cNvPicPr>
@@ -8807,7 +9196,7 @@
       </p:pic>
       <p:sp>
         <p:nvSpPr>
-          <p:cNvPr id="758183034" name="Text 21"/>
+          <p:cNvPr id="322786611" name="Text 21"/>
           <p:cNvSpPr/>
           <p:nvPr/>
         </p:nvSpPr>
@@ -8847,7 +9236,7 @@
       </p:sp>
       <p:sp>
         <p:nvSpPr>
-          <p:cNvPr id="965799699" name="Text 22"/>
+          <p:cNvPr id="1475705624" name="Text 22"/>
           <p:cNvSpPr/>
           <p:nvPr/>
         </p:nvSpPr>
@@ -8887,7 +9276,7 @@
       </p:sp>
       <p:sp>
         <p:nvSpPr>
-          <p:cNvPr id="1154854069" name="Shape 23"/>
+          <p:cNvPr id="1132144579" name="Shape 23"/>
           <p:cNvSpPr/>
           <p:nvPr/>
         </p:nvSpPr>
@@ -8919,7 +9308,7 @@
       </p:sp>
       <p:sp>
         <p:nvSpPr>
-          <p:cNvPr id="1552638001" name="Shape 24"/>
+          <p:cNvPr id="596829724" name="Shape 24"/>
           <p:cNvSpPr/>
           <p:nvPr/>
         </p:nvSpPr>
@@ -8951,7 +9340,7 @@
       </p:sp>
       <p:pic>
         <p:nvPicPr>
-          <p:cNvPr id="1514613822" name="Image 5" descr="preencoded.png"/>
+          <p:cNvPr id="129364569" name="Image 5" descr="preencoded.png"/>
           <p:cNvPicPr>
             <a:picLocks noChangeAspect="1"/>
           </p:cNvPicPr>
@@ -8973,7 +9362,7 @@
       </p:pic>
       <p:sp>
         <p:nvSpPr>
-          <p:cNvPr id="103802037" name="Text 25"/>
+          <p:cNvPr id="543406006" name="Text 25"/>
           <p:cNvSpPr/>
           <p:nvPr/>
         </p:nvSpPr>
@@ -9013,7 +9402,7 @@
       </p:sp>
       <p:sp>
         <p:nvSpPr>
-          <p:cNvPr id="1169203306" name="Text 26"/>
+          <p:cNvPr id="1433053959" name="Text 26"/>
           <p:cNvSpPr/>
           <p:nvPr/>
         </p:nvSpPr>
@@ -9053,7 +9442,7 @@
       </p:sp>
       <p:sp>
         <p:nvSpPr>
-          <p:cNvPr id="1093091263" name="Shape 27"/>
+          <p:cNvPr id="1038428951" name="Shape 27"/>
           <p:cNvSpPr/>
           <p:nvPr/>
         </p:nvSpPr>
@@ -9085,7 +9474,7 @@
       </p:sp>
       <p:sp>
         <p:nvSpPr>
-          <p:cNvPr id="511875063" name="Shape 28"/>
+          <p:cNvPr id="1069623255" name="Shape 28"/>
           <p:cNvSpPr/>
           <p:nvPr/>
         </p:nvSpPr>
@@ -9117,7 +9506,7 @@
       </p:sp>
       <p:pic>
         <p:nvPicPr>
-          <p:cNvPr id="623971902" name="Image 6" descr="preencoded.png"/>
+          <p:cNvPr id="2067270700" name="Image 6" descr="preencoded.png"/>
           <p:cNvPicPr>
             <a:picLocks noChangeAspect="1"/>
           </p:cNvPicPr>
@@ -9139,7 +9528,7 @@
       </p:pic>
       <p:sp>
         <p:nvSpPr>
-          <p:cNvPr id="132688729" name="Text 29"/>
+          <p:cNvPr id="1369443392" name="Text 29"/>
           <p:cNvSpPr/>
           <p:nvPr/>
         </p:nvSpPr>
@@ -9179,7 +9568,7 @@
       </p:sp>
       <p:sp>
         <p:nvSpPr>
-          <p:cNvPr id="939847538" name="Text 30"/>
+          <p:cNvPr id="1539534058" name="Text 30"/>
           <p:cNvSpPr/>
           <p:nvPr/>
         </p:nvSpPr>
@@ -9219,7 +9608,7 @@
       </p:sp>
       <p:sp>
         <p:nvSpPr>
-          <p:cNvPr id="534196743" name="Shape 31"/>
+          <p:cNvPr id="256088262" name="Shape 31"/>
           <p:cNvSpPr/>
           <p:nvPr/>
         </p:nvSpPr>
@@ -9251,7 +9640,7 @@
       </p:sp>
       <p:sp>
         <p:nvSpPr>
-          <p:cNvPr id="1649556867" name="Shape 32"/>
+          <p:cNvPr id="1209593193" name="Shape 32"/>
           <p:cNvSpPr/>
           <p:nvPr/>
         </p:nvSpPr>
@@ -9283,7 +9672,7 @@
       </p:sp>
       <p:pic>
         <p:nvPicPr>
-          <p:cNvPr id="1759122984" name="Image 7" descr="preencoded.png"/>
+          <p:cNvPr id="2040371248" name="Image 7" descr="preencoded.png"/>
           <p:cNvPicPr>
             <a:picLocks noChangeAspect="1"/>
           </p:cNvPicPr>
@@ -9305,7 +9694,7 @@
       </p:pic>
       <p:sp>
         <p:nvSpPr>
-          <p:cNvPr id="966720769" name="Text 33"/>
+          <p:cNvPr id="1676617050" name="Text 33"/>
           <p:cNvSpPr/>
           <p:nvPr/>
         </p:nvSpPr>
@@ -9345,7 +9734,7 @@
       </p:sp>
       <p:sp>
         <p:nvSpPr>
-          <p:cNvPr id="758501066" name="Text 34"/>
+          <p:cNvPr id="1048446888" name="Text 34"/>
           <p:cNvSpPr/>
           <p:nvPr/>
         </p:nvSpPr>
@@ -9425,7 +9814,7 @@
       </p:grpSpPr>
       <p:sp>
         <p:nvSpPr>
-          <p:cNvPr id="1496495845" name="Shape 0"/>
+          <p:cNvPr id="717390316" name="Shape 0"/>
           <p:cNvSpPr/>
           <p:nvPr/>
         </p:nvSpPr>
@@ -9450,7 +9839,7 @@
       </p:sp>
       <p:sp>
         <p:nvSpPr>
-          <p:cNvPr id="1921282384" name="Text 1"/>
+          <p:cNvPr id="239266442" name="Text 1"/>
           <p:cNvSpPr/>
           <p:nvPr/>
         </p:nvSpPr>
@@ -9490,7 +9879,7 @@
       </p:sp>
       <p:sp>
         <p:nvSpPr>
-          <p:cNvPr id="1770077668" name="Text 2"/>
+          <p:cNvPr id="1500711037" name="Text 2"/>
           <p:cNvSpPr/>
           <p:nvPr/>
         </p:nvSpPr>
@@ -9530,7 +9919,7 @@
       </p:sp>
       <p:graphicFrame>
         <p:nvGraphicFramePr>
-          <p:cNvPr id="608968546" name="Chart 0"/>
+          <p:cNvPr id="873094541" name="Chart 0"/>
           <p:cNvGraphicFramePr>
             <a:graphicFrameLocks xmlns:a="http://schemas.openxmlformats.org/drawingml/2006/main"/>
           </p:cNvGraphicFramePr>
@@ -9548,7 +9937,7 @@
       </p:graphicFrame>
       <p:sp>
         <p:nvSpPr>
-          <p:cNvPr id="693088669" name="Text 3"/>
+          <p:cNvPr id="346839791" name="Text 3"/>
           <p:cNvSpPr/>
           <p:nvPr/>
         </p:nvSpPr>
@@ -9628,7 +10017,7 @@
       </p:grpSpPr>
       <p:sp>
         <p:nvSpPr>
-          <p:cNvPr id="32890695" name="Shape 0"/>
+          <p:cNvPr id="556177252" name="Shape 0"/>
           <p:cNvSpPr/>
           <p:nvPr/>
         </p:nvSpPr>
@@ -9653,7 +10042,7 @@
       </p:sp>
       <p:sp>
         <p:nvSpPr>
-          <p:cNvPr id="1170533820" name="Text 1"/>
+          <p:cNvPr id="2041879771" name="Text 1"/>
           <p:cNvSpPr/>
           <p:nvPr/>
         </p:nvSpPr>
@@ -9693,7 +10082,7 @@
       </p:sp>
       <p:sp>
         <p:nvSpPr>
-          <p:cNvPr id="262824177" name="Text 2"/>
+          <p:cNvPr id="1929712056" name="Text 2"/>
           <p:cNvSpPr/>
           <p:nvPr/>
         </p:nvSpPr>
@@ -9733,7 +10122,7 @@
       </p:sp>
       <p:sp>
         <p:nvSpPr>
-          <p:cNvPr id="1615004947" name="Shape 3"/>
+          <p:cNvPr id="912357361" name="Shape 3"/>
           <p:cNvSpPr/>
           <p:nvPr/>
         </p:nvSpPr>
@@ -9765,7 +10154,7 @@
       </p:sp>
       <p:sp>
         <p:nvSpPr>
-          <p:cNvPr id="929136915" name="Shape 4"/>
+          <p:cNvPr id="623542034" name="Shape 4"/>
           <p:cNvSpPr/>
           <p:nvPr/>
         </p:nvSpPr>
@@ -9790,7 +10179,7 @@
       </p:sp>
       <p:sp>
         <p:nvSpPr>
-          <p:cNvPr id="1441857189" name="Shape 5"/>
+          <p:cNvPr id="229968380" name="Shape 5"/>
           <p:cNvSpPr/>
           <p:nvPr/>
         </p:nvSpPr>
@@ -9822,7 +10211,7 @@
       </p:sp>
       <p:pic>
         <p:nvPicPr>
-          <p:cNvPr id="1900645659" name="Image 0" descr="preencoded.png"/>
+          <p:cNvPr id="2018477103" name="Image 0" descr="preencoded.png"/>
           <p:cNvPicPr>
             <a:picLocks noChangeAspect="1"/>
           </p:cNvPicPr>
@@ -9844,7 +10233,7 @@
       </p:pic>
       <p:sp>
         <p:nvSpPr>
-          <p:cNvPr id="1447042520" name="Text 6"/>
+          <p:cNvPr id="1714947166" name="Text 6"/>
           <p:cNvSpPr/>
           <p:nvPr/>
         </p:nvSpPr>
@@ -9884,7 +10273,7 @@
       </p:sp>
       <p:sp>
         <p:nvSpPr>
-          <p:cNvPr id="1976198474" name="Text 7"/>
+          <p:cNvPr id="382056365" name="Text 7"/>
           <p:cNvSpPr/>
           <p:nvPr/>
         </p:nvSpPr>
@@ -9924,7 +10313,7 @@
       </p:sp>
       <p:sp>
         <p:nvSpPr>
-          <p:cNvPr id="1418825100" name="Shape 8"/>
+          <p:cNvPr id="1155074966" name="Shape 8"/>
           <p:cNvSpPr/>
           <p:nvPr/>
         </p:nvSpPr>
@@ -9956,7 +10345,7 @@
       </p:sp>
       <p:sp>
         <p:nvSpPr>
-          <p:cNvPr id="785126043" name="Shape 9"/>
+          <p:cNvPr id="1221318961" name="Shape 9"/>
           <p:cNvSpPr/>
           <p:nvPr/>
         </p:nvSpPr>
@@ -9981,7 +10370,7 @@
       </p:sp>
       <p:sp>
         <p:nvSpPr>
-          <p:cNvPr id="595306676" name="Shape 10"/>
+          <p:cNvPr id="1216954477" name="Shape 10"/>
           <p:cNvSpPr/>
           <p:nvPr/>
         </p:nvSpPr>
@@ -10013,7 +10402,7 @@
       </p:sp>
       <p:pic>
         <p:nvPicPr>
-          <p:cNvPr id="77447532" name="Image 1" descr="preencoded.png"/>
+          <p:cNvPr id="1765555076" name="Image 1" descr="preencoded.png"/>
           <p:cNvPicPr>
             <a:picLocks noChangeAspect="1"/>
           </p:cNvPicPr>
@@ -10035,7 +10424,7 @@
       </p:pic>
       <p:sp>
         <p:nvSpPr>
-          <p:cNvPr id="1329390847" name="Text 11"/>
+          <p:cNvPr id="150576868" name="Text 11"/>
           <p:cNvSpPr/>
           <p:nvPr/>
         </p:nvSpPr>
@@ -10075,7 +10464,7 @@
       </p:sp>
       <p:sp>
         <p:nvSpPr>
-          <p:cNvPr id="1392347833" name="Text 12"/>
+          <p:cNvPr id="1775151672" name="Text 12"/>
           <p:cNvSpPr/>
           <p:nvPr/>
         </p:nvSpPr>
@@ -10115,7 +10504,7 @@
       </p:sp>
       <p:sp>
         <p:nvSpPr>
-          <p:cNvPr id="197345563" name="Shape 13"/>
+          <p:cNvPr id="440318474" name="Shape 13"/>
           <p:cNvSpPr/>
           <p:nvPr/>
         </p:nvSpPr>
@@ -10147,7 +10536,7 @@
       </p:sp>
       <p:sp>
         <p:nvSpPr>
-          <p:cNvPr id="819604040" name="Shape 14"/>
+          <p:cNvPr id="301886431" name="Shape 14"/>
           <p:cNvSpPr/>
           <p:nvPr/>
         </p:nvSpPr>
@@ -10172,7 +10561,7 @@
       </p:sp>
       <p:sp>
         <p:nvSpPr>
-          <p:cNvPr id="1855565151" name="Shape 15"/>
+          <p:cNvPr id="2063613986" name="Shape 15"/>
           <p:cNvSpPr/>
           <p:nvPr/>
         </p:nvSpPr>
@@ -10204,7 +10593,7 @@
       </p:sp>
       <p:pic>
         <p:nvPicPr>
-          <p:cNvPr id="1130615543" name="Image 2" descr="preencoded.png"/>
+          <p:cNvPr id="486753661" name="Image 2" descr="preencoded.png"/>
           <p:cNvPicPr>
             <a:picLocks noChangeAspect="1"/>
           </p:cNvPicPr>
@@ -10226,7 +10615,7 @@
       </p:pic>
       <p:sp>
         <p:nvSpPr>
-          <p:cNvPr id="369981292" name="Text 16"/>
+          <p:cNvPr id="758018481" name="Text 16"/>
           <p:cNvSpPr/>
           <p:nvPr/>
         </p:nvSpPr>
@@ -10266,7 +10655,7 @@
       </p:sp>
       <p:sp>
         <p:nvSpPr>
-          <p:cNvPr id="909392587" name="Text 17"/>
+          <p:cNvPr id="1932727345" name="Text 17"/>
           <p:cNvSpPr/>
           <p:nvPr/>
         </p:nvSpPr>
@@ -10306,7 +10695,7 @@
       </p:sp>
       <p:sp>
         <p:nvSpPr>
-          <p:cNvPr id="764854293" name="Shape 18"/>
+          <p:cNvPr id="1147426322" name="Shape 18"/>
           <p:cNvSpPr/>
           <p:nvPr/>
         </p:nvSpPr>
@@ -10338,7 +10727,7 @@
       </p:sp>
       <p:sp>
         <p:nvSpPr>
-          <p:cNvPr id="1950099079" name="Shape 19"/>
+          <p:cNvPr id="1659960054" name="Shape 19"/>
           <p:cNvSpPr/>
           <p:nvPr/>
         </p:nvSpPr>
@@ -10363,7 +10752,7 @@
       </p:sp>
       <p:sp>
         <p:nvSpPr>
-          <p:cNvPr id="1970564086" name="Shape 20"/>
+          <p:cNvPr id="165386631" name="Shape 20"/>
           <p:cNvSpPr/>
           <p:nvPr/>
         </p:nvSpPr>
@@ -10395,7 +10784,7 @@
       </p:sp>
       <p:pic>
         <p:nvPicPr>
-          <p:cNvPr id="1195257798" name="Image 3" descr="preencoded.png"/>
+          <p:cNvPr id="954438867" name="Image 3" descr="preencoded.png"/>
           <p:cNvPicPr>
             <a:picLocks noChangeAspect="1"/>
           </p:cNvPicPr>
@@ -10417,7 +10806,7 @@
       </p:pic>
       <p:sp>
         <p:nvSpPr>
-          <p:cNvPr id="692282868" name="Text 21"/>
+          <p:cNvPr id="1346015015" name="Text 21"/>
           <p:cNvSpPr/>
           <p:nvPr/>
         </p:nvSpPr>
@@ -10457,7 +10846,7 @@
       </p:sp>
       <p:sp>
         <p:nvSpPr>
-          <p:cNvPr id="58178656" name="Text 22"/>
+          <p:cNvPr id="1819758090" name="Text 22"/>
           <p:cNvSpPr/>
           <p:nvPr/>
         </p:nvSpPr>
@@ -10537,7 +10926,7 @@
       </p:grpSpPr>
       <p:sp>
         <p:nvSpPr>
-          <p:cNvPr id="2040461791" name="Shape 0"/>
+          <p:cNvPr id="489323983" name="Shape 0"/>
           <p:cNvSpPr/>
           <p:nvPr/>
         </p:nvSpPr>
@@ -10562,7 +10951,7 @@
       </p:sp>
       <p:sp>
         <p:nvSpPr>
-          <p:cNvPr id="1296334210" name="Text 1"/>
+          <p:cNvPr id="608003837" name="Text 1"/>
           <p:cNvSpPr/>
           <p:nvPr/>
         </p:nvSpPr>
@@ -10602,7 +10991,7 @@
       </p:sp>
       <p:sp>
         <p:nvSpPr>
-          <p:cNvPr id="1944493833" name="Text 2"/>
+          <p:cNvPr id="1068651265" name="Text 2"/>
           <p:cNvSpPr/>
           <p:nvPr/>
         </p:nvSpPr>
@@ -10642,7 +11031,7 @@
       </p:sp>
       <p:sp>
         <p:nvSpPr>
-          <p:cNvPr id="431690153" name="Shape 3"/>
+          <p:cNvPr id="703773205" name="Shape 3"/>
           <p:cNvSpPr/>
           <p:nvPr/>
         </p:nvSpPr>
@@ -10674,7 +11063,7 @@
       </p:sp>
       <p:pic>
         <p:nvPicPr>
-          <p:cNvPr id="1274052136" name="Image 0" descr="preencoded.png"/>
+          <p:cNvPr id="1385330616" name="Image 0" descr="preencoded.png"/>
           <p:cNvPicPr>
             <a:picLocks noChangeAspect="1"/>
           </p:cNvPicPr>
@@ -10696,7 +11085,7 @@
       </p:pic>
       <p:sp>
         <p:nvSpPr>
-          <p:cNvPr id="1610110956" name="Text 4"/>
+          <p:cNvPr id="1942884310" name="Text 4"/>
           <p:cNvSpPr/>
           <p:nvPr/>
         </p:nvSpPr>
@@ -10736,7 +11125,7 @@
       </p:sp>
       <p:sp>
         <p:nvSpPr>
-          <p:cNvPr id="1087353705" name="Text 5"/>
+          <p:cNvPr id="884069955" name="Text 5"/>
           <p:cNvSpPr/>
           <p:nvPr/>
         </p:nvSpPr>
@@ -10776,7 +11165,7 @@
       </p:sp>
       <p:sp>
         <p:nvSpPr>
-          <p:cNvPr id="54125444" name="Shape 6"/>
+          <p:cNvPr id="296399453" name="Shape 6"/>
           <p:cNvSpPr/>
           <p:nvPr/>
         </p:nvSpPr>
@@ -10803,7 +11192,7 @@
       </p:sp>
       <p:sp>
         <p:nvSpPr>
-          <p:cNvPr id="1221445571" name="Text 7"/>
+          <p:cNvPr id="551670812" name="Text 7"/>
           <p:cNvSpPr/>
           <p:nvPr/>
         </p:nvSpPr>
@@ -10843,7 +11232,7 @@
       </p:sp>
       <p:sp>
         <p:nvSpPr>
-          <p:cNvPr id="1637576336" name="Shape 8"/>
+          <p:cNvPr id="1409796084" name="Shape 8"/>
           <p:cNvSpPr/>
           <p:nvPr/>
         </p:nvSpPr>
@@ -10875,7 +11264,7 @@
       </p:sp>
       <p:pic>
         <p:nvPicPr>
-          <p:cNvPr id="435606377" name="Image 1" descr="preencoded.png"/>
+          <p:cNvPr id="325563147" name="Image 1" descr="preencoded.png"/>
           <p:cNvPicPr>
             <a:picLocks noChangeAspect="1"/>
           </p:cNvPicPr>
@@ -10897,7 +11286,7 @@
       </p:pic>
       <p:sp>
         <p:nvSpPr>
-          <p:cNvPr id="171617679" name="Text 9"/>
+          <p:cNvPr id="737509490" name="Text 9"/>
           <p:cNvSpPr/>
           <p:nvPr/>
         </p:nvSpPr>
@@ -10937,7 +11326,7 @@
       </p:sp>
       <p:sp>
         <p:nvSpPr>
-          <p:cNvPr id="1179372716" name="Text 10"/>
+          <p:cNvPr id="1127156283" name="Text 10"/>
           <p:cNvSpPr/>
           <p:nvPr/>
         </p:nvSpPr>
@@ -10977,7 +11366,7 @@
       </p:sp>
       <p:sp>
         <p:nvSpPr>
-          <p:cNvPr id="1084004496" name="Shape 11"/>
+          <p:cNvPr id="515850099" name="Shape 11"/>
           <p:cNvSpPr/>
           <p:nvPr/>
         </p:nvSpPr>
@@ -11004,7 +11393,7 @@
       </p:sp>
       <p:sp>
         <p:nvSpPr>
-          <p:cNvPr id="2108601785" name="Text 12"/>
+          <p:cNvPr id="308012065" name="Text 12"/>
           <p:cNvSpPr/>
           <p:nvPr/>
         </p:nvSpPr>
@@ -11044,7 +11433,7 @@
       </p:sp>
       <p:sp>
         <p:nvSpPr>
-          <p:cNvPr id="595426998" name="Shape 13"/>
+          <p:cNvPr id="448593588" name="Shape 13"/>
           <p:cNvSpPr/>
           <p:nvPr/>
         </p:nvSpPr>
@@ -11076,7 +11465,7 @@
       </p:sp>
       <p:pic>
         <p:nvPicPr>
-          <p:cNvPr id="868252876" name="Image 2" descr="preencoded.png"/>
+          <p:cNvPr id="609617939" name="Image 2" descr="preencoded.png"/>
           <p:cNvPicPr>
             <a:picLocks noChangeAspect="1"/>
           </p:cNvPicPr>
@@ -11098,7 +11487,7 @@
       </p:pic>
       <p:sp>
         <p:nvSpPr>
-          <p:cNvPr id="1396137579" name="Text 14"/>
+          <p:cNvPr id="652622857" name="Text 14"/>
           <p:cNvSpPr/>
           <p:nvPr/>
         </p:nvSpPr>
@@ -11138,7 +11527,7 @@
       </p:sp>
       <p:sp>
         <p:nvSpPr>
-          <p:cNvPr id="1640405110" name="Text 15"/>
+          <p:cNvPr id="940210181" name="Text 15"/>
           <p:cNvSpPr/>
           <p:nvPr/>
         </p:nvSpPr>
@@ -11178,7 +11567,7 @@
       </p:sp>
       <p:sp>
         <p:nvSpPr>
-          <p:cNvPr id="975292991" name="Shape 16"/>
+          <p:cNvPr id="1949826963" name="Shape 16"/>
           <p:cNvSpPr/>
           <p:nvPr/>
         </p:nvSpPr>
@@ -11205,7 +11594,7 @@
       </p:sp>
       <p:sp>
         <p:nvSpPr>
-          <p:cNvPr id="1353651968" name="Text 17"/>
+          <p:cNvPr id="92553090" name="Text 17"/>
           <p:cNvSpPr/>
           <p:nvPr/>
         </p:nvSpPr>
@@ -11245,7 +11634,7 @@
       </p:sp>
       <p:sp>
         <p:nvSpPr>
-          <p:cNvPr id="1137161307" name="Shape 18"/>
+          <p:cNvPr id="1850339526" name="Shape 18"/>
           <p:cNvSpPr/>
           <p:nvPr/>
         </p:nvSpPr>
@@ -11277,7 +11666,7 @@
       </p:sp>
       <p:pic>
         <p:nvPicPr>
-          <p:cNvPr id="1743764533" name="Image 3" descr="preencoded.png"/>
+          <p:cNvPr id="414620494" name="Image 3" descr="preencoded.png"/>
           <p:cNvPicPr>
             <a:picLocks noChangeAspect="1"/>
           </p:cNvPicPr>
@@ -11299,7 +11688,7 @@
       </p:pic>
       <p:sp>
         <p:nvSpPr>
-          <p:cNvPr id="1946314645" name="Text 19"/>
+          <p:cNvPr id="1090591727" name="Text 19"/>
           <p:cNvSpPr/>
           <p:nvPr/>
         </p:nvSpPr>
@@ -11339,7 +11728,7 @@
       </p:sp>
       <p:sp>
         <p:nvSpPr>
-          <p:cNvPr id="884859271" name="Text 20"/>
+          <p:cNvPr id="3939186" name="Text 20"/>
           <p:cNvSpPr/>
           <p:nvPr/>
         </p:nvSpPr>
@@ -11379,7 +11768,7 @@
       </p:sp>
       <p:sp>
         <p:nvSpPr>
-          <p:cNvPr id="157975455" name="Shape 21"/>
+          <p:cNvPr id="1837473834" name="Shape 21"/>
           <p:cNvSpPr/>
           <p:nvPr/>
         </p:nvSpPr>
@@ -11406,7 +11795,7 @@
       </p:sp>
       <p:sp>
         <p:nvSpPr>
-          <p:cNvPr id="1145148207" name="Text 22"/>
+          <p:cNvPr id="1612192206" name="Text 22"/>
           <p:cNvSpPr/>
           <p:nvPr/>
         </p:nvSpPr>
@@ -11446,7 +11835,7 @@
       </p:sp>
       <p:sp>
         <p:nvSpPr>
-          <p:cNvPr id="114313860" name="Text 23"/>
+          <p:cNvPr id="245758843" name="Text 23"/>
           <p:cNvSpPr/>
           <p:nvPr/>
         </p:nvSpPr>
@@ -11519,7 +11908,7 @@
       </p:grpSpPr>
       <p:sp>
         <p:nvSpPr>
-          <p:cNvPr id="192025294" name="Shape 0"/>
+          <p:cNvPr id="662336093" name="Shape 0"/>
           <p:cNvSpPr/>
           <p:nvPr/>
         </p:nvSpPr>
@@ -11544,7 +11933,7 @@
       </p:sp>
       <p:sp>
         <p:nvSpPr>
-          <p:cNvPr id="1894300523" name="Text 1"/>
+          <p:cNvPr id="670576986" name="Text 1"/>
           <p:cNvSpPr/>
           <p:nvPr/>
         </p:nvSpPr>
@@ -11584,7 +11973,7 @@
       </p:sp>
       <p:sp>
         <p:nvSpPr>
-          <p:cNvPr id="1747284253" name=""/>
+          <p:cNvPr id="2120044183" name=""/>
           <p:cNvSpPr/>
           <p:nvPr/>
         </p:nvSpPr>
@@ -11795,7 +12184,7 @@
       </p:sp>
       <p:pic>
         <p:nvPicPr>
-          <p:cNvPr id="2095430978" name=""/>
+          <p:cNvPr id="1219387628" name=""/>
           <p:cNvPicPr>
             <a:picLocks noChangeAspect="1"/>
           </p:cNvPicPr>
